--- a/presentation/Nirikshak.pptx
+++ b/presentation/Nirikshak.pptx
@@ -15,6 +15,10 @@
     <p:sldId id="263" r:id="rId14"/>
     <p:sldId id="264" r:id="rId15"/>
     <p:sldId id="265" r:id="rId16"/>
+    <p:sldId id="266" r:id="rId17"/>
+    <p:sldId id="267" r:id="rId18"/>
+    <p:sldId id="268" r:id="rId19"/>
+    <p:sldId id="269" r:id="rId20"/>
   </p:sldIdLst>
   <p:sldSz cx="12191695" cy="6858000" type="screen4x3"/>
   <p:notesSz cx="6858000" cy="9144000"/>
@@ -3093,7 +3097,7 @@
     <p:bg>
       <p:bgPr>
         <a:solidFill>
-          <a:srgbClr val="0F172A"/>
+          <a:srgbClr val="0B0F1A"/>
         </a:solidFill>
         <a:effectLst/>
       </p:bgPr>
@@ -3105,16 +3109,86 @@
         <p:nvPr/>
       </p:nvGrpSpPr>
       <p:grpSpPr/>
-      <p:sp>
-        <p:nvSpPr>
-          <p:cNvPr id="2" name="TextBox 1"/>
+      <p:pic>
+        <p:nvPicPr>
+          <p:cNvPr id="2" name="Picture 1" descr="crop_0_900_dark.png"/>
+          <p:cNvPicPr>
+            <a:picLocks noChangeAspect="1"/>
+          </p:cNvPicPr>
+          <p:nvPr/>
+        </p:nvPicPr>
+        <p:blipFill>
+          <a:blip r:embed="rId2"/>
+          <a:stretch>
+            <a:fillRect/>
+          </a:stretch>
+        </p:blipFill>
+        <p:spPr>
+          <a:xfrm>
+            <a:off x="5669280" y="0"/>
+            <a:ext cx="8839200" cy="6858000"/>
+          </a:xfrm>
+          <a:prstGeom prst="rect">
+            <a:avLst/>
+          </a:prstGeom>
+          <a:ln>
+            <a:noFill/>
+          </a:ln>
+        </p:spPr>
+      </p:pic>
+      <p:sp>
+        <p:nvSpPr>
+          <p:cNvPr id="3" name="Rectangle 2"/>
+          <p:cNvSpPr/>
+          <p:nvPr/>
+        </p:nvSpPr>
+        <p:spPr>
+          <a:xfrm>
+            <a:off x="0" y="0"/>
+            <a:ext cx="6766560" cy="6858000"/>
+          </a:xfrm>
+          <a:prstGeom prst="rect">
+            <a:avLst/>
+          </a:prstGeom>
+          <a:solidFill>
+            <a:srgbClr val="0B0F1A"/>
+          </a:solidFill>
+          <a:ln>
+            <a:noFill/>
+          </a:ln>
+        </p:spPr>
+        <p:style>
+          <a:lnRef idx="1">
+            <a:schemeClr val="accent1"/>
+          </a:lnRef>
+          <a:fillRef idx="3">
+            <a:schemeClr val="accent1"/>
+          </a:fillRef>
+          <a:effectRef idx="2">
+            <a:schemeClr val="accent1"/>
+          </a:effectRef>
+          <a:fontRef idx="minor">
+            <a:schemeClr val="lt1"/>
+          </a:fontRef>
+        </p:style>
+        <p:txBody>
+          <a:bodyPr rtlCol="0" anchor="ctr"/>
+          <a:lstStyle/>
+          <a:p>
+            <a:pPr algn="ctr"/>
+          </a:p>
+        </p:txBody>
+      </p:sp>
+      <p:sp>
+        <p:nvSpPr>
+          <p:cNvPr id="4" name="TextBox 3"/>
           <p:cNvSpPr txBox="1"/>
           <p:nvPr/>
         </p:nvSpPr>
         <p:spPr>
           <a:xfrm>
-            <a:off x="822960" y="1280160"/>
-            <a:ext cx="10058400" cy="457200"/>
+            <a:off x="640080" y="1097280"/>
+            <a:ext cx="5943600" cy="365760"/>
           </a:xfrm>
           <a:prstGeom prst="rect">
             <a:avLst/>
@@ -3129,31 +3203,31 @@
           <a:p>
             <a:pPr>
               <a:spcAft>
-                <a:spcPts val="400"/>
-              </a:spcAft>
-              <a:defRPr sz="1400" b="1">
-                <a:solidFill>
-                  <a:srgbClr val="F59E0B"/>
-                </a:solidFill>
-                <a:latin typeface="Inter"/>
-              </a:defRPr>
-            </a:pPr>
-            <a:r>
-              <a:t>SANGYAN 2026  ·  TRACK E: MISINFORMATION &amp; CONTENT LITERACY</a:t>
-            </a:r>
-          </a:p>
-        </p:txBody>
-      </p:sp>
-      <p:sp>
-        <p:nvSpPr>
-          <p:cNvPr id="3" name="TextBox 2"/>
+                <a:spcPts val="800"/>
+              </a:spcAft>
+            </a:pPr>
+            <a:r>
+              <a:rPr sz="1300" b="1">
+                <a:solidFill>
+                  <a:srgbClr val="FF7A1A"/>
+                </a:solidFill>
+                <a:latin typeface="Inter"/>
+              </a:rPr>
+              <a:t>SANGYAN 2026  ·  TRACK A + TRACK E</a:t>
+            </a:r>
+          </a:p>
+        </p:txBody>
+      </p:sp>
+      <p:sp>
+        <p:nvSpPr>
+          <p:cNvPr id="5" name="TextBox 4"/>
           <p:cNvSpPr txBox="1"/>
           <p:nvPr/>
         </p:nvSpPr>
         <p:spPr>
           <a:xfrm>
-            <a:off x="822960" y="1828800"/>
-            <a:ext cx="10058400" cy="1280160"/>
+            <a:off x="640080" y="1600200"/>
+            <a:ext cx="5943600" cy="1188720"/>
           </a:xfrm>
           <a:prstGeom prst="rect">
             <a:avLst/>
@@ -3168,16 +3242,16 @@
           <a:p>
             <a:pPr>
               <a:spcAft>
-                <a:spcPts val="400"/>
-              </a:spcAft>
-              <a:defRPr sz="6400" b="1">
+                <a:spcPts val="800"/>
+              </a:spcAft>
+            </a:pPr>
+            <a:r>
+              <a:rPr sz="4600" b="1">
                 <a:solidFill>
                   <a:srgbClr val="FFFFFF"/>
                 </a:solidFill>
                 <a:latin typeface="Inter"/>
-              </a:defRPr>
-            </a:pPr>
-            <a:r>
+              </a:rPr>
               <a:t>Nirikshak  निरीक्षक</a:t>
             </a:r>
           </a:p>
@@ -3185,14 +3259,14 @@
       </p:sp>
       <p:sp>
         <p:nvSpPr>
-          <p:cNvPr id="4" name="TextBox 3"/>
+          <p:cNvPr id="6" name="TextBox 5"/>
           <p:cNvSpPr txBox="1"/>
           <p:nvPr/>
         </p:nvSpPr>
         <p:spPr>
           <a:xfrm>
-            <a:off x="822960" y="3108960"/>
-            <a:ext cx="10515600" cy="1463040"/>
+            <a:off x="640080" y="2788920"/>
+            <a:ext cx="5852160" cy="1645920"/>
           </a:xfrm>
           <a:prstGeom prst="rect">
             <a:avLst/>
@@ -3207,47 +3281,47 @@
           <a:p>
             <a:pPr>
               <a:spcAft>
-                <a:spcPts val="400"/>
-              </a:spcAft>
-              <a:defRPr sz="2400" b="0">
-                <a:solidFill>
-                  <a:srgbClr val="CBD5E1"/>
-                </a:solidFill>
-                <a:latin typeface="Inter"/>
-              </a:defRPr>
-            </a:pPr>
-            <a:r>
-              <a:t>A local-first AI auditor for finance-influencer videos.</a:t>
-            </a:r>
-          </a:p>
-          <a:p>
-            <a:pPr>
-              <a:spcAft>
-                <a:spcPts val="400"/>
-              </a:spcAft>
-              <a:defRPr sz="2400" b="0">
-                <a:solidFill>
-                  <a:srgbClr val="CBD5E1"/>
-                </a:solidFill>
-                <a:latin typeface="Inter"/>
-              </a:defRPr>
-            </a:pPr>
-            <a:r>
-              <a:t>Timestamped red flags · real SEBI registry check · English + Hindi · no cloud AI</a:t>
-            </a:r>
-          </a:p>
-        </p:txBody>
-      </p:sp>
-      <p:sp>
-        <p:nvSpPr>
-          <p:cNvPr id="5" name="TextBox 4"/>
+                <a:spcPts val="1000"/>
+              </a:spcAft>
+            </a:pPr>
+            <a:r>
+              <a:rPr sz="1800" b="0">
+                <a:solidFill>
+                  <a:srgbClr val="D8DCE6"/>
+                </a:solidFill>
+                <a:latin typeface="Inter"/>
+              </a:rPr>
+              <a:t>Check before you trust.</a:t>
+            </a:r>
+          </a:p>
+          <a:p>
+            <a:pPr>
+              <a:spcAft>
+                <a:spcPts val="1000"/>
+              </a:spcAft>
+            </a:pPr>
+            <a:r>
+              <a:rPr sz="1800" b="0">
+                <a:solidFill>
+                  <a:srgbClr val="D8DCE6"/>
+                </a:solidFill>
+                <a:latin typeface="Inter"/>
+              </a:rPr>
+              <a:t>An investor-protection auditor for forwarded WhatsApp tips, finfluencer videos and the creators behind them, checked against SEBI's registers, in Hindi and English.</a:t>
+            </a:r>
+          </a:p>
+        </p:txBody>
+      </p:sp>
+      <p:sp>
+        <p:nvSpPr>
+          <p:cNvPr id="7" name="TextBox 6"/>
           <p:cNvSpPr txBox="1"/>
           <p:nvPr/>
         </p:nvSpPr>
         <p:spPr>
           <a:xfrm>
-            <a:off x="822960" y="5760720"/>
-            <a:ext cx="10058400" cy="457200"/>
+            <a:off x="640080" y="5120640"/>
+            <a:ext cx="5852160" cy="914400"/>
           </a:xfrm>
           <a:prstGeom prst="rect">
             <a:avLst/>
@@ -3262,16 +3336,50 @@
           <a:p>
             <a:pPr>
               <a:spcAft>
-                <a:spcPts val="400"/>
-              </a:spcAft>
-              <a:defRPr sz="1600" b="0">
-                <a:solidFill>
-                  <a:srgbClr val="F59E0B"/>
-                </a:solidFill>
-                <a:latin typeface="Inter"/>
-              </a:defRPr>
-            </a:pPr>
-            <a:r>
+                <a:spcPts val="600"/>
+              </a:spcAft>
+            </a:pPr>
+            <a:r>
+              <a:rPr sz="1400" b="1">
+                <a:solidFill>
+                  <a:srgbClr val="FF7A1A"/>
+                </a:solidFill>
+                <a:latin typeface="Inter"/>
+              </a:rPr>
+              <a:t>Live demo  </a:t>
+            </a:r>
+            <a:r>
+              <a:rPr sz="1400" b="0">
+                <a:solidFill>
+                  <a:srgbClr val="FFFFFF"/>
+                </a:solidFill>
+                <a:latin typeface="Inter"/>
+              </a:rPr>
+              <a:t>huggingface.co/spaces/…/nirikshak</a:t>
+            </a:r>
+          </a:p>
+          <a:p>
+            <a:pPr>
+              <a:spcAft>
+                <a:spcPts val="600"/>
+              </a:spcAft>
+            </a:pPr>
+            <a:r>
+              <a:rPr sz="1400" b="1">
+                <a:solidFill>
+                  <a:srgbClr val="FF7A1A"/>
+                </a:solidFill>
+                <a:latin typeface="Inter"/>
+              </a:rPr>
+              <a:t>Code  </a:t>
+            </a:r>
+            <a:r>
+              <a:rPr sz="1400" b="0">
+                <a:solidFill>
+                  <a:srgbClr val="FFFFFF"/>
+                </a:solidFill>
+                <a:latin typeface="Inter"/>
+              </a:rPr>
               <a:t>github.com/RudraPandit0504/nirikshak</a:t>
             </a:r>
           </a:p>
@@ -3291,7 +3399,7 @@
     <p:bg>
       <p:bgPr>
         <a:solidFill>
-          <a:srgbClr val="0F172A"/>
+          <a:srgbClr val="F6F4FB"/>
         </a:solidFill>
         <a:effectLst/>
       </p:bgPr>
@@ -3305,14 +3413,65 @@
       <p:grpSpPr/>
       <p:sp>
         <p:nvSpPr>
-          <p:cNvPr id="2" name="TextBox 1"/>
+          <p:cNvPr id="2" name="Rectangle 1"/>
+          <p:cNvSpPr/>
+          <p:nvPr/>
+        </p:nvSpPr>
+        <p:spPr>
+          <a:xfrm>
+            <a:off x="0" y="0"/>
+            <a:ext cx="12191695" cy="82296"/>
+          </a:xfrm>
+          <a:prstGeom prst="rect">
+            <a:avLst/>
+          </a:prstGeom>
+          <a:gradFill rotWithShape="1">
+            <a:gsLst>
+              <a:gs pos="0">
+                <a:srgbClr val="FF7A1A"/>
+              </a:gs>
+              <a:gs pos="100000">
+                <a:srgbClr val="7C4DFF"/>
+              </a:gs>
+            </a:gsLst>
+            <a:lin scaled="0" ang="0"/>
+          </a:gradFill>
+          <a:ln>
+            <a:noFill/>
+          </a:ln>
+        </p:spPr>
+        <p:style>
+          <a:lnRef idx="1">
+            <a:schemeClr val="accent1"/>
+          </a:lnRef>
+          <a:fillRef idx="3">
+            <a:schemeClr val="accent1"/>
+          </a:fillRef>
+          <a:effectRef idx="2">
+            <a:schemeClr val="accent1"/>
+          </a:effectRef>
+          <a:fontRef idx="minor">
+            <a:schemeClr val="lt1"/>
+          </a:fontRef>
+        </p:style>
+        <p:txBody>
+          <a:bodyPr rtlCol="0" anchor="ctr"/>
+          <a:lstStyle/>
+          <a:p>
+            <a:pPr algn="ctr"/>
+          </a:p>
+        </p:txBody>
+      </p:sp>
+      <p:sp>
+        <p:nvSpPr>
+          <p:cNvPr id="3" name="TextBox 2"/>
           <p:cNvSpPr txBox="1"/>
           <p:nvPr/>
         </p:nvSpPr>
         <p:spPr>
           <a:xfrm>
-            <a:off x="822960" y="2103120"/>
-            <a:ext cx="10972800" cy="1097280"/>
+            <a:off x="548640" y="320040"/>
+            <a:ext cx="10972800" cy="365760"/>
           </a:xfrm>
           <a:prstGeom prst="rect">
             <a:avLst/>
@@ -3327,31 +3486,31 @@
           <a:p>
             <a:pPr>
               <a:spcAft>
-                <a:spcPts val="400"/>
-              </a:spcAft>
-              <a:defRPr sz="4000" b="1">
-                <a:solidFill>
-                  <a:srgbClr val="FFFFFF"/>
-                </a:solidFill>
-                <a:latin typeface="Inter"/>
-              </a:defRPr>
-            </a:pPr>
-            <a:r>
-              <a:t>Watch the claim. Check the speaker.</a:t>
-            </a:r>
-          </a:p>
-        </p:txBody>
-      </p:sp>
-      <p:sp>
-        <p:nvSpPr>
-          <p:cNvPr id="3" name="TextBox 2"/>
+                <a:spcPts val="800"/>
+              </a:spcAft>
+            </a:pPr>
+            <a:r>
+              <a:rPr sz="1200" b="1">
+                <a:solidFill>
+                  <a:srgbClr val="FF7A1A"/>
+                </a:solidFill>
+                <a:latin typeface="Inter"/>
+              </a:rPr>
+              <a:t>CREATOR TRUST PROFILE</a:t>
+            </a:r>
+          </a:p>
+        </p:txBody>
+      </p:sp>
+      <p:sp>
+        <p:nvSpPr>
+          <p:cNvPr id="4" name="TextBox 3"/>
           <p:cNvSpPr txBox="1"/>
           <p:nvPr/>
         </p:nvSpPr>
         <p:spPr>
           <a:xfrm>
-            <a:off x="822960" y="3474720"/>
-            <a:ext cx="10058400" cy="1097280"/>
+            <a:off x="548640" y="594360"/>
+            <a:ext cx="11155680" cy="914400"/>
           </a:xfrm>
           <a:prstGeom prst="rect">
             <a:avLst/>
@@ -3366,31 +3525,60 @@
           <a:p>
             <a:pPr>
               <a:spcAft>
-                <a:spcPts val="400"/>
-              </a:spcAft>
-              <a:defRPr sz="2400" b="0">
-                <a:solidFill>
-                  <a:srgbClr val="F59E0B"/>
-                </a:solidFill>
-                <a:latin typeface="Inter"/>
-              </a:defRPr>
-            </a:pPr>
-            <a:r>
-              <a:t>github.com/RudraPandit0504/nirikshak</a:t>
-            </a:r>
-          </a:p>
-        </p:txBody>
-      </p:sp>
-      <p:sp>
-        <p:nvSpPr>
-          <p:cNvPr id="4" name="TextBox 3"/>
+                <a:spcPts val="800"/>
+              </a:spcAft>
+            </a:pPr>
+            <a:r>
+              <a:rPr sz="3000" b="1">
+                <a:solidFill>
+                  <a:srgbClr val="0B1220"/>
+                </a:solidFill>
+                <a:latin typeface="Inter"/>
+              </a:rPr>
+              <a:t>One video can be an outlier; the pattern is the warning</a:t>
+            </a:r>
+          </a:p>
+        </p:txBody>
+      </p:sp>
+      <p:pic>
+        <p:nvPicPr>
+          <p:cNvPr id="5" name="Picture 4" descr="crop_120_1000_profile.png"/>
+          <p:cNvPicPr>
+            <a:picLocks noChangeAspect="1"/>
+          </p:cNvPicPr>
+          <p:nvPr/>
+        </p:nvPicPr>
+        <p:blipFill>
+          <a:blip r:embed="rId2"/>
+          <a:stretch>
+            <a:fillRect/>
+          </a:stretch>
+        </p:blipFill>
+        <p:spPr>
+          <a:xfrm>
+            <a:off x="548640" y="1463040"/>
+            <a:ext cx="6949440" cy="5271989"/>
+          </a:xfrm>
+          <a:prstGeom prst="rect">
+            <a:avLst/>
+          </a:prstGeom>
+          <a:ln>
+            <a:solidFill>
+              <a:srgbClr val="DDDAE8"/>
+            </a:solidFill>
+          </a:ln>
+        </p:spPr>
+      </p:pic>
+      <p:sp>
+        <p:nvSpPr>
+          <p:cNvPr id="6" name="TextBox 5"/>
           <p:cNvSpPr txBox="1"/>
           <p:nvPr/>
         </p:nvSpPr>
         <p:spPr>
           <a:xfrm>
-            <a:off x="822960" y="5760720"/>
-            <a:ext cx="10058400" cy="548640"/>
+            <a:off x="7772400" y="1554480"/>
+            <a:ext cx="4023360" cy="5029200"/>
           </a:xfrm>
           <a:prstGeom prst="rect">
             <a:avLst/>
@@ -3405,16 +3593,2693 @@
           <a:p>
             <a:pPr>
               <a:spcAft>
-                <a:spcPts val="400"/>
-              </a:spcAft>
-              <a:defRPr sz="1400" b="0">
-                <a:solidFill>
-                  <a:srgbClr val="CBD5E1"/>
-                </a:solidFill>
-                <a:latin typeface="Inter"/>
-              </a:defRPr>
-            </a:pPr>
-            <a:r>
+                <a:spcPts val="1000"/>
+              </a:spcAft>
+            </a:pPr>
+            <a:r>
+              <a:rPr sz="1500" b="1">
+                <a:solidFill>
+                  <a:srgbClr val="FF7A1A"/>
+                </a:solidFill>
+                <a:latin typeface="Inter"/>
+              </a:rPr>
+              <a:t>•  </a:t>
+            </a:r>
+            <a:r>
+              <a:rPr sz="1500" b="0">
+                <a:solidFill>
+                  <a:srgbClr val="3B4559"/>
+                </a:solidFill>
+                <a:latin typeface="Inter"/>
+              </a:rPr>
+              <a:t>Audits a channel's latest uploads (re-using earlier audits)</a:t>
+            </a:r>
+          </a:p>
+          <a:p>
+            <a:pPr>
+              <a:spcAft>
+                <a:spcPts val="1000"/>
+              </a:spcAft>
+            </a:pPr>
+            <a:r>
+              <a:rPr sz="1500" b="1">
+                <a:solidFill>
+                  <a:srgbClr val="FF7A1A"/>
+                </a:solidFill>
+                <a:latin typeface="Inter"/>
+              </a:rPr>
+              <a:t>•  </a:t>
+            </a:r>
+            <a:r>
+              <a:rPr sz="1500" b="0">
+                <a:solidFill>
+                  <a:srgbClr val="3B4559"/>
+                </a:solidFill>
+                <a:latin typeface="Inter"/>
+              </a:rPr>
+              <a:t>Example: all 5 recent videos high risk, all push a paid Telegram group, 2 promise guaranteed returns, not registered</a:t>
+            </a:r>
+          </a:p>
+          <a:p>
+            <a:pPr>
+              <a:spcAft>
+                <a:spcPts val="1000"/>
+              </a:spcAft>
+            </a:pPr>
+            <a:r>
+              <a:rPr sz="1500" b="1">
+                <a:solidFill>
+                  <a:srgbClr val="FF7A1A"/>
+                </a:solidFill>
+                <a:latin typeface="Inter"/>
+              </a:rPr>
+              <a:t>•  </a:t>
+            </a:r>
+            <a:r>
+              <a:rPr sz="1500" b="0">
+                <a:solidFill>
+                  <a:srgbClr val="3B4559"/>
+                </a:solidFill>
+                <a:latin typeface="Inter"/>
+              </a:rPr>
+              <a:t>Contrast: a SEBI-registered research analyst: verified, low risk across recent videos</a:t>
+            </a:r>
+          </a:p>
+          <a:p>
+            <a:pPr>
+              <a:spcAft>
+                <a:spcPts val="1000"/>
+              </a:spcAft>
+            </a:pPr>
+            <a:r>
+              <a:rPr sz="1500" b="1">
+                <a:solidFill>
+                  <a:srgbClr val="FF7A1A"/>
+                </a:solidFill>
+                <a:latin typeface="Inter"/>
+              </a:rPr>
+              <a:t>•  </a:t>
+            </a:r>
+            <a:r>
+              <a:rPr sz="1500" b="0">
+                <a:solidFill>
+                  <a:srgbClr val="3B4559"/>
+                </a:solidFill>
+                <a:latin typeface="Inter"/>
+              </a:rPr>
+              <a:t>Helps users decide whom to follow, not what to buy</a:t>
+            </a:r>
+          </a:p>
+        </p:txBody>
+      </p:sp>
+    </p:spTree>
+  </p:cSld>
+  <p:clrMapOvr>
+    <a:masterClrMapping/>
+  </p:clrMapOvr>
+</p:sld>
+</file>
+
+<file path=ppt/slides/slide11.xml><?xml version="1.0" encoding="utf-8"?>
+<p:sld xmlns:a="http://schemas.openxmlformats.org/drawingml/2006/main" xmlns:p="http://schemas.openxmlformats.org/presentationml/2006/main" xmlns:r="http://schemas.openxmlformats.org/officeDocument/2006/relationships">
+  <p:cSld>
+    <p:bg>
+      <p:bgPr>
+        <a:solidFill>
+          <a:srgbClr val="F6F4FB"/>
+        </a:solidFill>
+        <a:effectLst/>
+      </p:bgPr>
+    </p:bg>
+    <p:spTree>
+      <p:nvGrpSpPr>
+        <p:cNvPr id="1" name=""/>
+        <p:cNvGrpSpPr/>
+        <p:nvPr/>
+      </p:nvGrpSpPr>
+      <p:grpSpPr/>
+      <p:sp>
+        <p:nvSpPr>
+          <p:cNvPr id="2" name="Rectangle 1"/>
+          <p:cNvSpPr/>
+          <p:nvPr/>
+        </p:nvSpPr>
+        <p:spPr>
+          <a:xfrm>
+            <a:off x="0" y="0"/>
+            <a:ext cx="12191695" cy="82296"/>
+          </a:xfrm>
+          <a:prstGeom prst="rect">
+            <a:avLst/>
+          </a:prstGeom>
+          <a:gradFill rotWithShape="1">
+            <a:gsLst>
+              <a:gs pos="0">
+                <a:srgbClr val="FF7A1A"/>
+              </a:gs>
+              <a:gs pos="100000">
+                <a:srgbClr val="7C4DFF"/>
+              </a:gs>
+            </a:gsLst>
+            <a:lin scaled="0" ang="0"/>
+          </a:gradFill>
+          <a:ln>
+            <a:noFill/>
+          </a:ln>
+        </p:spPr>
+        <p:style>
+          <a:lnRef idx="1">
+            <a:schemeClr val="accent1"/>
+          </a:lnRef>
+          <a:fillRef idx="3">
+            <a:schemeClr val="accent1"/>
+          </a:fillRef>
+          <a:effectRef idx="2">
+            <a:schemeClr val="accent1"/>
+          </a:effectRef>
+          <a:fontRef idx="minor">
+            <a:schemeClr val="lt1"/>
+          </a:fontRef>
+        </p:style>
+        <p:txBody>
+          <a:bodyPr rtlCol="0" anchor="ctr"/>
+          <a:lstStyle/>
+          <a:p>
+            <a:pPr algn="ctr"/>
+          </a:p>
+        </p:txBody>
+      </p:sp>
+      <p:sp>
+        <p:nvSpPr>
+          <p:cNvPr id="3" name="TextBox 2"/>
+          <p:cNvSpPr txBox="1"/>
+          <p:nvPr/>
+        </p:nvSpPr>
+        <p:spPr>
+          <a:xfrm>
+            <a:off x="548640" y="320040"/>
+            <a:ext cx="10972800" cy="365760"/>
+          </a:xfrm>
+          <a:prstGeom prst="rect">
+            <a:avLst/>
+          </a:prstGeom>
+          <a:noFill/>
+        </p:spPr>
+        <p:txBody>
+          <a:bodyPr wrap="square">
+            <a:spAutoFit/>
+          </a:bodyPr>
+          <a:lstStyle/>
+          <a:p>
+            <a:pPr>
+              <a:spcAft>
+                <a:spcPts val="800"/>
+              </a:spcAft>
+            </a:pPr>
+            <a:r>
+              <a:rPr sz="1200" b="1">
+                <a:solidFill>
+                  <a:srgbClr val="FF7A1A"/>
+                </a:solidFill>
+                <a:latin typeface="Inter"/>
+              </a:rPr>
+              <a:t>TECHNOLOGY</a:t>
+            </a:r>
+          </a:p>
+        </p:txBody>
+      </p:sp>
+      <p:sp>
+        <p:nvSpPr>
+          <p:cNvPr id="4" name="TextBox 3"/>
+          <p:cNvSpPr txBox="1"/>
+          <p:nvPr/>
+        </p:nvSpPr>
+        <p:spPr>
+          <a:xfrm>
+            <a:off x="548640" y="594360"/>
+            <a:ext cx="11155680" cy="914400"/>
+          </a:xfrm>
+          <a:prstGeom prst="rect">
+            <a:avLst/>
+          </a:prstGeom>
+          <a:noFill/>
+        </p:spPr>
+        <p:txBody>
+          <a:bodyPr wrap="square">
+            <a:spAutoFit/>
+          </a:bodyPr>
+          <a:lstStyle/>
+          <a:p>
+            <a:pPr>
+              <a:spcAft>
+                <a:spcPts val="800"/>
+              </a:spcAft>
+            </a:pPr>
+            <a:r>
+              <a:rPr sz="3000" b="1">
+                <a:solidFill>
+                  <a:srgbClr val="0B1220"/>
+                </a:solidFill>
+                <a:latin typeface="Inter"/>
+              </a:rPr>
+              <a:t>AI used where it matters, guarded by checks</a:t>
+            </a:r>
+          </a:p>
+        </p:txBody>
+      </p:sp>
+      <p:sp>
+        <p:nvSpPr>
+          <p:cNvPr id="5" name="Rounded Rectangle 4"/>
+          <p:cNvSpPr/>
+          <p:nvPr/>
+        </p:nvSpPr>
+        <p:spPr>
+          <a:xfrm>
+            <a:off x="548640" y="1737360"/>
+            <a:ext cx="1691640" cy="1737360"/>
+          </a:xfrm>
+          <a:prstGeom prst="roundRect">
+            <a:avLst>
+              <a:gd name="adj" fmla="val 12000"/>
+            </a:avLst>
+          </a:prstGeom>
+          <a:solidFill>
+            <a:srgbClr val="FFFFFF"/>
+          </a:solidFill>
+          <a:ln>
+            <a:solidFill>
+              <a:srgbClr val="E4E1EE"/>
+            </a:solidFill>
+          </a:ln>
+        </p:spPr>
+        <p:style>
+          <a:lnRef idx="1">
+            <a:schemeClr val="accent1"/>
+          </a:lnRef>
+          <a:fillRef idx="3">
+            <a:schemeClr val="accent1"/>
+          </a:fillRef>
+          <a:effectRef idx="2">
+            <a:schemeClr val="accent1"/>
+          </a:effectRef>
+          <a:fontRef idx="minor">
+            <a:schemeClr val="lt1"/>
+          </a:fontRef>
+        </p:style>
+        <p:txBody>
+          <a:bodyPr rtlCol="0" anchor="ctr"/>
+          <a:lstStyle/>
+          <a:p>
+            <a:pPr algn="ctr"/>
+          </a:p>
+        </p:txBody>
+      </p:sp>
+      <p:sp>
+        <p:nvSpPr>
+          <p:cNvPr id="6" name="TextBox 5"/>
+          <p:cNvSpPr txBox="1"/>
+          <p:nvPr/>
+        </p:nvSpPr>
+        <p:spPr>
+          <a:xfrm>
+            <a:off x="658368" y="1828800"/>
+            <a:ext cx="1508760" cy="457200"/>
+          </a:xfrm>
+          <a:prstGeom prst="rect">
+            <a:avLst/>
+          </a:prstGeom>
+          <a:noFill/>
+        </p:spPr>
+        <p:txBody>
+          <a:bodyPr wrap="square">
+            <a:spAutoFit/>
+          </a:bodyPr>
+          <a:lstStyle/>
+          <a:p>
+            <a:pPr>
+              <a:spcAft>
+                <a:spcPts val="800"/>
+              </a:spcAft>
+            </a:pPr>
+            <a:r>
+              <a:rPr sz="1600" b="1">
+                <a:solidFill>
+                  <a:srgbClr val="0B1220"/>
+                </a:solidFill>
+                <a:latin typeface="Inter"/>
+              </a:rPr>
+              <a:t>Input</a:t>
+            </a:r>
+          </a:p>
+        </p:txBody>
+      </p:sp>
+      <p:sp>
+        <p:nvSpPr>
+          <p:cNvPr id="7" name="TextBox 6"/>
+          <p:cNvSpPr txBox="1"/>
+          <p:nvPr/>
+        </p:nvSpPr>
+        <p:spPr>
+          <a:xfrm>
+            <a:off x="658368" y="2331720"/>
+            <a:ext cx="1508760" cy="1097280"/>
+          </a:xfrm>
+          <a:prstGeom prst="rect">
+            <a:avLst/>
+          </a:prstGeom>
+          <a:noFill/>
+        </p:spPr>
+        <p:txBody>
+          <a:bodyPr wrap="square">
+            <a:spAutoFit/>
+          </a:bodyPr>
+          <a:lstStyle/>
+          <a:p>
+            <a:pPr>
+              <a:spcAft>
+                <a:spcPts val="200"/>
+              </a:spcAft>
+            </a:pPr>
+            <a:r>
+              <a:rPr sz="1100" b="0">
+                <a:solidFill>
+                  <a:srgbClr val="3B4559"/>
+                </a:solidFill>
+                <a:latin typeface="Inter"/>
+              </a:rPr>
+              <a:t>YouTube captions · Whisper</a:t>
+            </a:r>
+          </a:p>
+          <a:p>
+            <a:pPr>
+              <a:spcAft>
+                <a:spcPts val="200"/>
+              </a:spcAft>
+            </a:pPr>
+            <a:r>
+              <a:rPr sz="1100" b="0">
+                <a:solidFill>
+                  <a:srgbClr val="3B4559"/>
+                </a:solidFill>
+                <a:latin typeface="Inter"/>
+              </a:rPr>
+              <a:t>(local) · screenshot OCR</a:t>
+            </a:r>
+          </a:p>
+        </p:txBody>
+      </p:sp>
+      <p:sp>
+        <p:nvSpPr>
+          <p:cNvPr id="8" name="Rounded Rectangle 7"/>
+          <p:cNvSpPr/>
+          <p:nvPr/>
+        </p:nvSpPr>
+        <p:spPr>
+          <a:xfrm>
+            <a:off x="2468880" y="1737360"/>
+            <a:ext cx="1691640" cy="1737360"/>
+          </a:xfrm>
+          <a:prstGeom prst="roundRect">
+            <a:avLst>
+              <a:gd name="adj" fmla="val 12000"/>
+            </a:avLst>
+          </a:prstGeom>
+          <a:solidFill>
+            <a:srgbClr val="FFFFFF"/>
+          </a:solidFill>
+          <a:ln>
+            <a:solidFill>
+              <a:srgbClr val="E4E1EE"/>
+            </a:solidFill>
+          </a:ln>
+        </p:spPr>
+        <p:style>
+          <a:lnRef idx="1">
+            <a:schemeClr val="accent1"/>
+          </a:lnRef>
+          <a:fillRef idx="3">
+            <a:schemeClr val="accent1"/>
+          </a:fillRef>
+          <a:effectRef idx="2">
+            <a:schemeClr val="accent1"/>
+          </a:effectRef>
+          <a:fontRef idx="minor">
+            <a:schemeClr val="lt1"/>
+          </a:fontRef>
+        </p:style>
+        <p:txBody>
+          <a:bodyPr rtlCol="0" anchor="ctr"/>
+          <a:lstStyle/>
+          <a:p>
+            <a:pPr algn="ctr"/>
+          </a:p>
+        </p:txBody>
+      </p:sp>
+      <p:sp>
+        <p:nvSpPr>
+          <p:cNvPr id="9" name="TextBox 8"/>
+          <p:cNvSpPr txBox="1"/>
+          <p:nvPr/>
+        </p:nvSpPr>
+        <p:spPr>
+          <a:xfrm>
+            <a:off x="2578608" y="1828800"/>
+            <a:ext cx="1508760" cy="457200"/>
+          </a:xfrm>
+          <a:prstGeom prst="rect">
+            <a:avLst/>
+          </a:prstGeom>
+          <a:noFill/>
+        </p:spPr>
+        <p:txBody>
+          <a:bodyPr wrap="square">
+            <a:spAutoFit/>
+          </a:bodyPr>
+          <a:lstStyle/>
+          <a:p>
+            <a:pPr>
+              <a:spcAft>
+                <a:spcPts val="800"/>
+              </a:spcAft>
+            </a:pPr>
+            <a:r>
+              <a:rPr sz="1600" b="1">
+                <a:solidFill>
+                  <a:srgbClr val="0B1220"/>
+                </a:solidFill>
+                <a:latin typeface="Inter"/>
+              </a:rPr>
+              <a:t>Scan</a:t>
+            </a:r>
+          </a:p>
+        </p:txBody>
+      </p:sp>
+      <p:sp>
+        <p:nvSpPr>
+          <p:cNvPr id="10" name="TextBox 9"/>
+          <p:cNvSpPr txBox="1"/>
+          <p:nvPr/>
+        </p:nvSpPr>
+        <p:spPr>
+          <a:xfrm>
+            <a:off x="2578608" y="2331720"/>
+            <a:ext cx="1508760" cy="1097280"/>
+          </a:xfrm>
+          <a:prstGeom prst="rect">
+            <a:avLst/>
+          </a:prstGeom>
+          <a:noFill/>
+        </p:spPr>
+        <p:txBody>
+          <a:bodyPr wrap="square">
+            <a:spAutoFit/>
+          </a:bodyPr>
+          <a:lstStyle/>
+          <a:p>
+            <a:pPr>
+              <a:spcAft>
+                <a:spcPts val="200"/>
+              </a:spcAft>
+            </a:pPr>
+            <a:r>
+              <a:rPr sz="1100" b="0">
+                <a:solidFill>
+                  <a:srgbClr val="3B4559"/>
+                </a:solidFill>
+                <a:latin typeface="Inter"/>
+              </a:rPr>
+              <a:t>Multilingual rules</a:t>
+            </a:r>
+          </a:p>
+          <a:p>
+            <a:pPr>
+              <a:spcAft>
+                <a:spcPts val="200"/>
+              </a:spcAft>
+            </a:pPr>
+            <a:r>
+              <a:rPr sz="1100" b="0">
+                <a:solidFill>
+                  <a:srgbClr val="3B4559"/>
+                </a:solidFill>
+                <a:latin typeface="Inter"/>
+              </a:rPr>
+              <a:t>EN · Hinglish · हिन्दी</a:t>
+            </a:r>
+          </a:p>
+        </p:txBody>
+      </p:sp>
+      <p:sp>
+        <p:nvSpPr>
+          <p:cNvPr id="11" name="Rounded Rectangle 10"/>
+          <p:cNvSpPr/>
+          <p:nvPr/>
+        </p:nvSpPr>
+        <p:spPr>
+          <a:xfrm>
+            <a:off x="4389120" y="1737360"/>
+            <a:ext cx="1691640" cy="1737360"/>
+          </a:xfrm>
+          <a:prstGeom prst="roundRect">
+            <a:avLst>
+              <a:gd name="adj" fmla="val 12000"/>
+            </a:avLst>
+          </a:prstGeom>
+          <a:solidFill>
+            <a:srgbClr val="0B0F1A"/>
+          </a:solidFill>
+          <a:ln>
+            <a:solidFill>
+              <a:srgbClr val="E4E1EE"/>
+            </a:solidFill>
+          </a:ln>
+        </p:spPr>
+        <p:style>
+          <a:lnRef idx="1">
+            <a:schemeClr val="accent1"/>
+          </a:lnRef>
+          <a:fillRef idx="3">
+            <a:schemeClr val="accent1"/>
+          </a:fillRef>
+          <a:effectRef idx="2">
+            <a:schemeClr val="accent1"/>
+          </a:effectRef>
+          <a:fontRef idx="minor">
+            <a:schemeClr val="lt1"/>
+          </a:fontRef>
+        </p:style>
+        <p:txBody>
+          <a:bodyPr rtlCol="0" anchor="ctr"/>
+          <a:lstStyle/>
+          <a:p>
+            <a:pPr algn="ctr"/>
+          </a:p>
+        </p:txBody>
+      </p:sp>
+      <p:sp>
+        <p:nvSpPr>
+          <p:cNvPr id="12" name="TextBox 11"/>
+          <p:cNvSpPr txBox="1"/>
+          <p:nvPr/>
+        </p:nvSpPr>
+        <p:spPr>
+          <a:xfrm>
+            <a:off x="4498848" y="1828800"/>
+            <a:ext cx="1508760" cy="457200"/>
+          </a:xfrm>
+          <a:prstGeom prst="rect">
+            <a:avLst/>
+          </a:prstGeom>
+          <a:noFill/>
+        </p:spPr>
+        <p:txBody>
+          <a:bodyPr wrap="square">
+            <a:spAutoFit/>
+          </a:bodyPr>
+          <a:lstStyle/>
+          <a:p>
+            <a:pPr>
+              <a:spcAft>
+                <a:spcPts val="800"/>
+              </a:spcAft>
+            </a:pPr>
+            <a:r>
+              <a:rPr sz="1600" b="1">
+                <a:solidFill>
+                  <a:srgbClr val="FF7A1A"/>
+                </a:solidFill>
+                <a:latin typeface="Inter"/>
+              </a:rPr>
+              <a:t>Understand</a:t>
+            </a:r>
+          </a:p>
+        </p:txBody>
+      </p:sp>
+      <p:sp>
+        <p:nvSpPr>
+          <p:cNvPr id="13" name="TextBox 12"/>
+          <p:cNvSpPr txBox="1"/>
+          <p:nvPr/>
+        </p:nvSpPr>
+        <p:spPr>
+          <a:xfrm>
+            <a:off x="4498848" y="2331720"/>
+            <a:ext cx="1508760" cy="1097280"/>
+          </a:xfrm>
+          <a:prstGeom prst="rect">
+            <a:avLst/>
+          </a:prstGeom>
+          <a:noFill/>
+        </p:spPr>
+        <p:txBody>
+          <a:bodyPr wrap="square">
+            <a:spAutoFit/>
+          </a:bodyPr>
+          <a:lstStyle/>
+          <a:p>
+            <a:pPr>
+              <a:spcAft>
+                <a:spcPts val="200"/>
+              </a:spcAft>
+            </a:pPr>
+            <a:r>
+              <a:rPr sz="1100" b="0">
+                <a:solidFill>
+                  <a:srgbClr val="C9CEDA"/>
+                </a:solidFill>
+                <a:latin typeface="Inter"/>
+              </a:rPr>
+              <a:t>LLM, JSON-schema output</a:t>
+            </a:r>
+          </a:p>
+          <a:p>
+            <a:pPr>
+              <a:spcAft>
+                <a:spcPts val="200"/>
+              </a:spcAft>
+            </a:pPr>
+            <a:r>
+              <a:rPr sz="1100" b="0">
+                <a:solidFill>
+                  <a:srgbClr val="C9CEDA"/>
+                </a:solidFill>
+                <a:latin typeface="Inter"/>
+              </a:rPr>
+              <a:t>12 harm categories</a:t>
+            </a:r>
+          </a:p>
+        </p:txBody>
+      </p:sp>
+      <p:sp>
+        <p:nvSpPr>
+          <p:cNvPr id="14" name="Rounded Rectangle 13"/>
+          <p:cNvSpPr/>
+          <p:nvPr/>
+        </p:nvSpPr>
+        <p:spPr>
+          <a:xfrm>
+            <a:off x="6309360" y="1737360"/>
+            <a:ext cx="1691640" cy="1737360"/>
+          </a:xfrm>
+          <a:prstGeom prst="roundRect">
+            <a:avLst>
+              <a:gd name="adj" fmla="val 12000"/>
+            </a:avLst>
+          </a:prstGeom>
+          <a:solidFill>
+            <a:srgbClr val="FFFFFF"/>
+          </a:solidFill>
+          <a:ln>
+            <a:solidFill>
+              <a:srgbClr val="E4E1EE"/>
+            </a:solidFill>
+          </a:ln>
+        </p:spPr>
+        <p:style>
+          <a:lnRef idx="1">
+            <a:schemeClr val="accent1"/>
+          </a:lnRef>
+          <a:fillRef idx="3">
+            <a:schemeClr val="accent1"/>
+          </a:fillRef>
+          <a:effectRef idx="2">
+            <a:schemeClr val="accent1"/>
+          </a:effectRef>
+          <a:fontRef idx="minor">
+            <a:schemeClr val="lt1"/>
+          </a:fontRef>
+        </p:style>
+        <p:txBody>
+          <a:bodyPr rtlCol="0" anchor="ctr"/>
+          <a:lstStyle/>
+          <a:p>
+            <a:pPr algn="ctr"/>
+          </a:p>
+        </p:txBody>
+      </p:sp>
+      <p:sp>
+        <p:nvSpPr>
+          <p:cNvPr id="15" name="TextBox 14"/>
+          <p:cNvSpPr txBox="1"/>
+          <p:nvPr/>
+        </p:nvSpPr>
+        <p:spPr>
+          <a:xfrm>
+            <a:off x="6419088" y="1828800"/>
+            <a:ext cx="1508760" cy="457200"/>
+          </a:xfrm>
+          <a:prstGeom prst="rect">
+            <a:avLst/>
+          </a:prstGeom>
+          <a:noFill/>
+        </p:spPr>
+        <p:txBody>
+          <a:bodyPr wrap="square">
+            <a:spAutoFit/>
+          </a:bodyPr>
+          <a:lstStyle/>
+          <a:p>
+            <a:pPr>
+              <a:spcAft>
+                <a:spcPts val="800"/>
+              </a:spcAft>
+            </a:pPr>
+            <a:r>
+              <a:rPr sz="1600" b="1">
+                <a:solidFill>
+                  <a:srgbClr val="0B1220"/>
+                </a:solidFill>
+                <a:latin typeface="Inter"/>
+              </a:rPr>
+              <a:t>Ground</a:t>
+            </a:r>
+          </a:p>
+        </p:txBody>
+      </p:sp>
+      <p:sp>
+        <p:nvSpPr>
+          <p:cNvPr id="16" name="TextBox 15"/>
+          <p:cNvSpPr txBox="1"/>
+          <p:nvPr/>
+        </p:nvSpPr>
+        <p:spPr>
+          <a:xfrm>
+            <a:off x="6419088" y="2331720"/>
+            <a:ext cx="1508760" cy="1097280"/>
+          </a:xfrm>
+          <a:prstGeom prst="rect">
+            <a:avLst/>
+          </a:prstGeom>
+          <a:noFill/>
+        </p:spPr>
+        <p:txBody>
+          <a:bodyPr wrap="square">
+            <a:spAutoFit/>
+          </a:bodyPr>
+          <a:lstStyle/>
+          <a:p>
+            <a:pPr>
+              <a:spcAft>
+                <a:spcPts val="200"/>
+              </a:spcAft>
+            </a:pPr>
+            <a:r>
+              <a:rPr sz="1100" b="0">
+                <a:solidFill>
+                  <a:srgbClr val="3B4559"/>
+                </a:solidFill>
+                <a:latin typeface="Inter"/>
+              </a:rPr>
+              <a:t>Quote must match the text,</a:t>
+            </a:r>
+          </a:p>
+          <a:p>
+            <a:pPr>
+              <a:spcAft>
+                <a:spcPts val="200"/>
+              </a:spcAft>
+            </a:pPr>
+            <a:r>
+              <a:rPr sz="1100" b="0">
+                <a:solidFill>
+                  <a:srgbClr val="3B4559"/>
+                </a:solidFill>
+                <a:latin typeface="Inter"/>
+              </a:rPr>
+              <a:t>else discarded</a:t>
+            </a:r>
+          </a:p>
+        </p:txBody>
+      </p:sp>
+      <p:sp>
+        <p:nvSpPr>
+          <p:cNvPr id="17" name="Rounded Rectangle 16"/>
+          <p:cNvSpPr/>
+          <p:nvPr/>
+        </p:nvSpPr>
+        <p:spPr>
+          <a:xfrm>
+            <a:off x="8229600" y="1737360"/>
+            <a:ext cx="1691640" cy="1737360"/>
+          </a:xfrm>
+          <a:prstGeom prst="roundRect">
+            <a:avLst>
+              <a:gd name="adj" fmla="val 12000"/>
+            </a:avLst>
+          </a:prstGeom>
+          <a:solidFill>
+            <a:srgbClr val="0B0F1A"/>
+          </a:solidFill>
+          <a:ln>
+            <a:solidFill>
+              <a:srgbClr val="E4E1EE"/>
+            </a:solidFill>
+          </a:ln>
+        </p:spPr>
+        <p:style>
+          <a:lnRef idx="1">
+            <a:schemeClr val="accent1"/>
+          </a:lnRef>
+          <a:fillRef idx="3">
+            <a:schemeClr val="accent1"/>
+          </a:fillRef>
+          <a:effectRef idx="2">
+            <a:schemeClr val="accent1"/>
+          </a:effectRef>
+          <a:fontRef idx="minor">
+            <a:schemeClr val="lt1"/>
+          </a:fontRef>
+        </p:style>
+        <p:txBody>
+          <a:bodyPr rtlCol="0" anchor="ctr"/>
+          <a:lstStyle/>
+          <a:p>
+            <a:pPr algn="ctr"/>
+          </a:p>
+        </p:txBody>
+      </p:sp>
+      <p:sp>
+        <p:nvSpPr>
+          <p:cNvPr id="18" name="TextBox 17"/>
+          <p:cNvSpPr txBox="1"/>
+          <p:nvPr/>
+        </p:nvSpPr>
+        <p:spPr>
+          <a:xfrm>
+            <a:off x="8339327" y="1828800"/>
+            <a:ext cx="1508760" cy="457200"/>
+          </a:xfrm>
+          <a:prstGeom prst="rect">
+            <a:avLst/>
+          </a:prstGeom>
+          <a:noFill/>
+        </p:spPr>
+        <p:txBody>
+          <a:bodyPr wrap="square">
+            <a:spAutoFit/>
+          </a:bodyPr>
+          <a:lstStyle/>
+          <a:p>
+            <a:pPr>
+              <a:spcAft>
+                <a:spcPts val="800"/>
+              </a:spcAft>
+            </a:pPr>
+            <a:r>
+              <a:rPr sz="1600" b="1">
+                <a:solidFill>
+                  <a:srgbClr val="FF7A1A"/>
+                </a:solidFill>
+                <a:latin typeface="Inter"/>
+              </a:rPr>
+              <a:t>Verify</a:t>
+            </a:r>
+          </a:p>
+        </p:txBody>
+      </p:sp>
+      <p:sp>
+        <p:nvSpPr>
+          <p:cNvPr id="19" name="TextBox 18"/>
+          <p:cNvSpPr txBox="1"/>
+          <p:nvPr/>
+        </p:nvSpPr>
+        <p:spPr>
+          <a:xfrm>
+            <a:off x="8339327" y="2331720"/>
+            <a:ext cx="1508760" cy="1097280"/>
+          </a:xfrm>
+          <a:prstGeom prst="rect">
+            <a:avLst/>
+          </a:prstGeom>
+          <a:noFill/>
+        </p:spPr>
+        <p:txBody>
+          <a:bodyPr wrap="square">
+            <a:spAutoFit/>
+          </a:bodyPr>
+          <a:lstStyle/>
+          <a:p>
+            <a:pPr>
+              <a:spcAft>
+                <a:spcPts val="200"/>
+              </a:spcAft>
+            </a:pPr>
+            <a:r>
+              <a:rPr sz="1100" b="0">
+                <a:solidFill>
+                  <a:srgbClr val="C9CEDA"/>
+                </a:solidFill>
+                <a:latin typeface="Inter"/>
+              </a:rPr>
+              <a:t>SEBI registers · official</a:t>
+            </a:r>
+          </a:p>
+          <a:p>
+            <a:pPr>
+              <a:spcAft>
+                <a:spcPts val="200"/>
+              </a:spcAft>
+            </a:pPr>
+            <a:r>
+              <a:rPr sz="1100" b="0">
+                <a:solidFill>
+                  <a:srgbClr val="C9CEDA"/>
+                </a:solidFill>
+                <a:latin typeface="Inter"/>
+              </a:rPr>
+              <a:t>broker domains</a:t>
+            </a:r>
+          </a:p>
+        </p:txBody>
+      </p:sp>
+      <p:sp>
+        <p:nvSpPr>
+          <p:cNvPr id="20" name="Rounded Rectangle 19"/>
+          <p:cNvSpPr/>
+          <p:nvPr/>
+        </p:nvSpPr>
+        <p:spPr>
+          <a:xfrm>
+            <a:off x="10149840" y="1737360"/>
+            <a:ext cx="1691640" cy="1737360"/>
+          </a:xfrm>
+          <a:prstGeom prst="roundRect">
+            <a:avLst>
+              <a:gd name="adj" fmla="val 12000"/>
+            </a:avLst>
+          </a:prstGeom>
+          <a:solidFill>
+            <a:srgbClr val="FFFFFF"/>
+          </a:solidFill>
+          <a:ln>
+            <a:solidFill>
+              <a:srgbClr val="E4E1EE"/>
+            </a:solidFill>
+          </a:ln>
+        </p:spPr>
+        <p:style>
+          <a:lnRef idx="1">
+            <a:schemeClr val="accent1"/>
+          </a:lnRef>
+          <a:fillRef idx="3">
+            <a:schemeClr val="accent1"/>
+          </a:fillRef>
+          <a:effectRef idx="2">
+            <a:schemeClr val="accent1"/>
+          </a:effectRef>
+          <a:fontRef idx="minor">
+            <a:schemeClr val="lt1"/>
+          </a:fontRef>
+        </p:style>
+        <p:txBody>
+          <a:bodyPr rtlCol="0" anchor="ctr"/>
+          <a:lstStyle/>
+          <a:p>
+            <a:pPr algn="ctr"/>
+          </a:p>
+        </p:txBody>
+      </p:sp>
+      <p:sp>
+        <p:nvSpPr>
+          <p:cNvPr id="21" name="TextBox 20"/>
+          <p:cNvSpPr txBox="1"/>
+          <p:nvPr/>
+        </p:nvSpPr>
+        <p:spPr>
+          <a:xfrm>
+            <a:off x="10259567" y="1828800"/>
+            <a:ext cx="1508760" cy="457200"/>
+          </a:xfrm>
+          <a:prstGeom prst="rect">
+            <a:avLst/>
+          </a:prstGeom>
+          <a:noFill/>
+        </p:spPr>
+        <p:txBody>
+          <a:bodyPr wrap="square">
+            <a:spAutoFit/>
+          </a:bodyPr>
+          <a:lstStyle/>
+          <a:p>
+            <a:pPr>
+              <a:spcAft>
+                <a:spcPts val="800"/>
+              </a:spcAft>
+            </a:pPr>
+            <a:r>
+              <a:rPr sz="1600" b="1">
+                <a:solidFill>
+                  <a:srgbClr val="0B1220"/>
+                </a:solidFill>
+                <a:latin typeface="Inter"/>
+              </a:rPr>
+              <a:t>Explain</a:t>
+            </a:r>
+          </a:p>
+        </p:txBody>
+      </p:sp>
+      <p:sp>
+        <p:nvSpPr>
+          <p:cNvPr id="22" name="TextBox 21"/>
+          <p:cNvSpPr txBox="1"/>
+          <p:nvPr/>
+        </p:nvSpPr>
+        <p:spPr>
+          <a:xfrm>
+            <a:off x="10259567" y="2331720"/>
+            <a:ext cx="1508760" cy="1097280"/>
+          </a:xfrm>
+          <a:prstGeom prst="rect">
+            <a:avLst/>
+          </a:prstGeom>
+          <a:noFill/>
+        </p:spPr>
+        <p:txBody>
+          <a:bodyPr wrap="square">
+            <a:spAutoFit/>
+          </a:bodyPr>
+          <a:lstStyle/>
+          <a:p>
+            <a:pPr>
+              <a:spcAft>
+                <a:spcPts val="200"/>
+              </a:spcAft>
+            </a:pPr>
+            <a:r>
+              <a:rPr sz="1100" b="0">
+                <a:solidFill>
+                  <a:srgbClr val="3B4559"/>
+                </a:solidFill>
+                <a:latin typeface="Inter"/>
+              </a:rPr>
+              <a:t>Brief · Hindi · voice ·</a:t>
+            </a:r>
+          </a:p>
+          <a:p>
+            <a:pPr>
+              <a:spcAft>
+                <a:spcPts val="200"/>
+              </a:spcAft>
+            </a:pPr>
+            <a:r>
+              <a:rPr sz="1100" b="0">
+                <a:solidFill>
+                  <a:srgbClr val="3B4559"/>
+                </a:solidFill>
+                <a:latin typeface="Inter"/>
+              </a:rPr>
+              <a:t>PDF · Q&amp;A</a:t>
+            </a:r>
+          </a:p>
+        </p:txBody>
+      </p:sp>
+      <p:sp>
+        <p:nvSpPr>
+          <p:cNvPr id="23" name="TextBox 22"/>
+          <p:cNvSpPr txBox="1"/>
+          <p:nvPr/>
+        </p:nvSpPr>
+        <p:spPr>
+          <a:xfrm>
+            <a:off x="548640" y="3840480"/>
+            <a:ext cx="11155680" cy="2743200"/>
+          </a:xfrm>
+          <a:prstGeom prst="rect">
+            <a:avLst/>
+          </a:prstGeom>
+          <a:noFill/>
+        </p:spPr>
+        <p:txBody>
+          <a:bodyPr wrap="square">
+            <a:spAutoFit/>
+          </a:bodyPr>
+          <a:lstStyle/>
+          <a:p>
+            <a:pPr>
+              <a:spcAft>
+                <a:spcPts val="1000"/>
+              </a:spcAft>
+            </a:pPr>
+            <a:r>
+              <a:rPr sz="1500" b="1">
+                <a:solidFill>
+                  <a:srgbClr val="FF7A1A"/>
+                </a:solidFill>
+                <a:latin typeface="Inter"/>
+              </a:rPr>
+              <a:t>•  </a:t>
+            </a:r>
+            <a:r>
+              <a:rPr sz="1500" b="0">
+                <a:solidFill>
+                  <a:srgbClr val="3B4559"/>
+                </a:solidFill>
+                <a:latin typeface="Inter"/>
+              </a:rPr>
+              <a:t>Runs fully local on a 6 GB laptop GPU: Qwen 2.5 7B (analysis) + Gemma 3 4B (Hindi, vision) via Ollama, faster-whisper, Kokoro TTS. No data leaves the device.</a:t>
+            </a:r>
+          </a:p>
+          <a:p>
+            <a:pPr>
+              <a:spcAft>
+                <a:spcPts val="1000"/>
+              </a:spcAft>
+            </a:pPr>
+            <a:r>
+              <a:rPr sz="1500" b="1">
+                <a:solidFill>
+                  <a:srgbClr val="FF7A1A"/>
+                </a:solidFill>
+                <a:latin typeface="Inter"/>
+              </a:rPr>
+              <a:t>•  </a:t>
+            </a:r>
+            <a:r>
+              <a:rPr sz="1500" b="0">
+                <a:solidFill>
+                  <a:srgbClr val="3B4559"/>
+                </a:solidFill>
+                <a:latin typeface="Inter"/>
+              </a:rPr>
+              <a:t>Hosted demo: same code with Google Gemini behind a server-side key and per-visitor limits.</a:t>
+            </a:r>
+          </a:p>
+          <a:p>
+            <a:pPr>
+              <a:spcAft>
+                <a:spcPts val="1000"/>
+              </a:spcAft>
+            </a:pPr>
+            <a:r>
+              <a:rPr sz="1500" b="1">
+                <a:solidFill>
+                  <a:srgbClr val="FF7A1A"/>
+                </a:solidFill>
+                <a:latin typeface="Inter"/>
+              </a:rPr>
+              <a:t>•  </a:t>
+            </a:r>
+            <a:r>
+              <a:rPr sz="1500" b="0">
+                <a:solidFill>
+                  <a:srgbClr val="3B4559"/>
+                </a:solidFill>
+                <a:latin typeface="Inter"/>
+              </a:rPr>
+              <a:t>Stack: Python · FastAPI · SQLite · React + TypeScript + Tailwind · Docker. 31 unit tests; labelled eval sets.</a:t>
+            </a:r>
+          </a:p>
+        </p:txBody>
+      </p:sp>
+    </p:spTree>
+  </p:cSld>
+  <p:clrMapOvr>
+    <a:masterClrMapping/>
+  </p:clrMapOvr>
+</p:sld>
+</file>
+
+<file path=ppt/slides/slide12.xml><?xml version="1.0" encoding="utf-8"?>
+<p:sld xmlns:a="http://schemas.openxmlformats.org/drawingml/2006/main" xmlns:p="http://schemas.openxmlformats.org/presentationml/2006/main" xmlns:r="http://schemas.openxmlformats.org/officeDocument/2006/relationships">
+  <p:cSld>
+    <p:bg>
+      <p:bgPr>
+        <a:solidFill>
+          <a:srgbClr val="F6F4FB"/>
+        </a:solidFill>
+        <a:effectLst/>
+      </p:bgPr>
+    </p:bg>
+    <p:spTree>
+      <p:nvGrpSpPr>
+        <p:cNvPr id="1" name=""/>
+        <p:cNvGrpSpPr/>
+        <p:nvPr/>
+      </p:nvGrpSpPr>
+      <p:grpSpPr/>
+      <p:sp>
+        <p:nvSpPr>
+          <p:cNvPr id="2" name="Rectangle 1"/>
+          <p:cNvSpPr/>
+          <p:nvPr/>
+        </p:nvSpPr>
+        <p:spPr>
+          <a:xfrm>
+            <a:off x="0" y="0"/>
+            <a:ext cx="12191695" cy="82296"/>
+          </a:xfrm>
+          <a:prstGeom prst="rect">
+            <a:avLst/>
+          </a:prstGeom>
+          <a:gradFill rotWithShape="1">
+            <a:gsLst>
+              <a:gs pos="0">
+                <a:srgbClr val="FF7A1A"/>
+              </a:gs>
+              <a:gs pos="100000">
+                <a:srgbClr val="7C4DFF"/>
+              </a:gs>
+            </a:gsLst>
+            <a:lin scaled="0" ang="0"/>
+          </a:gradFill>
+          <a:ln>
+            <a:noFill/>
+          </a:ln>
+        </p:spPr>
+        <p:style>
+          <a:lnRef idx="1">
+            <a:schemeClr val="accent1"/>
+          </a:lnRef>
+          <a:fillRef idx="3">
+            <a:schemeClr val="accent1"/>
+          </a:fillRef>
+          <a:effectRef idx="2">
+            <a:schemeClr val="accent1"/>
+          </a:effectRef>
+          <a:fontRef idx="minor">
+            <a:schemeClr val="lt1"/>
+          </a:fontRef>
+        </p:style>
+        <p:txBody>
+          <a:bodyPr rtlCol="0" anchor="ctr"/>
+          <a:lstStyle/>
+          <a:p>
+            <a:pPr algn="ctr"/>
+          </a:p>
+        </p:txBody>
+      </p:sp>
+      <p:sp>
+        <p:nvSpPr>
+          <p:cNvPr id="3" name="TextBox 2"/>
+          <p:cNvSpPr txBox="1"/>
+          <p:nvPr/>
+        </p:nvSpPr>
+        <p:spPr>
+          <a:xfrm>
+            <a:off x="548640" y="320040"/>
+            <a:ext cx="10972800" cy="365760"/>
+          </a:xfrm>
+          <a:prstGeom prst="rect">
+            <a:avLst/>
+          </a:prstGeom>
+          <a:noFill/>
+        </p:spPr>
+        <p:txBody>
+          <a:bodyPr wrap="square">
+            <a:spAutoFit/>
+          </a:bodyPr>
+          <a:lstStyle/>
+          <a:p>
+            <a:pPr>
+              <a:spcAft>
+                <a:spcPts val="800"/>
+              </a:spcAft>
+            </a:pPr>
+            <a:r>
+              <a:rPr sz="1200" b="1">
+                <a:solidFill>
+                  <a:srgbClr val="FF7A1A"/>
+                </a:solidFill>
+                <a:latin typeface="Inter"/>
+              </a:rPr>
+              <a:t>TRUST, GUARDRAILS &amp; MEASURED ACCURACY</a:t>
+            </a:r>
+          </a:p>
+        </p:txBody>
+      </p:sp>
+      <p:sp>
+        <p:nvSpPr>
+          <p:cNvPr id="4" name="TextBox 3"/>
+          <p:cNvSpPr txBox="1"/>
+          <p:nvPr/>
+        </p:nvSpPr>
+        <p:spPr>
+          <a:xfrm>
+            <a:off x="548640" y="594360"/>
+            <a:ext cx="11155680" cy="914400"/>
+          </a:xfrm>
+          <a:prstGeom prst="rect">
+            <a:avLst/>
+          </a:prstGeom>
+          <a:noFill/>
+        </p:spPr>
+        <p:txBody>
+          <a:bodyPr wrap="square">
+            <a:spAutoFit/>
+          </a:bodyPr>
+          <a:lstStyle/>
+          <a:p>
+            <a:pPr>
+              <a:spcAft>
+                <a:spcPts val="800"/>
+              </a:spcAft>
+            </a:pPr>
+            <a:r>
+              <a:rPr sz="3000" b="1">
+                <a:solidFill>
+                  <a:srgbClr val="0B1220"/>
+                </a:solidFill>
+                <a:latin typeface="Inter"/>
+              </a:rPr>
+              <a:t>Non-commercial, private, honest about uncertainty</a:t>
+            </a:r>
+          </a:p>
+        </p:txBody>
+      </p:sp>
+      <p:sp>
+        <p:nvSpPr>
+          <p:cNvPr id="5" name="Rounded Rectangle 4"/>
+          <p:cNvSpPr/>
+          <p:nvPr/>
+        </p:nvSpPr>
+        <p:spPr>
+          <a:xfrm>
+            <a:off x="548640" y="1645920"/>
+            <a:ext cx="3566160" cy="2377440"/>
+          </a:xfrm>
+          <a:prstGeom prst="roundRect">
+            <a:avLst>
+              <a:gd name="adj" fmla="val 8000"/>
+            </a:avLst>
+          </a:prstGeom>
+          <a:solidFill>
+            <a:srgbClr val="FFFFFF"/>
+          </a:solidFill>
+          <a:ln>
+            <a:solidFill>
+              <a:srgbClr val="E4E1EE"/>
+            </a:solidFill>
+          </a:ln>
+          <a:effectLst/>
+        </p:spPr>
+        <p:style>
+          <a:lnRef idx="1">
+            <a:schemeClr val="accent1"/>
+          </a:lnRef>
+          <a:fillRef idx="3">
+            <a:schemeClr val="accent1"/>
+          </a:fillRef>
+          <a:effectRef idx="2">
+            <a:schemeClr val="accent1"/>
+          </a:effectRef>
+          <a:fontRef idx="minor">
+            <a:schemeClr val="lt1"/>
+          </a:fontRef>
+        </p:style>
+        <p:txBody>
+          <a:bodyPr rtlCol="0" anchor="ctr"/>
+          <a:lstStyle/>
+          <a:p>
+            <a:pPr algn="ctr"/>
+          </a:p>
+        </p:txBody>
+      </p:sp>
+      <p:sp>
+        <p:nvSpPr>
+          <p:cNvPr id="6" name="Rectangle 5"/>
+          <p:cNvSpPr/>
+          <p:nvPr/>
+        </p:nvSpPr>
+        <p:spPr>
+          <a:xfrm>
+            <a:off x="777240" y="1874519"/>
+            <a:ext cx="411480" cy="54864"/>
+          </a:xfrm>
+          <a:prstGeom prst="rect">
+            <a:avLst/>
+          </a:prstGeom>
+          <a:solidFill>
+            <a:srgbClr val="E53E3E"/>
+          </a:solidFill>
+          <a:ln>
+            <a:noFill/>
+          </a:ln>
+        </p:spPr>
+        <p:style>
+          <a:lnRef idx="1">
+            <a:schemeClr val="accent1"/>
+          </a:lnRef>
+          <a:fillRef idx="3">
+            <a:schemeClr val="accent1"/>
+          </a:fillRef>
+          <a:effectRef idx="2">
+            <a:schemeClr val="accent1"/>
+          </a:effectRef>
+          <a:fontRef idx="minor">
+            <a:schemeClr val="lt1"/>
+          </a:fontRef>
+        </p:style>
+        <p:txBody>
+          <a:bodyPr rtlCol="0" anchor="ctr"/>
+          <a:lstStyle/>
+          <a:p>
+            <a:pPr algn="ctr"/>
+          </a:p>
+        </p:txBody>
+      </p:sp>
+      <p:sp>
+        <p:nvSpPr>
+          <p:cNvPr id="7" name="TextBox 6"/>
+          <p:cNvSpPr txBox="1"/>
+          <p:nvPr/>
+        </p:nvSpPr>
+        <p:spPr>
+          <a:xfrm>
+            <a:off x="731520" y="2011680"/>
+            <a:ext cx="3200400" cy="548640"/>
+          </a:xfrm>
+          <a:prstGeom prst="rect">
+            <a:avLst/>
+          </a:prstGeom>
+          <a:noFill/>
+        </p:spPr>
+        <p:txBody>
+          <a:bodyPr wrap="square">
+            <a:spAutoFit/>
+          </a:bodyPr>
+          <a:lstStyle/>
+          <a:p>
+            <a:pPr>
+              <a:spcAft>
+                <a:spcPts val="800"/>
+              </a:spcAft>
+            </a:pPr>
+            <a:r>
+              <a:rPr sz="1700" b="1">
+                <a:solidFill>
+                  <a:srgbClr val="0B1220"/>
+                </a:solidFill>
+                <a:latin typeface="Inter"/>
+              </a:rPr>
+              <a:t>Guardrails</a:t>
+            </a:r>
+          </a:p>
+        </p:txBody>
+      </p:sp>
+      <p:sp>
+        <p:nvSpPr>
+          <p:cNvPr id="8" name="TextBox 7"/>
+          <p:cNvSpPr txBox="1"/>
+          <p:nvPr/>
+        </p:nvSpPr>
+        <p:spPr>
+          <a:xfrm>
+            <a:off x="731520" y="2514600"/>
+            <a:ext cx="3200400" cy="1463040"/>
+          </a:xfrm>
+          <a:prstGeom prst="rect">
+            <a:avLst/>
+          </a:prstGeom>
+          <a:noFill/>
+        </p:spPr>
+        <p:txBody>
+          <a:bodyPr wrap="square">
+            <a:spAutoFit/>
+          </a:bodyPr>
+          <a:lstStyle/>
+          <a:p>
+            <a:pPr>
+              <a:spcAft>
+                <a:spcPts val="500"/>
+              </a:spcAft>
+            </a:pPr>
+            <a:r>
+              <a:rPr sz="1300" b="0">
+                <a:solidFill>
+                  <a:srgbClr val="3B4559"/>
+                </a:solidFill>
+                <a:latin typeface="Inter"/>
+              </a:rPr>
+              <a:t>No tips, predictions or buy/sell/hold views</a:t>
+            </a:r>
+          </a:p>
+          <a:p>
+            <a:pPr>
+              <a:spcAft>
+                <a:spcPts val="500"/>
+              </a:spcAft>
+            </a:pPr>
+            <a:r>
+              <a:rPr sz="1300" b="0">
+                <a:solidFill>
+                  <a:srgbClr val="3B4559"/>
+                </a:solidFill>
+                <a:latin typeface="Inter"/>
+              </a:rPr>
+              <a:t>Advice questions refused</a:t>
+            </a:r>
+          </a:p>
+          <a:p>
+            <a:pPr>
+              <a:spcAft>
+                <a:spcPts val="500"/>
+              </a:spcAft>
+            </a:pPr>
+            <a:r>
+              <a:rPr sz="1300" b="0">
+                <a:solidFill>
+                  <a:srgbClr val="3B4559"/>
+                </a:solidFill>
+                <a:latin typeface="Inter"/>
+              </a:rPr>
+              <a:t>No brokers promoted, no monetisation</a:t>
+            </a:r>
+          </a:p>
+        </p:txBody>
+      </p:sp>
+      <p:sp>
+        <p:nvSpPr>
+          <p:cNvPr id="9" name="Rounded Rectangle 8"/>
+          <p:cNvSpPr/>
+          <p:nvPr/>
+        </p:nvSpPr>
+        <p:spPr>
+          <a:xfrm>
+            <a:off x="4297680" y="1645920"/>
+            <a:ext cx="3566160" cy="2377440"/>
+          </a:xfrm>
+          <a:prstGeom prst="roundRect">
+            <a:avLst>
+              <a:gd name="adj" fmla="val 8000"/>
+            </a:avLst>
+          </a:prstGeom>
+          <a:solidFill>
+            <a:srgbClr val="FFFFFF"/>
+          </a:solidFill>
+          <a:ln>
+            <a:solidFill>
+              <a:srgbClr val="E4E1EE"/>
+            </a:solidFill>
+          </a:ln>
+          <a:effectLst/>
+        </p:spPr>
+        <p:style>
+          <a:lnRef idx="1">
+            <a:schemeClr val="accent1"/>
+          </a:lnRef>
+          <a:fillRef idx="3">
+            <a:schemeClr val="accent1"/>
+          </a:fillRef>
+          <a:effectRef idx="2">
+            <a:schemeClr val="accent1"/>
+          </a:effectRef>
+          <a:fontRef idx="minor">
+            <a:schemeClr val="lt1"/>
+          </a:fontRef>
+        </p:style>
+        <p:txBody>
+          <a:bodyPr rtlCol="0" anchor="ctr"/>
+          <a:lstStyle/>
+          <a:p>
+            <a:pPr algn="ctr"/>
+          </a:p>
+        </p:txBody>
+      </p:sp>
+      <p:sp>
+        <p:nvSpPr>
+          <p:cNvPr id="10" name="Rectangle 9"/>
+          <p:cNvSpPr/>
+          <p:nvPr/>
+        </p:nvSpPr>
+        <p:spPr>
+          <a:xfrm>
+            <a:off x="4526280" y="1874519"/>
+            <a:ext cx="411480" cy="54864"/>
+          </a:xfrm>
+          <a:prstGeom prst="rect">
+            <a:avLst/>
+          </a:prstGeom>
+          <a:solidFill>
+            <a:srgbClr val="2EA84F"/>
+          </a:solidFill>
+          <a:ln>
+            <a:noFill/>
+          </a:ln>
+        </p:spPr>
+        <p:style>
+          <a:lnRef idx="1">
+            <a:schemeClr val="accent1"/>
+          </a:lnRef>
+          <a:fillRef idx="3">
+            <a:schemeClr val="accent1"/>
+          </a:fillRef>
+          <a:effectRef idx="2">
+            <a:schemeClr val="accent1"/>
+          </a:effectRef>
+          <a:fontRef idx="minor">
+            <a:schemeClr val="lt1"/>
+          </a:fontRef>
+        </p:style>
+        <p:txBody>
+          <a:bodyPr rtlCol="0" anchor="ctr"/>
+          <a:lstStyle/>
+          <a:p>
+            <a:pPr algn="ctr"/>
+          </a:p>
+        </p:txBody>
+      </p:sp>
+      <p:sp>
+        <p:nvSpPr>
+          <p:cNvPr id="11" name="TextBox 10"/>
+          <p:cNvSpPr txBox="1"/>
+          <p:nvPr/>
+        </p:nvSpPr>
+        <p:spPr>
+          <a:xfrm>
+            <a:off x="4480560" y="2011680"/>
+            <a:ext cx="3200400" cy="548640"/>
+          </a:xfrm>
+          <a:prstGeom prst="rect">
+            <a:avLst/>
+          </a:prstGeom>
+          <a:noFill/>
+        </p:spPr>
+        <p:txBody>
+          <a:bodyPr wrap="square">
+            <a:spAutoFit/>
+          </a:bodyPr>
+          <a:lstStyle/>
+          <a:p>
+            <a:pPr>
+              <a:spcAft>
+                <a:spcPts val="800"/>
+              </a:spcAft>
+            </a:pPr>
+            <a:r>
+              <a:rPr sz="1700" b="1">
+                <a:solidFill>
+                  <a:srgbClr val="0B1220"/>
+                </a:solidFill>
+                <a:latin typeface="Inter"/>
+              </a:rPr>
+              <a:t>Privacy</a:t>
+            </a:r>
+          </a:p>
+        </p:txBody>
+      </p:sp>
+      <p:sp>
+        <p:nvSpPr>
+          <p:cNvPr id="12" name="TextBox 11"/>
+          <p:cNvSpPr txBox="1"/>
+          <p:nvPr/>
+        </p:nvSpPr>
+        <p:spPr>
+          <a:xfrm>
+            <a:off x="4480560" y="2514600"/>
+            <a:ext cx="3200400" cy="1463040"/>
+          </a:xfrm>
+          <a:prstGeom prst="rect">
+            <a:avLst/>
+          </a:prstGeom>
+          <a:noFill/>
+        </p:spPr>
+        <p:txBody>
+          <a:bodyPr wrap="square">
+            <a:spAutoFit/>
+          </a:bodyPr>
+          <a:lstStyle/>
+          <a:p>
+            <a:pPr>
+              <a:spcAft>
+                <a:spcPts val="500"/>
+              </a:spcAft>
+            </a:pPr>
+            <a:r>
+              <a:rPr sz="1300" b="0">
+                <a:solidFill>
+                  <a:srgbClr val="3B4559"/>
+                </a:solidFill>
+                <a:latin typeface="Inter"/>
+              </a:rPr>
+              <a:t>Full version runs on the user's device</a:t>
+            </a:r>
+          </a:p>
+          <a:p>
+            <a:pPr>
+              <a:spcAft>
+                <a:spcPts val="500"/>
+              </a:spcAft>
+            </a:pPr>
+            <a:r>
+              <a:rPr sz="1300" b="0">
+                <a:solidFill>
+                  <a:srgbClr val="3B4559"/>
+                </a:solidFill>
+                <a:latin typeface="Inter"/>
+              </a:rPr>
+              <a:t>No SMS/OTP harvesting; nothing stored remotely</a:t>
+            </a:r>
+          </a:p>
+          <a:p>
+            <a:pPr>
+              <a:spcAft>
+                <a:spcPts val="500"/>
+              </a:spcAft>
+            </a:pPr>
+            <a:r>
+              <a:rPr sz="1300" b="0">
+                <a:solidFill>
+                  <a:srgbClr val="3B4559"/>
+                </a:solidFill>
+                <a:latin typeface="Inter"/>
+              </a:rPr>
+              <a:t>Messages can be checked without saving</a:t>
+            </a:r>
+          </a:p>
+        </p:txBody>
+      </p:sp>
+      <p:sp>
+        <p:nvSpPr>
+          <p:cNvPr id="13" name="Rounded Rectangle 12"/>
+          <p:cNvSpPr/>
+          <p:nvPr/>
+        </p:nvSpPr>
+        <p:spPr>
+          <a:xfrm>
+            <a:off x="8046720" y="1645920"/>
+            <a:ext cx="3566160" cy="2377440"/>
+          </a:xfrm>
+          <a:prstGeom prst="roundRect">
+            <a:avLst>
+              <a:gd name="adj" fmla="val 8000"/>
+            </a:avLst>
+          </a:prstGeom>
+          <a:solidFill>
+            <a:srgbClr val="FFFFFF"/>
+          </a:solidFill>
+          <a:ln>
+            <a:solidFill>
+              <a:srgbClr val="E4E1EE"/>
+            </a:solidFill>
+          </a:ln>
+          <a:effectLst/>
+        </p:spPr>
+        <p:style>
+          <a:lnRef idx="1">
+            <a:schemeClr val="accent1"/>
+          </a:lnRef>
+          <a:fillRef idx="3">
+            <a:schemeClr val="accent1"/>
+          </a:fillRef>
+          <a:effectRef idx="2">
+            <a:schemeClr val="accent1"/>
+          </a:effectRef>
+          <a:fontRef idx="minor">
+            <a:schemeClr val="lt1"/>
+          </a:fontRef>
+        </p:style>
+        <p:txBody>
+          <a:bodyPr rtlCol="0" anchor="ctr"/>
+          <a:lstStyle/>
+          <a:p>
+            <a:pPr algn="ctr"/>
+          </a:p>
+        </p:txBody>
+      </p:sp>
+      <p:sp>
+        <p:nvSpPr>
+          <p:cNvPr id="14" name="Rectangle 13"/>
+          <p:cNvSpPr/>
+          <p:nvPr/>
+        </p:nvSpPr>
+        <p:spPr>
+          <a:xfrm>
+            <a:off x="8275320" y="1874519"/>
+            <a:ext cx="411480" cy="54864"/>
+          </a:xfrm>
+          <a:prstGeom prst="rect">
+            <a:avLst/>
+          </a:prstGeom>
+          <a:solidFill>
+            <a:srgbClr val="7C4DFF"/>
+          </a:solidFill>
+          <a:ln>
+            <a:noFill/>
+          </a:ln>
+        </p:spPr>
+        <p:style>
+          <a:lnRef idx="1">
+            <a:schemeClr val="accent1"/>
+          </a:lnRef>
+          <a:fillRef idx="3">
+            <a:schemeClr val="accent1"/>
+          </a:fillRef>
+          <a:effectRef idx="2">
+            <a:schemeClr val="accent1"/>
+          </a:effectRef>
+          <a:fontRef idx="minor">
+            <a:schemeClr val="lt1"/>
+          </a:fontRef>
+        </p:style>
+        <p:txBody>
+          <a:bodyPr rtlCol="0" anchor="ctr"/>
+          <a:lstStyle/>
+          <a:p>
+            <a:pPr algn="ctr"/>
+          </a:p>
+        </p:txBody>
+      </p:sp>
+      <p:sp>
+        <p:nvSpPr>
+          <p:cNvPr id="15" name="TextBox 14"/>
+          <p:cNvSpPr txBox="1"/>
+          <p:nvPr/>
+        </p:nvSpPr>
+        <p:spPr>
+          <a:xfrm>
+            <a:off x="8229600" y="2011680"/>
+            <a:ext cx="3200400" cy="548640"/>
+          </a:xfrm>
+          <a:prstGeom prst="rect">
+            <a:avLst/>
+          </a:prstGeom>
+          <a:noFill/>
+        </p:spPr>
+        <p:txBody>
+          <a:bodyPr wrap="square">
+            <a:spAutoFit/>
+          </a:bodyPr>
+          <a:lstStyle/>
+          <a:p>
+            <a:pPr>
+              <a:spcAft>
+                <a:spcPts val="800"/>
+              </a:spcAft>
+            </a:pPr>
+            <a:r>
+              <a:rPr sz="1700" b="1">
+                <a:solidFill>
+                  <a:srgbClr val="0B1220"/>
+                </a:solidFill>
+                <a:latin typeface="Inter"/>
+              </a:rPr>
+              <a:t>Uncertainty</a:t>
+            </a:r>
+          </a:p>
+        </p:txBody>
+      </p:sp>
+      <p:sp>
+        <p:nvSpPr>
+          <p:cNvPr id="16" name="TextBox 15"/>
+          <p:cNvSpPr txBox="1"/>
+          <p:nvPr/>
+        </p:nvSpPr>
+        <p:spPr>
+          <a:xfrm>
+            <a:off x="8229600" y="2514600"/>
+            <a:ext cx="3200400" cy="1463040"/>
+          </a:xfrm>
+          <a:prstGeom prst="rect">
+            <a:avLst/>
+          </a:prstGeom>
+          <a:noFill/>
+        </p:spPr>
+        <p:txBody>
+          <a:bodyPr wrap="square">
+            <a:spAutoFit/>
+          </a:bodyPr>
+          <a:lstStyle/>
+          <a:p>
+            <a:pPr>
+              <a:spcAft>
+                <a:spcPts val="500"/>
+              </a:spcAft>
+            </a:pPr>
+            <a:r>
+              <a:rPr sz="1300" b="0">
+                <a:solidFill>
+                  <a:srgbClr val="3B4559"/>
+                </a:solidFill>
+                <a:latin typeface="Inter"/>
+              </a:rPr>
+              <a:t>Confidence on every finding</a:t>
+            </a:r>
+          </a:p>
+          <a:p>
+            <a:pPr>
+              <a:spcAft>
+                <a:spcPts val="500"/>
+              </a:spcAft>
+            </a:pPr>
+            <a:r>
+              <a:rPr sz="1300" b="0">
+                <a:solidFill>
+                  <a:srgbClr val="3B4559"/>
+                </a:solidFill>
+                <a:latin typeface="Inter"/>
+              </a:rPr>
+              <a:t>Verbatim quotes to self-check</a:t>
+            </a:r>
+          </a:p>
+          <a:p>
+            <a:pPr>
+              <a:spcAft>
+                <a:spcPts val="500"/>
+              </a:spcAft>
+            </a:pPr>
+            <a:r>
+              <a:rPr sz="1300" b="0">
+                <a:solidFill>
+                  <a:srgbClr val="3B4559"/>
+                </a:solidFill>
+                <a:latin typeface="Inter"/>
+              </a:rPr>
+              <a:t>"Possible match: verify the number"</a:t>
+            </a:r>
+          </a:p>
+        </p:txBody>
+      </p:sp>
+      <p:sp>
+        <p:nvSpPr>
+          <p:cNvPr id="17" name="TextBox 16"/>
+          <p:cNvSpPr txBox="1"/>
+          <p:nvPr/>
+        </p:nvSpPr>
+        <p:spPr>
+          <a:xfrm>
+            <a:off x="548640" y="4343400"/>
+            <a:ext cx="11155680" cy="2194560"/>
+          </a:xfrm>
+          <a:prstGeom prst="rect">
+            <a:avLst/>
+          </a:prstGeom>
+          <a:noFill/>
+        </p:spPr>
+        <p:txBody>
+          <a:bodyPr wrap="square">
+            <a:spAutoFit/>
+          </a:bodyPr>
+          <a:lstStyle/>
+          <a:p>
+            <a:pPr>
+              <a:spcAft>
+                <a:spcPts val="1000"/>
+              </a:spcAft>
+            </a:pPr>
+            <a:r>
+              <a:rPr sz="1500" b="1">
+                <a:solidFill>
+                  <a:srgbClr val="0B1220"/>
+                </a:solidFill>
+                <a:latin typeface="Inter"/>
+              </a:rPr>
+              <a:t>Held-out test sets (never used for tuning): </a:t>
+            </a:r>
+            <a:r>
+              <a:rPr sz="1500" b="0">
+                <a:solidFill>
+                  <a:srgbClr val="3B4559"/>
+                </a:solidFill>
+                <a:latin typeface="Inter"/>
+              </a:rPr>
+              <a:t>video claims F1 0.92 vs 0.56 for keyword rules alone; forwarded-message scams F1 0.96 with 0 false alarms on clean messages (bank OTP SMS, news, family chats).</a:t>
+            </a:r>
+          </a:p>
+          <a:p>
+            <a:pPr>
+              <a:spcAft>
+                <a:spcPts val="1000"/>
+              </a:spcAft>
+            </a:pPr>
+            <a:r>
+              <a:rPr sz="1500" b="1">
+                <a:solidFill>
+                  <a:srgbClr val="0B1220"/>
+                </a:solidFill>
+                <a:latin typeface="Inter"/>
+              </a:rPr>
+              <a:t>Small, author-written sets: </a:t>
+            </a:r>
+            <a:r>
+              <a:rPr sz="1500" b="0">
+                <a:solidFill>
+                  <a:srgbClr val="3B4559"/>
+                </a:solidFill>
+                <a:latin typeface="Inter"/>
+              </a:rPr>
+              <a:t>treated as a sanity check, published with the code so anyone can reproduce them.</a:t>
+            </a:r>
+          </a:p>
+        </p:txBody>
+      </p:sp>
+    </p:spTree>
+  </p:cSld>
+  <p:clrMapOvr>
+    <a:masterClrMapping/>
+  </p:clrMapOvr>
+</p:sld>
+</file>
+
+<file path=ppt/slides/slide13.xml><?xml version="1.0" encoding="utf-8"?>
+<p:sld xmlns:a="http://schemas.openxmlformats.org/drawingml/2006/main" xmlns:p="http://schemas.openxmlformats.org/presentationml/2006/main" xmlns:r="http://schemas.openxmlformats.org/officeDocument/2006/relationships">
+  <p:cSld>
+    <p:bg>
+      <p:bgPr>
+        <a:solidFill>
+          <a:srgbClr val="F6F4FB"/>
+        </a:solidFill>
+        <a:effectLst/>
+      </p:bgPr>
+    </p:bg>
+    <p:spTree>
+      <p:nvGrpSpPr>
+        <p:cNvPr id="1" name=""/>
+        <p:cNvGrpSpPr/>
+        <p:nvPr/>
+      </p:nvGrpSpPr>
+      <p:grpSpPr/>
+      <p:sp>
+        <p:nvSpPr>
+          <p:cNvPr id="2" name="Rectangle 1"/>
+          <p:cNvSpPr/>
+          <p:nvPr/>
+        </p:nvSpPr>
+        <p:spPr>
+          <a:xfrm>
+            <a:off x="0" y="0"/>
+            <a:ext cx="12191695" cy="82296"/>
+          </a:xfrm>
+          <a:prstGeom prst="rect">
+            <a:avLst/>
+          </a:prstGeom>
+          <a:gradFill rotWithShape="1">
+            <a:gsLst>
+              <a:gs pos="0">
+                <a:srgbClr val="FF7A1A"/>
+              </a:gs>
+              <a:gs pos="100000">
+                <a:srgbClr val="7C4DFF"/>
+              </a:gs>
+            </a:gsLst>
+            <a:lin scaled="0" ang="0"/>
+          </a:gradFill>
+          <a:ln>
+            <a:noFill/>
+          </a:ln>
+        </p:spPr>
+        <p:style>
+          <a:lnRef idx="1">
+            <a:schemeClr val="accent1"/>
+          </a:lnRef>
+          <a:fillRef idx="3">
+            <a:schemeClr val="accent1"/>
+          </a:fillRef>
+          <a:effectRef idx="2">
+            <a:schemeClr val="accent1"/>
+          </a:effectRef>
+          <a:fontRef idx="minor">
+            <a:schemeClr val="lt1"/>
+          </a:fontRef>
+        </p:style>
+        <p:txBody>
+          <a:bodyPr rtlCol="0" anchor="ctr"/>
+          <a:lstStyle/>
+          <a:p>
+            <a:pPr algn="ctr"/>
+          </a:p>
+        </p:txBody>
+      </p:sp>
+      <p:sp>
+        <p:nvSpPr>
+          <p:cNvPr id="3" name="TextBox 2"/>
+          <p:cNvSpPr txBox="1"/>
+          <p:nvPr/>
+        </p:nvSpPr>
+        <p:spPr>
+          <a:xfrm>
+            <a:off x="548640" y="320040"/>
+            <a:ext cx="10972800" cy="365760"/>
+          </a:xfrm>
+          <a:prstGeom prst="rect">
+            <a:avLst/>
+          </a:prstGeom>
+          <a:noFill/>
+        </p:spPr>
+        <p:txBody>
+          <a:bodyPr wrap="square">
+            <a:spAutoFit/>
+          </a:bodyPr>
+          <a:lstStyle/>
+          <a:p>
+            <a:pPr>
+              <a:spcAft>
+                <a:spcPts val="800"/>
+              </a:spcAft>
+            </a:pPr>
+            <a:r>
+              <a:rPr sz="1200" b="1">
+                <a:solidFill>
+                  <a:srgbClr val="FF7A1A"/>
+                </a:solidFill>
+                <a:latin typeface="Inter"/>
+              </a:rPr>
+              <a:t>FEASIBILITY &amp; SCALE</a:t>
+            </a:r>
+          </a:p>
+        </p:txBody>
+      </p:sp>
+      <p:sp>
+        <p:nvSpPr>
+          <p:cNvPr id="4" name="TextBox 3"/>
+          <p:cNvSpPr txBox="1"/>
+          <p:nvPr/>
+        </p:nvSpPr>
+        <p:spPr>
+          <a:xfrm>
+            <a:off x="548640" y="594360"/>
+            <a:ext cx="11155680" cy="914400"/>
+          </a:xfrm>
+          <a:prstGeom prst="rect">
+            <a:avLst/>
+          </a:prstGeom>
+          <a:noFill/>
+        </p:spPr>
+        <p:txBody>
+          <a:bodyPr wrap="square">
+            <a:spAutoFit/>
+          </a:bodyPr>
+          <a:lstStyle/>
+          <a:p>
+            <a:pPr>
+              <a:spcAft>
+                <a:spcPts val="800"/>
+              </a:spcAft>
+            </a:pPr>
+            <a:r>
+              <a:rPr sz="3000" b="1">
+                <a:solidFill>
+                  <a:srgbClr val="0B1220"/>
+                </a:solidFill>
+                <a:latin typeface="Inter"/>
+              </a:rPr>
+              <a:t>Infrastructure any institution can run</a:t>
+            </a:r>
+          </a:p>
+        </p:txBody>
+      </p:sp>
+      <p:sp>
+        <p:nvSpPr>
+          <p:cNvPr id="5" name="TextBox 4"/>
+          <p:cNvSpPr txBox="1"/>
+          <p:nvPr/>
+        </p:nvSpPr>
+        <p:spPr>
+          <a:xfrm>
+            <a:off x="548640" y="1645920"/>
+            <a:ext cx="5486400" cy="4572000"/>
+          </a:xfrm>
+          <a:prstGeom prst="rect">
+            <a:avLst/>
+          </a:prstGeom>
+          <a:noFill/>
+        </p:spPr>
+        <p:txBody>
+          <a:bodyPr wrap="square">
+            <a:spAutoFit/>
+          </a:bodyPr>
+          <a:lstStyle/>
+          <a:p>
+            <a:pPr>
+              <a:spcAft>
+                <a:spcPts val="1200"/>
+              </a:spcAft>
+            </a:pPr>
+            <a:r>
+              <a:rPr sz="1600" b="1">
+                <a:solidFill>
+                  <a:srgbClr val="FF7A1A"/>
+                </a:solidFill>
+                <a:latin typeface="Inter"/>
+              </a:rPr>
+              <a:t>•  </a:t>
+            </a:r>
+            <a:r>
+              <a:rPr sz="1600" b="0">
+                <a:solidFill>
+                  <a:srgbClr val="3B4559"/>
+                </a:solidFill>
+                <a:latin typeface="Inter"/>
+              </a:rPr>
+              <a:t>Open source; runs on one consumer GPU with zero per-check cost, or on a hosted model API</a:t>
+            </a:r>
+          </a:p>
+          <a:p>
+            <a:pPr>
+              <a:spcAft>
+                <a:spcPts val="1200"/>
+              </a:spcAft>
+            </a:pPr>
+            <a:r>
+              <a:rPr sz="1600" b="1">
+                <a:solidFill>
+                  <a:srgbClr val="FF7A1A"/>
+                </a:solidFill>
+                <a:latin typeface="Inter"/>
+              </a:rPr>
+              <a:t>•  </a:t>
+            </a:r>
+            <a:r>
+              <a:rPr sz="1600" b="0">
+                <a:solidFill>
+                  <a:srgbClr val="3B4559"/>
+                </a:solidFill>
+                <a:latin typeface="Inter"/>
+              </a:rPr>
+              <a:t>An exchange, depository, investor-education fund or NGO can host it for millions; users only need a phone browser</a:t>
+            </a:r>
+          </a:p>
+          <a:p>
+            <a:pPr>
+              <a:spcAft>
+                <a:spcPts val="1200"/>
+              </a:spcAft>
+            </a:pPr>
+            <a:r>
+              <a:rPr sz="1600" b="1">
+                <a:solidFill>
+                  <a:srgbClr val="FF7A1A"/>
+                </a:solidFill>
+                <a:latin typeface="Inter"/>
+              </a:rPr>
+              <a:t>•  </a:t>
+            </a:r>
+            <a:r>
+              <a:rPr sz="1600" b="0">
+                <a:solidFill>
+                  <a:srgbClr val="3B4559"/>
+                </a:solidFill>
+                <a:latin typeface="Inter"/>
+              </a:rPr>
+              <a:t>Rules, registers and languages are data: add new scam patterns or regional languages without retraining</a:t>
+            </a:r>
+          </a:p>
+        </p:txBody>
+      </p:sp>
+      <p:sp>
+        <p:nvSpPr>
+          <p:cNvPr id="6" name="Rounded Rectangle 5"/>
+          <p:cNvSpPr/>
+          <p:nvPr/>
+        </p:nvSpPr>
+        <p:spPr>
+          <a:xfrm>
+            <a:off x="6400800" y="1691640"/>
+            <a:ext cx="5212080" cy="4114800"/>
+          </a:xfrm>
+          <a:prstGeom prst="roundRect">
+            <a:avLst>
+              <a:gd name="adj" fmla="val 8000"/>
+            </a:avLst>
+          </a:prstGeom>
+          <a:solidFill>
+            <a:srgbClr val="FFFFFF"/>
+          </a:solidFill>
+          <a:ln>
+            <a:solidFill>
+              <a:srgbClr val="E4E1EE"/>
+            </a:solidFill>
+          </a:ln>
+          <a:effectLst/>
+        </p:spPr>
+        <p:style>
+          <a:lnRef idx="1">
+            <a:schemeClr val="accent1"/>
+          </a:lnRef>
+          <a:fillRef idx="3">
+            <a:schemeClr val="accent1"/>
+          </a:fillRef>
+          <a:effectRef idx="2">
+            <a:schemeClr val="accent1"/>
+          </a:effectRef>
+          <a:fontRef idx="minor">
+            <a:schemeClr val="lt1"/>
+          </a:fontRef>
+        </p:style>
+        <p:txBody>
+          <a:bodyPr rtlCol="0" anchor="ctr"/>
+          <a:lstStyle/>
+          <a:p>
+            <a:pPr algn="ctr"/>
+          </a:p>
+        </p:txBody>
+      </p:sp>
+      <p:sp>
+        <p:nvSpPr>
+          <p:cNvPr id="7" name="Rectangle 6"/>
+          <p:cNvSpPr/>
+          <p:nvPr/>
+        </p:nvSpPr>
+        <p:spPr>
+          <a:xfrm>
+            <a:off x="6629400" y="1920240"/>
+            <a:ext cx="411480" cy="54864"/>
+          </a:xfrm>
+          <a:prstGeom prst="rect">
+            <a:avLst/>
+          </a:prstGeom>
+          <a:solidFill>
+            <a:srgbClr val="FF7A1A"/>
+          </a:solidFill>
+          <a:ln>
+            <a:noFill/>
+          </a:ln>
+        </p:spPr>
+        <p:style>
+          <a:lnRef idx="1">
+            <a:schemeClr val="accent1"/>
+          </a:lnRef>
+          <a:fillRef idx="3">
+            <a:schemeClr val="accent1"/>
+          </a:fillRef>
+          <a:effectRef idx="2">
+            <a:schemeClr val="accent1"/>
+          </a:effectRef>
+          <a:fontRef idx="minor">
+            <a:schemeClr val="lt1"/>
+          </a:fontRef>
+        </p:style>
+        <p:txBody>
+          <a:bodyPr rtlCol="0" anchor="ctr"/>
+          <a:lstStyle/>
+          <a:p>
+            <a:pPr algn="ctr"/>
+          </a:p>
+        </p:txBody>
+      </p:sp>
+      <p:sp>
+        <p:nvSpPr>
+          <p:cNvPr id="8" name="TextBox 7"/>
+          <p:cNvSpPr txBox="1"/>
+          <p:nvPr/>
+        </p:nvSpPr>
+        <p:spPr>
+          <a:xfrm>
+            <a:off x="6583680" y="2057400"/>
+            <a:ext cx="4846320" cy="548640"/>
+          </a:xfrm>
+          <a:prstGeom prst="rect">
+            <a:avLst/>
+          </a:prstGeom>
+          <a:noFill/>
+        </p:spPr>
+        <p:txBody>
+          <a:bodyPr wrap="square">
+            <a:spAutoFit/>
+          </a:bodyPr>
+          <a:lstStyle/>
+          <a:p>
+            <a:pPr>
+              <a:spcAft>
+                <a:spcPts val="800"/>
+              </a:spcAft>
+            </a:pPr>
+            <a:r>
+              <a:rPr sz="1700" b="1">
+                <a:solidFill>
+                  <a:srgbClr val="0B1220"/>
+                </a:solidFill>
+                <a:latin typeface="Inter"/>
+              </a:rPr>
+              <a:t>Next steps</a:t>
+            </a:r>
+          </a:p>
+        </p:txBody>
+      </p:sp>
+      <p:sp>
+        <p:nvSpPr>
+          <p:cNvPr id="9" name="TextBox 8"/>
+          <p:cNvSpPr txBox="1"/>
+          <p:nvPr/>
+        </p:nvSpPr>
+        <p:spPr>
+          <a:xfrm>
+            <a:off x="6583680" y="2560320"/>
+            <a:ext cx="4846320" cy="3200400"/>
+          </a:xfrm>
+          <a:prstGeom prst="rect">
+            <a:avLst/>
+          </a:prstGeom>
+          <a:noFill/>
+        </p:spPr>
+        <p:txBody>
+          <a:bodyPr wrap="square">
+            <a:spAutoFit/>
+          </a:bodyPr>
+          <a:lstStyle/>
+          <a:p>
+            <a:pPr>
+              <a:spcAft>
+                <a:spcPts val="500"/>
+              </a:spcAft>
+            </a:pPr>
+            <a:r>
+              <a:rPr sz="1400" b="0">
+                <a:solidFill>
+                  <a:srgbClr val="3B4559"/>
+                </a:solidFill>
+                <a:latin typeface="Inter"/>
+              </a:rPr>
+              <a:t>Share-to-Nirikshak from WhatsApp and a Telegram bot</a:t>
+            </a:r>
+          </a:p>
+          <a:p>
+            <a:pPr>
+              <a:spcAft>
+                <a:spcPts val="500"/>
+              </a:spcAft>
+            </a:pPr>
+            <a:r>
+              <a:rPr sz="1400" b="0">
+                <a:solidFill>
+                  <a:srgbClr val="3B4559"/>
+                </a:solidFill>
+                <a:latin typeface="Inter"/>
+              </a:rPr>
+              <a:t>Tamil, Telugu, Bengali, Marathi via Bhashini / IndicTrans2</a:t>
+            </a:r>
+          </a:p>
+          <a:p>
+            <a:pPr>
+              <a:spcAft>
+                <a:spcPts val="500"/>
+              </a:spcAft>
+            </a:pPr>
+            <a:r>
+              <a:rPr sz="1400" b="0">
+                <a:solidFill>
+                  <a:srgbClr val="3B4559"/>
+                </a:solidFill>
+                <a:latin typeface="Inter"/>
+              </a:rPr>
+              <a:t>IVR / missed-call verification of a registration number</a:t>
+            </a:r>
+          </a:p>
+          <a:p>
+            <a:pPr>
+              <a:spcAft>
+                <a:spcPts val="500"/>
+              </a:spcAft>
+            </a:pPr>
+            <a:r>
+              <a:rPr sz="1400" b="0">
+                <a:solidFill>
+                  <a:srgbClr val="3B4559"/>
+                </a:solidFill>
+                <a:latin typeface="Inter"/>
+              </a:rPr>
+              <a:t>Brokers' and AMFI distributor registers; nightly SEBI sync</a:t>
+            </a:r>
+          </a:p>
+          <a:p>
+            <a:pPr>
+              <a:spcAft>
+                <a:spcPts val="500"/>
+              </a:spcAft>
+            </a:pPr>
+            <a:r>
+              <a:rPr sz="1400" b="0">
+                <a:solidFill>
+                  <a:srgbClr val="3B4559"/>
+                </a:solidFill>
+                <a:latin typeface="Inter"/>
+              </a:rPr>
+              <a:t>Larger labelled dataset with investor-protection volunteers</a:t>
+            </a:r>
+          </a:p>
+        </p:txBody>
+      </p:sp>
+    </p:spTree>
+  </p:cSld>
+  <p:clrMapOvr>
+    <a:masterClrMapping/>
+  </p:clrMapOvr>
+</p:sld>
+</file>
+
+<file path=ppt/slides/slide14.xml><?xml version="1.0" encoding="utf-8"?>
+<p:sld xmlns:a="http://schemas.openxmlformats.org/drawingml/2006/main" xmlns:p="http://schemas.openxmlformats.org/presentationml/2006/main" xmlns:r="http://schemas.openxmlformats.org/officeDocument/2006/relationships">
+  <p:cSld>
+    <p:bg>
+      <p:bgPr>
+        <a:solidFill>
+          <a:srgbClr val="0B0F1A"/>
+        </a:solidFill>
+        <a:effectLst/>
+      </p:bgPr>
+    </p:bg>
+    <p:spTree>
+      <p:nvGrpSpPr>
+        <p:cNvPr id="1" name=""/>
+        <p:cNvGrpSpPr/>
+        <p:nvPr/>
+      </p:nvGrpSpPr>
+      <p:grpSpPr/>
+      <p:sp>
+        <p:nvSpPr>
+          <p:cNvPr id="2" name="TextBox 1"/>
+          <p:cNvSpPr txBox="1"/>
+          <p:nvPr/>
+        </p:nvSpPr>
+        <p:spPr>
+          <a:xfrm>
+            <a:off x="822960" y="2103120"/>
+            <a:ext cx="10515600" cy="1188720"/>
+          </a:xfrm>
+          <a:prstGeom prst="rect">
+            <a:avLst/>
+          </a:prstGeom>
+          <a:noFill/>
+        </p:spPr>
+        <p:txBody>
+          <a:bodyPr wrap="square">
+            <a:spAutoFit/>
+          </a:bodyPr>
+          <a:lstStyle/>
+          <a:p>
+            <a:pPr>
+              <a:spcAft>
+                <a:spcPts val="800"/>
+              </a:spcAft>
+            </a:pPr>
+            <a:r>
+              <a:rPr sz="4800" b="1">
+                <a:solidFill>
+                  <a:srgbClr val="FFFFFF"/>
+                </a:solidFill>
+                <a:latin typeface="Inter"/>
+              </a:rPr>
+              <a:t>Check before you trust.</a:t>
+            </a:r>
+          </a:p>
+        </p:txBody>
+      </p:sp>
+      <p:sp>
+        <p:nvSpPr>
+          <p:cNvPr id="3" name="TextBox 2"/>
+          <p:cNvSpPr txBox="1"/>
+          <p:nvPr/>
+        </p:nvSpPr>
+        <p:spPr>
+          <a:xfrm>
+            <a:off x="822960" y="3291840"/>
+            <a:ext cx="10515600" cy="1463040"/>
+          </a:xfrm>
+          <a:prstGeom prst="rect">
+            <a:avLst/>
+          </a:prstGeom>
+          <a:noFill/>
+        </p:spPr>
+        <p:txBody>
+          <a:bodyPr wrap="square">
+            <a:spAutoFit/>
+          </a:bodyPr>
+          <a:lstStyle/>
+          <a:p>
+            <a:pPr>
+              <a:spcAft>
+                <a:spcPts val="1000"/>
+              </a:spcAft>
+            </a:pPr>
+            <a:r>
+              <a:rPr sz="2000" b="1">
+                <a:solidFill>
+                  <a:srgbClr val="FF7A1A"/>
+                </a:solidFill>
+                <a:latin typeface="Inter"/>
+              </a:rPr>
+              <a:t>Live demo  </a:t>
+            </a:r>
+            <a:r>
+              <a:rPr sz="2000" b="0">
+                <a:solidFill>
+                  <a:srgbClr val="FFFFFF"/>
+                </a:solidFill>
+                <a:latin typeface="Inter"/>
+              </a:rPr>
+              <a:t>huggingface.co/spaces/…/nirikshak</a:t>
+            </a:r>
+          </a:p>
+          <a:p>
+            <a:pPr>
+              <a:spcAft>
+                <a:spcPts val="1000"/>
+              </a:spcAft>
+            </a:pPr>
+            <a:r>
+              <a:rPr sz="2000" b="1">
+                <a:solidFill>
+                  <a:srgbClr val="FF7A1A"/>
+                </a:solidFill>
+                <a:latin typeface="Inter"/>
+              </a:rPr>
+              <a:t>Code  </a:t>
+            </a:r>
+            <a:r>
+              <a:rPr sz="2000" b="0">
+                <a:solidFill>
+                  <a:srgbClr val="FFFFFF"/>
+                </a:solidFill>
+                <a:latin typeface="Inter"/>
+              </a:rPr>
+              <a:t>github.com/RudraPandit0504/nirikshak</a:t>
+            </a:r>
+          </a:p>
+        </p:txBody>
+      </p:sp>
+      <p:sp>
+        <p:nvSpPr>
+          <p:cNvPr id="4" name="TextBox 3"/>
+          <p:cNvSpPr txBox="1"/>
+          <p:nvPr/>
+        </p:nvSpPr>
+        <p:spPr>
+          <a:xfrm>
+            <a:off x="822960" y="5760720"/>
+            <a:ext cx="10515600" cy="548640"/>
+          </a:xfrm>
+          <a:prstGeom prst="rect">
+            <a:avLst/>
+          </a:prstGeom>
+          <a:noFill/>
+        </p:spPr>
+        <p:txBody>
+          <a:bodyPr wrap="square">
+            <a:spAutoFit/>
+          </a:bodyPr>
+          <a:lstStyle/>
+          <a:p>
+            <a:pPr>
+              <a:spcAft>
+                <a:spcPts val="800"/>
+              </a:spcAft>
+            </a:pPr>
+            <a:r>
+              <a:rPr sz="1300" b="0">
+                <a:solidFill>
+                  <a:srgbClr val="9AA4B5"/>
+                </a:solidFill>
+                <a:latin typeface="Inter"/>
+              </a:rPr>
               <a:t>Awareness tool only. Not investment advice.</a:t>
             </a:r>
           </a:p>
@@ -3434,7 +6299,7 @@
     <p:bg>
       <p:bgPr>
         <a:solidFill>
-          <a:srgbClr val="F8FAFC"/>
+          <a:srgbClr val="F6F4FB"/>
         </a:solidFill>
         <a:effectLst/>
       </p:bgPr>
@@ -3455,14 +6320,22 @@
         <p:spPr>
           <a:xfrm>
             <a:off x="0" y="0"/>
-            <a:ext cx="164592" cy="6858000"/>
-          </a:xfrm>
-          <a:prstGeom prst="rect">
-            <a:avLst/>
-          </a:prstGeom>
-          <a:solidFill>
-            <a:srgbClr val="F59E0B"/>
-          </a:solidFill>
+            <a:ext cx="12191695" cy="82296"/>
+          </a:xfrm>
+          <a:prstGeom prst="rect">
+            <a:avLst/>
+          </a:prstGeom>
+          <a:gradFill rotWithShape="1">
+            <a:gsLst>
+              <a:gs pos="0">
+                <a:srgbClr val="FF7A1A"/>
+              </a:gs>
+              <a:gs pos="100000">
+                <a:srgbClr val="7C4DFF"/>
+              </a:gs>
+            </a:gsLst>
+            <a:lin scaled="0" ang="0"/>
+          </a:gradFill>
           <a:ln>
             <a:noFill/>
           </a:ln>
@@ -3497,7 +6370,7 @@
         </p:nvSpPr>
         <p:spPr>
           <a:xfrm>
-            <a:off x="640080" y="365760"/>
+            <a:off x="548640" y="320040"/>
             <a:ext cx="10972800" cy="365760"/>
           </a:xfrm>
           <a:prstGeom prst="rect">
@@ -3513,16 +6386,16 @@
           <a:p>
             <a:pPr>
               <a:spcAft>
-                <a:spcPts val="400"/>
-              </a:spcAft>
-              <a:defRPr sz="1300" b="1">
-                <a:solidFill>
-                  <a:srgbClr val="F59E0B"/>
-                </a:solidFill>
-                <a:latin typeface="Inter"/>
-              </a:defRPr>
-            </a:pPr>
-            <a:r>
+                <a:spcPts val="800"/>
+              </a:spcAft>
+            </a:pPr>
+            <a:r>
+              <a:rPr sz="1200" b="1">
+                <a:solidFill>
+                  <a:srgbClr val="FF7A1A"/>
+                </a:solidFill>
+                <a:latin typeface="Inter"/>
+              </a:rPr>
               <a:t>THE PROBLEM</a:t>
             </a:r>
           </a:p>
@@ -3536,8 +6409,8 @@
         </p:nvSpPr>
         <p:spPr>
           <a:xfrm>
-            <a:off x="640080" y="685800"/>
-            <a:ext cx="10972800" cy="822960"/>
+            <a:off x="548640" y="594360"/>
+            <a:ext cx="11155680" cy="914400"/>
           </a:xfrm>
           <a:prstGeom prst="rect">
             <a:avLst/>
@@ -3552,122 +6425,35 @@
           <a:p>
             <a:pPr>
               <a:spcAft>
-                <a:spcPts val="400"/>
-              </a:spcAft>
-              <a:defRPr sz="3200" b="1">
-                <a:solidFill>
-                  <a:srgbClr val="0F172A"/>
-                </a:solidFill>
-                <a:latin typeface="Inter"/>
-              </a:defRPr>
-            </a:pPr>
-            <a:r>
-              <a:t>Finfluencer advice, dressed as education</a:t>
-            </a:r>
-          </a:p>
-        </p:txBody>
-      </p:sp>
-      <p:sp>
-        <p:nvSpPr>
-          <p:cNvPr id="5" name="TextBox 4"/>
-          <p:cNvSpPr txBox="1"/>
-          <p:nvPr/>
-        </p:nvSpPr>
-        <p:spPr>
-          <a:xfrm>
-            <a:off x="640080" y="1737360"/>
-            <a:ext cx="6766560" cy="4572000"/>
-          </a:xfrm>
-          <a:prstGeom prst="rect">
-            <a:avLst/>
-          </a:prstGeom>
-          <a:noFill/>
-        </p:spPr>
-        <p:txBody>
-          <a:bodyPr wrap="square">
-            <a:spAutoFit/>
-          </a:bodyPr>
-          <a:lstStyle/>
-          <a:p>
-            <a:pPr>
-              <a:spcAft>
-                <a:spcPts val="1000"/>
-              </a:spcAft>
-              <a:defRPr sz="1900" b="0">
-                <a:solidFill>
-                  <a:srgbClr val="0F172A"/>
-                </a:solidFill>
-                <a:latin typeface="Inter"/>
-              </a:defRPr>
-            </a:pPr>
-            <a:r>
-              <a:t>•  First-time investors, many from Tier-2/3 cities, take their cues from YouTube and Instagram</a:t>
-            </a:r>
-          </a:p>
-          <a:p>
-            <a:pPr>
-              <a:spcAft>
-                <a:spcPts val="1000"/>
-              </a:spcAft>
-              <a:defRPr sz="1900" b="0">
-                <a:solidFill>
-                  <a:srgbClr val="0F172A"/>
-                </a:solidFill>
-                <a:latin typeface="Inter"/>
-              </a:defRPr>
-            </a:pPr>
-            <a:r>
-              <a:t>•  Videos mix education with unregistered buy/sell calls, 'guaranteed' returns and paid Telegram groups</a:t>
-            </a:r>
-          </a:p>
-          <a:p>
-            <a:pPr>
-              <a:spcAft>
-                <a:spcPts val="1000"/>
-              </a:spcAft>
-              <a:defRPr sz="1900" b="0">
-                <a:solidFill>
-                  <a:srgbClr val="0F172A"/>
-                </a:solidFill>
-                <a:latin typeface="Inter"/>
-              </a:defRPr>
-            </a:pPr>
-            <a:r>
-              <a:t>•  Much of it is in Hindi or Hinglish, long-form, with affiliate links buried in the description</a:t>
-            </a:r>
-          </a:p>
-          <a:p>
-            <a:pPr>
-              <a:spcAft>
-                <a:spcPts val="1000"/>
-              </a:spcAft>
-              <a:defRPr sz="1900" b="0">
-                <a:solidFill>
-                  <a:srgbClr val="0F172A"/>
-                </a:solidFill>
-                <a:latin typeface="Inter"/>
-              </a:defRPr>
-            </a:pPr>
-            <a:r>
-              <a:t>•  Only SEBI-registered Research Analysts / Investment Advisers may give such advice, but viewers have no quick way to check</a:t>
-            </a:r>
-          </a:p>
-        </p:txBody>
-      </p:sp>
-      <p:sp>
-        <p:nvSpPr>
-          <p:cNvPr id="6" name="Rounded Rectangle 5"/>
+                <a:spcPts val="800"/>
+              </a:spcAft>
+            </a:pPr>
+            <a:r>
+              <a:rPr sz="3000" b="1">
+                <a:solidFill>
+                  <a:srgbClr val="0B1220"/>
+                </a:solidFill>
+                <a:latin typeface="Inter"/>
+              </a:rPr>
+              <a:t>Market access has outrun trustworthy guidance</a:t>
+            </a:r>
+          </a:p>
+        </p:txBody>
+      </p:sp>
+      <p:sp>
+        <p:nvSpPr>
+          <p:cNvPr id="5" name="Rounded Rectangle 4"/>
           <p:cNvSpPr/>
           <p:nvPr/>
         </p:nvSpPr>
         <p:spPr>
           <a:xfrm>
-            <a:off x="7863840" y="1828800"/>
-            <a:ext cx="3749039" cy="3108960"/>
+            <a:off x="548640" y="1645920"/>
+            <a:ext cx="3566160" cy="1463040"/>
           </a:xfrm>
           <a:prstGeom prst="roundRect">
             <a:avLst>
-              <a:gd name="adj" fmla="val 8000"/>
+              <a:gd name="adj" fmla="val 10000"/>
             </a:avLst>
           </a:prstGeom>
           <a:solidFill>
@@ -3675,7 +6461,7 @@
           </a:solidFill>
           <a:ln>
             <a:solidFill>
-              <a:srgbClr val="F59E0B"/>
+              <a:srgbClr val="E4E1EE"/>
             </a:solidFill>
           </a:ln>
         </p:spPr>
@@ -3694,78 +6480,435 @@
           </a:fontRef>
         </p:style>
         <p:txBody>
-          <a:bodyPr rtlCol="0" anchor="ctr" wrap="square" lIns="137160" rIns="137160"/>
-          <a:lstStyle/>
-          <a:p>
-            <a:pPr algn="ctr">
-              <a:defRPr b="1" sz="1800">
-                <a:solidFill>
-                  <a:srgbClr val="0F172A"/>
-                </a:solidFill>
-              </a:defRPr>
-            </a:pPr>
-            <a:r>
-              <a:t>What a viewer needs</a:t>
-            </a:r>
-          </a:p>
-          <a:p>
-            <a:pPr>
-              <a:spcBef>
-                <a:spcPts val="400"/>
-              </a:spcBef>
-              <a:defRPr sz="1400">
-                <a:solidFill>
-                  <a:srgbClr val="475569"/>
-                </a:solidFill>
-              </a:defRPr>
-            </a:pPr>
-            <a:r>
-              <a:t>• Which exact statements are risky?</a:t>
-            </a:r>
-          </a:p>
-          <a:p>
-            <a:pPr>
-              <a:spcBef>
-                <a:spcPts val="400"/>
-              </a:spcBef>
-              <a:defRPr sz="1400">
-                <a:solidFill>
-                  <a:srgbClr val="475569"/>
-                </a:solidFill>
-              </a:defRPr>
-            </a:pPr>
-            <a:r>
-              <a:t>• Is this person SEBI-registered?</a:t>
-            </a:r>
-          </a:p>
-          <a:p>
-            <a:pPr>
-              <a:spcBef>
-                <a:spcPts val="400"/>
-              </a:spcBef>
-              <a:defRPr sz="1400">
-                <a:solidFill>
-                  <a:srgbClr val="475569"/>
-                </a:solidFill>
-              </a:defRPr>
-            </a:pPr>
-            <a:r>
-              <a:t>• Is there a disclaimer, or a hidden promotion?</a:t>
-            </a:r>
-          </a:p>
-          <a:p>
-            <a:pPr>
-              <a:spcBef>
-                <a:spcPts val="400"/>
-              </a:spcBef>
-              <a:defRPr sz="1400">
-                <a:solidFill>
-                  <a:srgbClr val="475569"/>
-                </a:solidFill>
-              </a:defRPr>
-            </a:pPr>
-            <a:r>
-              <a:t>• …in my language, in under a minute</a:t>
+          <a:bodyPr rtlCol="0" anchor="ctr"/>
+          <a:lstStyle/>
+          <a:p>
+            <a:pPr algn="ctr"/>
+          </a:p>
+        </p:txBody>
+      </p:sp>
+      <p:sp>
+        <p:nvSpPr>
+          <p:cNvPr id="6" name="TextBox 5"/>
+          <p:cNvSpPr txBox="1"/>
+          <p:nvPr/>
+        </p:nvSpPr>
+        <p:spPr>
+          <a:xfrm>
+            <a:off x="777240" y="1783080"/>
+            <a:ext cx="3200400" cy="731520"/>
+          </a:xfrm>
+          <a:prstGeom prst="rect">
+            <a:avLst/>
+          </a:prstGeom>
+          <a:noFill/>
+        </p:spPr>
+        <p:txBody>
+          <a:bodyPr wrap="square">
+            <a:spAutoFit/>
+          </a:bodyPr>
+          <a:lstStyle/>
+          <a:p>
+            <a:pPr>
+              <a:spcAft>
+                <a:spcPts val="800"/>
+              </a:spcAft>
+            </a:pPr>
+            <a:r>
+              <a:rPr sz="3400" b="1">
+                <a:solidFill>
+                  <a:srgbClr val="FF7A1A"/>
+                </a:solidFill>
+                <a:latin typeface="Inter"/>
+              </a:rPr>
+              <a:t>16+ crore</a:t>
+            </a:r>
+          </a:p>
+        </p:txBody>
+      </p:sp>
+      <p:sp>
+        <p:nvSpPr>
+          <p:cNvPr id="7" name="TextBox 6"/>
+          <p:cNvSpPr txBox="1"/>
+          <p:nvPr/>
+        </p:nvSpPr>
+        <p:spPr>
+          <a:xfrm>
+            <a:off x="777240" y="2514600"/>
+            <a:ext cx="3200400" cy="548640"/>
+          </a:xfrm>
+          <a:prstGeom prst="rect">
+            <a:avLst/>
+          </a:prstGeom>
+          <a:noFill/>
+        </p:spPr>
+        <p:txBody>
+          <a:bodyPr wrap="square">
+            <a:spAutoFit/>
+          </a:bodyPr>
+          <a:lstStyle/>
+          <a:p>
+            <a:pPr>
+              <a:spcAft>
+                <a:spcPts val="800"/>
+              </a:spcAft>
+            </a:pPr>
+            <a:r>
+              <a:rPr sz="1400" b="0">
+                <a:solidFill>
+                  <a:srgbClr val="3B4559"/>
+                </a:solidFill>
+                <a:latin typeface="Inter"/>
+              </a:rPr>
+              <a:t>demat accounts in India</a:t>
+            </a:r>
+          </a:p>
+        </p:txBody>
+      </p:sp>
+      <p:sp>
+        <p:nvSpPr>
+          <p:cNvPr id="8" name="Rounded Rectangle 7"/>
+          <p:cNvSpPr/>
+          <p:nvPr/>
+        </p:nvSpPr>
+        <p:spPr>
+          <a:xfrm>
+            <a:off x="4343400" y="1645920"/>
+            <a:ext cx="3566160" cy="1463040"/>
+          </a:xfrm>
+          <a:prstGeom prst="roundRect">
+            <a:avLst>
+              <a:gd name="adj" fmla="val 10000"/>
+            </a:avLst>
+          </a:prstGeom>
+          <a:solidFill>
+            <a:srgbClr val="FFFFFF"/>
+          </a:solidFill>
+          <a:ln>
+            <a:solidFill>
+              <a:srgbClr val="E4E1EE"/>
+            </a:solidFill>
+          </a:ln>
+        </p:spPr>
+        <p:style>
+          <a:lnRef idx="1">
+            <a:schemeClr val="accent1"/>
+          </a:lnRef>
+          <a:fillRef idx="3">
+            <a:schemeClr val="accent1"/>
+          </a:fillRef>
+          <a:effectRef idx="2">
+            <a:schemeClr val="accent1"/>
+          </a:effectRef>
+          <a:fontRef idx="minor">
+            <a:schemeClr val="lt1"/>
+          </a:fontRef>
+        </p:style>
+        <p:txBody>
+          <a:bodyPr rtlCol="0" anchor="ctr"/>
+          <a:lstStyle/>
+          <a:p>
+            <a:pPr algn="ctr"/>
+          </a:p>
+        </p:txBody>
+      </p:sp>
+      <p:sp>
+        <p:nvSpPr>
+          <p:cNvPr id="9" name="TextBox 8"/>
+          <p:cNvSpPr txBox="1"/>
+          <p:nvPr/>
+        </p:nvSpPr>
+        <p:spPr>
+          <a:xfrm>
+            <a:off x="4572000" y="1783080"/>
+            <a:ext cx="3200400" cy="731520"/>
+          </a:xfrm>
+          <a:prstGeom prst="rect">
+            <a:avLst/>
+          </a:prstGeom>
+          <a:noFill/>
+        </p:spPr>
+        <p:txBody>
+          <a:bodyPr wrap="square">
+            <a:spAutoFit/>
+          </a:bodyPr>
+          <a:lstStyle/>
+          <a:p>
+            <a:pPr>
+              <a:spcAft>
+                <a:spcPts val="800"/>
+              </a:spcAft>
+            </a:pPr>
+            <a:r>
+              <a:rPr sz="3400" b="1">
+                <a:solidFill>
+                  <a:srgbClr val="7C4DFF"/>
+                </a:solidFill>
+                <a:latin typeface="Inter"/>
+              </a:rPr>
+              <a:t>70%+</a:t>
+            </a:r>
+          </a:p>
+        </p:txBody>
+      </p:sp>
+      <p:sp>
+        <p:nvSpPr>
+          <p:cNvPr id="10" name="TextBox 9"/>
+          <p:cNvSpPr txBox="1"/>
+          <p:nvPr/>
+        </p:nvSpPr>
+        <p:spPr>
+          <a:xfrm>
+            <a:off x="4572000" y="2514600"/>
+            <a:ext cx="3200400" cy="548640"/>
+          </a:xfrm>
+          <a:prstGeom prst="rect">
+            <a:avLst/>
+          </a:prstGeom>
+          <a:noFill/>
+        </p:spPr>
+        <p:txBody>
+          <a:bodyPr wrap="square">
+            <a:spAutoFit/>
+          </a:bodyPr>
+          <a:lstStyle/>
+          <a:p>
+            <a:pPr>
+              <a:spcAft>
+                <a:spcPts val="800"/>
+              </a:spcAft>
+            </a:pPr>
+            <a:r>
+              <a:rPr sz="1400" b="0">
+                <a:solidFill>
+                  <a:srgbClr val="3B4559"/>
+                </a:solidFill>
+                <a:latin typeface="Inter"/>
+              </a:rPr>
+              <a:t>of new retail accounts from Tier-2/3 cities</a:t>
+            </a:r>
+          </a:p>
+        </p:txBody>
+      </p:sp>
+      <p:sp>
+        <p:nvSpPr>
+          <p:cNvPr id="11" name="Rounded Rectangle 10"/>
+          <p:cNvSpPr/>
+          <p:nvPr/>
+        </p:nvSpPr>
+        <p:spPr>
+          <a:xfrm>
+            <a:off x="8138160" y="1645920"/>
+            <a:ext cx="3566160" cy="1463040"/>
+          </a:xfrm>
+          <a:prstGeom prst="roundRect">
+            <a:avLst>
+              <a:gd name="adj" fmla="val 10000"/>
+            </a:avLst>
+          </a:prstGeom>
+          <a:solidFill>
+            <a:srgbClr val="FFFFFF"/>
+          </a:solidFill>
+          <a:ln>
+            <a:solidFill>
+              <a:srgbClr val="E4E1EE"/>
+            </a:solidFill>
+          </a:ln>
+        </p:spPr>
+        <p:style>
+          <a:lnRef idx="1">
+            <a:schemeClr val="accent1"/>
+          </a:lnRef>
+          <a:fillRef idx="3">
+            <a:schemeClr val="accent1"/>
+          </a:fillRef>
+          <a:effectRef idx="2">
+            <a:schemeClr val="accent1"/>
+          </a:effectRef>
+          <a:fontRef idx="minor">
+            <a:schemeClr val="lt1"/>
+          </a:fontRef>
+        </p:style>
+        <p:txBody>
+          <a:bodyPr rtlCol="0" anchor="ctr"/>
+          <a:lstStyle/>
+          <a:p>
+            <a:pPr algn="ctr"/>
+          </a:p>
+        </p:txBody>
+      </p:sp>
+      <p:sp>
+        <p:nvSpPr>
+          <p:cNvPr id="12" name="TextBox 11"/>
+          <p:cNvSpPr txBox="1"/>
+          <p:nvPr/>
+        </p:nvSpPr>
+        <p:spPr>
+          <a:xfrm>
+            <a:off x="8366760" y="1783080"/>
+            <a:ext cx="3200400" cy="731520"/>
+          </a:xfrm>
+          <a:prstGeom prst="rect">
+            <a:avLst/>
+          </a:prstGeom>
+          <a:noFill/>
+        </p:spPr>
+        <p:txBody>
+          <a:bodyPr wrap="square">
+            <a:spAutoFit/>
+          </a:bodyPr>
+          <a:lstStyle/>
+          <a:p>
+            <a:pPr>
+              <a:spcAft>
+                <a:spcPts val="800"/>
+              </a:spcAft>
+            </a:pPr>
+            <a:r>
+              <a:rPr sz="3400" b="1">
+                <a:solidFill>
+                  <a:srgbClr val="E53E3E"/>
+                </a:solidFill>
+                <a:latin typeface="Inter"/>
+              </a:rPr>
+              <a:t>9 in 10</a:t>
+            </a:r>
+          </a:p>
+        </p:txBody>
+      </p:sp>
+      <p:sp>
+        <p:nvSpPr>
+          <p:cNvPr id="13" name="TextBox 12"/>
+          <p:cNvSpPr txBox="1"/>
+          <p:nvPr/>
+        </p:nvSpPr>
+        <p:spPr>
+          <a:xfrm>
+            <a:off x="8366760" y="2514600"/>
+            <a:ext cx="3200400" cy="548640"/>
+          </a:xfrm>
+          <a:prstGeom prst="rect">
+            <a:avLst/>
+          </a:prstGeom>
+          <a:noFill/>
+        </p:spPr>
+        <p:txBody>
+          <a:bodyPr wrap="square">
+            <a:spAutoFit/>
+          </a:bodyPr>
+          <a:lstStyle/>
+          <a:p>
+            <a:pPr>
+              <a:spcAft>
+                <a:spcPts val="800"/>
+              </a:spcAft>
+            </a:pPr>
+            <a:r>
+              <a:rPr sz="1400" b="0">
+                <a:solidFill>
+                  <a:srgbClr val="3B4559"/>
+                </a:solidFill>
+                <a:latin typeface="Inter"/>
+              </a:rPr>
+              <a:t>individual F&amp;O traders lose money (SEBI study)</a:t>
+            </a:r>
+          </a:p>
+        </p:txBody>
+      </p:sp>
+      <p:sp>
+        <p:nvSpPr>
+          <p:cNvPr id="14" name="TextBox 13"/>
+          <p:cNvSpPr txBox="1"/>
+          <p:nvPr/>
+        </p:nvSpPr>
+        <p:spPr>
+          <a:xfrm>
+            <a:off x="548640" y="3474720"/>
+            <a:ext cx="11155680" cy="3108960"/>
+          </a:xfrm>
+          <a:prstGeom prst="rect">
+            <a:avLst/>
+          </a:prstGeom>
+          <a:noFill/>
+        </p:spPr>
+        <p:txBody>
+          <a:bodyPr wrap="square">
+            <a:spAutoFit/>
+          </a:bodyPr>
+          <a:lstStyle/>
+          <a:p>
+            <a:pPr>
+              <a:spcAft>
+                <a:spcPts val="1200"/>
+              </a:spcAft>
+            </a:pPr>
+            <a:r>
+              <a:rPr sz="1800" b="1">
+                <a:solidFill>
+                  <a:srgbClr val="FF7A1A"/>
+                </a:solidFill>
+                <a:latin typeface="Inter"/>
+              </a:rPr>
+              <a:t>•  </a:t>
+            </a:r>
+            <a:r>
+              <a:rPr sz="1800" b="0">
+                <a:solidFill>
+                  <a:srgbClr val="3B4559"/>
+                </a:solidFill>
+                <a:latin typeface="Inter"/>
+              </a:rPr>
+              <a:t>Tips arrive as WhatsApp/Telegram forwards and YouTube videos: "guaranteed" returns, buy/sell calls, VIP groups, fake KYC alerts.</a:t>
+            </a:r>
+          </a:p>
+          <a:p>
+            <a:pPr>
+              <a:spcAft>
+                <a:spcPts val="1200"/>
+              </a:spcAft>
+            </a:pPr>
+            <a:r>
+              <a:rPr sz="1800" b="1">
+                <a:solidFill>
+                  <a:srgbClr val="FF7A1A"/>
+                </a:solidFill>
+                <a:latin typeface="Inter"/>
+              </a:rPr>
+              <a:t>•  </a:t>
+            </a:r>
+            <a:r>
+              <a:rPr sz="1800" b="0">
+                <a:solidFill>
+                  <a:srgbClr val="3B4559"/>
+                </a:solidFill>
+                <a:latin typeface="Inter"/>
+              </a:rPr>
+              <a:t>Scammers use fake SEBI numbers, cloned broker sites and remote-access apps; victims realise only when money is gone.</a:t>
+            </a:r>
+          </a:p>
+          <a:p>
+            <a:pPr>
+              <a:spcAft>
+                <a:spcPts val="1200"/>
+              </a:spcAft>
+            </a:pPr>
+            <a:r>
+              <a:rPr sz="1800" b="1">
+                <a:solidFill>
+                  <a:srgbClr val="FF7A1A"/>
+                </a:solidFill>
+                <a:latin typeface="Inter"/>
+              </a:rPr>
+              <a:t>•  </a:t>
+            </a:r>
+            <a:r>
+              <a:rPr sz="1800" b="0">
+                <a:solidFill>
+                  <a:srgbClr val="3B4559"/>
+                </a:solidFill>
+                <a:latin typeface="Inter"/>
+              </a:rPr>
+              <a:t>Many first-time investors are more comfortable in Hindi, have no one to ask, and can't tell education from promotion.</a:t>
             </a:r>
           </a:p>
         </p:txBody>
@@ -3784,7 +6927,7 @@
     <p:bg>
       <p:bgPr>
         <a:solidFill>
-          <a:srgbClr val="F8FAFC"/>
+          <a:srgbClr val="F6F4FB"/>
         </a:solidFill>
         <a:effectLst/>
       </p:bgPr>
@@ -3805,14 +6948,22 @@
         <p:spPr>
           <a:xfrm>
             <a:off x="0" y="0"/>
-            <a:ext cx="164592" cy="6858000"/>
-          </a:xfrm>
-          <a:prstGeom prst="rect">
-            <a:avLst/>
-          </a:prstGeom>
-          <a:solidFill>
-            <a:srgbClr val="F59E0B"/>
-          </a:solidFill>
+            <a:ext cx="12191695" cy="82296"/>
+          </a:xfrm>
+          <a:prstGeom prst="rect">
+            <a:avLst/>
+          </a:prstGeom>
+          <a:gradFill rotWithShape="1">
+            <a:gsLst>
+              <a:gs pos="0">
+                <a:srgbClr val="FF7A1A"/>
+              </a:gs>
+              <a:gs pos="100000">
+                <a:srgbClr val="7C4DFF"/>
+              </a:gs>
+            </a:gsLst>
+            <a:lin scaled="0" ang="0"/>
+          </a:gradFill>
           <a:ln>
             <a:noFill/>
           </a:ln>
@@ -3847,7 +6998,7 @@
         </p:nvSpPr>
         <p:spPr>
           <a:xfrm>
-            <a:off x="640080" y="365760"/>
+            <a:off x="548640" y="320040"/>
             <a:ext cx="10972800" cy="365760"/>
           </a:xfrm>
           <a:prstGeom prst="rect">
@@ -3863,17 +7014,17 @@
           <a:p>
             <a:pPr>
               <a:spcAft>
-                <a:spcPts val="400"/>
-              </a:spcAft>
-              <a:defRPr sz="1300" b="1">
-                <a:solidFill>
-                  <a:srgbClr val="F59E0B"/>
-                </a:solidFill>
-                <a:latin typeface="Inter"/>
-              </a:defRPr>
-            </a:pPr>
-            <a:r>
-              <a:t>THE SOLUTION</a:t>
+                <a:spcPts val="800"/>
+              </a:spcAft>
+            </a:pPr>
+            <a:r>
+              <a:rPr sz="1200" b="1">
+                <a:solidFill>
+                  <a:srgbClr val="FF7A1A"/>
+                </a:solidFill>
+                <a:latin typeface="Inter"/>
+              </a:rPr>
+              <a:t>WHO WE SOLVE FOR</a:t>
             </a:r>
           </a:p>
         </p:txBody>
@@ -3886,8 +7037,8 @@
         </p:nvSpPr>
         <p:spPr>
           <a:xfrm>
-            <a:off x="640080" y="685800"/>
-            <a:ext cx="10972800" cy="822960"/>
+            <a:off x="548640" y="594360"/>
+            <a:ext cx="11155680" cy="914400"/>
           </a:xfrm>
           <a:prstGeom prst="rect">
             <a:avLst/>
@@ -3902,17 +7053,17 @@
           <a:p>
             <a:pPr>
               <a:spcAft>
-                <a:spcPts val="400"/>
-              </a:spcAft>
-              <a:defRPr sz="3200" b="1">
-                <a:solidFill>
-                  <a:srgbClr val="0F172A"/>
-                </a:solidFill>
-                <a:latin typeface="Inter"/>
-              </a:defRPr>
-            </a:pPr>
-            <a:r>
-              <a:t>Paste a link → get a timestamped audit</a:t>
+                <a:spcPts val="800"/>
+              </a:spcAft>
+            </a:pPr>
+            <a:r>
+              <a:rPr sz="3000" b="1">
+                <a:solidFill>
+                  <a:srgbClr val="0B1220"/>
+                </a:solidFill>
+                <a:latin typeface="Inter"/>
+              </a:rPr>
+              <a:t>Sunita, 34, Kanpur: first-time investor, Hindi-first</a:t>
             </a:r>
           </a:p>
         </p:txBody>
@@ -3925,8 +7076,8 @@
         </p:nvSpPr>
         <p:spPr>
           <a:xfrm>
-            <a:off x="640080" y="1691640"/>
-            <a:ext cx="4206240" cy="4754880"/>
+            <a:off x="548640" y="1645920"/>
+            <a:ext cx="5760720" cy="4572000"/>
           </a:xfrm>
           <a:prstGeom prst="rect">
             <a:avLst/>
@@ -3941,114 +7092,507 @@
           <a:p>
             <a:pPr>
               <a:spcAft>
-                <a:spcPts val="1000"/>
-              </a:spcAft>
-              <a:defRPr sz="1700" b="0">
-                <a:solidFill>
-                  <a:srgbClr val="0F172A"/>
-                </a:solidFill>
-                <a:latin typeface="Inter"/>
-              </a:defRPr>
-            </a:pPr>
-            <a:r>
-              <a:t>•  Risk score 0–100 with plain-language summary (read aloud)</a:t>
-            </a:r>
-          </a:p>
-          <a:p>
-            <a:pPr>
-              <a:spcAft>
-                <a:spcPts val="1000"/>
-              </a:spcAft>
-              <a:defRPr sz="1700" b="0">
-                <a:solidFill>
-                  <a:srgbClr val="0F172A"/>
-                </a:solidFill>
-                <a:latin typeface="Inter"/>
-              </a:defRPr>
-            </a:pPr>
-            <a:r>
-              <a:t>•  Every finding quoted verbatim, with timestamp: click it and the video jumps there</a:t>
-            </a:r>
-          </a:p>
-          <a:p>
-            <a:pPr>
-              <a:spcAft>
-                <a:spcPts val="1000"/>
-              </a:spcAft>
-              <a:defRPr sz="1700" b="0">
-                <a:solidFill>
-                  <a:srgbClr val="0F172A"/>
-                </a:solidFill>
-                <a:latin typeface="Inter"/>
-              </a:defRPr>
-            </a:pPr>
-            <a:r>
-              <a:t>•  8 harm categories, each with confidence and AI/keyword origin</a:t>
-            </a:r>
-          </a:p>
-          <a:p>
-            <a:pPr>
-              <a:spcAft>
-                <a:spcPts val="1000"/>
-              </a:spcAft>
-              <a:defRPr sz="1700" b="0">
-                <a:solidFill>
-                  <a:srgbClr val="0F172A"/>
-                </a:solidFill>
-                <a:latin typeface="Inter"/>
-              </a:defRPr>
-            </a:pPr>
-            <a:r>
-              <a:t>•  SEBI RA/IA registry verdict + disclaimer check</a:t>
-            </a:r>
-          </a:p>
-          <a:p>
-            <a:pPr>
-              <a:spcAft>
-                <a:spcPts val="1000"/>
-              </a:spcAft>
-              <a:defRPr sz="1700" b="0">
-                <a:solidFill>
-                  <a:srgbClr val="0F172A"/>
-                </a:solidFill>
-                <a:latin typeface="Inter"/>
-              </a:defRPr>
-            </a:pPr>
-            <a:r>
-              <a:t>•  Full English / हिन्दी switch</a:t>
-            </a:r>
-          </a:p>
-        </p:txBody>
-      </p:sp>
-      <p:pic>
-        <p:nvPicPr>
-          <p:cNvPr id="6" name="Picture 5" descr="c_0_60_report_en.png"/>
-          <p:cNvPicPr>
-            <a:picLocks noChangeAspect="1"/>
-          </p:cNvPicPr>
-          <p:nvPr/>
-        </p:nvPicPr>
-        <p:blipFill>
-          <a:blip r:embed="rId2"/>
-          <a:stretch>
-            <a:fillRect/>
-          </a:stretch>
-        </p:blipFill>
-        <p:spPr>
-          <a:xfrm>
-            <a:off x="5029200" y="1645920"/>
-            <a:ext cx="6766560" cy="4543262"/>
-          </a:xfrm>
-          <a:prstGeom prst="rect">
-            <a:avLst/>
-          </a:prstGeom>
+                <a:spcPts val="1200"/>
+              </a:spcAft>
+            </a:pPr>
+            <a:r>
+              <a:rPr sz="1800" b="1">
+                <a:solidFill>
+                  <a:srgbClr val="FF7A1A"/>
+                </a:solidFill>
+                <a:latin typeface="Inter"/>
+              </a:rPr>
+              <a:t>•  </a:t>
+            </a:r>
+            <a:r>
+              <a:rPr sz="1800" b="0">
+                <a:solidFill>
+                  <a:srgbClr val="3B4559"/>
+                </a:solidFill>
+                <a:latin typeface="Inter"/>
+              </a:rPr>
+              <a:t>Opened a demat account last year; learns from YouTube and family WhatsApp groups</a:t>
+            </a:r>
+          </a:p>
+          <a:p>
+            <a:pPr>
+              <a:spcAft>
+                <a:spcPts val="1200"/>
+              </a:spcAft>
+            </a:pPr>
+            <a:r>
+              <a:rPr sz="1800" b="1">
+                <a:solidFill>
+                  <a:srgbClr val="FF7A1A"/>
+                </a:solidFill>
+                <a:latin typeface="Inter"/>
+              </a:rPr>
+              <a:t>•  </a:t>
+            </a:r>
+            <a:r>
+              <a:rPr sz="1800" b="0">
+                <a:solidFill>
+                  <a:srgbClr val="3B4559"/>
+                </a:solidFill>
+                <a:latin typeface="Inter"/>
+              </a:rPr>
+              <a:t>Receives "tips" and "KYC alerts" daily and can't verify who is behind them</a:t>
+            </a:r>
+          </a:p>
+          <a:p>
+            <a:pPr>
+              <a:spcAft>
+                <a:spcPts val="1200"/>
+              </a:spcAft>
+            </a:pPr>
+            <a:r>
+              <a:rPr sz="1800" b="1">
+                <a:solidFill>
+                  <a:srgbClr val="FF7A1A"/>
+                </a:solidFill>
+                <a:latin typeface="Inter"/>
+              </a:rPr>
+              <a:t>•  </a:t>
+            </a:r>
+            <a:r>
+              <a:rPr sz="1800" b="0">
+                <a:solidFill>
+                  <a:srgbClr val="3B4559"/>
+                </a:solidFill>
+                <a:latin typeface="Inter"/>
+              </a:rPr>
+              <a:t>Reads Hindi comfortably, English with effort; uses a mid-range Android phone</a:t>
+            </a:r>
+          </a:p>
+          <a:p>
+            <a:pPr>
+              <a:spcAft>
+                <a:spcPts val="1200"/>
+              </a:spcAft>
+            </a:pPr>
+            <a:r>
+              <a:rPr sz="1800" b="1">
+                <a:solidFill>
+                  <a:srgbClr val="FF7A1A"/>
+                </a:solidFill>
+                <a:latin typeface="Inter"/>
+              </a:rPr>
+              <a:t>•  </a:t>
+            </a:r>
+            <a:r>
+              <a:rPr sz="1800" b="0">
+                <a:solidFill>
+                  <a:srgbClr val="3B4559"/>
+                </a:solidFill>
+                <a:latin typeface="Inter"/>
+              </a:rPr>
+              <a:t>Needs a quick, trustworthy answer at the moment of doubt: before she pays, clicks or invests</a:t>
+            </a:r>
+          </a:p>
+        </p:txBody>
+      </p:sp>
+      <p:sp>
+        <p:nvSpPr>
+          <p:cNvPr id="6" name="Rounded Rectangle 5"/>
+          <p:cNvSpPr/>
+          <p:nvPr/>
+        </p:nvSpPr>
+        <p:spPr>
+          <a:xfrm>
+            <a:off x="6675120" y="1691640"/>
+            <a:ext cx="4937760" cy="2103120"/>
+          </a:xfrm>
+          <a:prstGeom prst="roundRect">
+            <a:avLst>
+              <a:gd name="adj" fmla="val 8000"/>
+            </a:avLst>
+          </a:prstGeom>
+          <a:solidFill>
+            <a:srgbClr val="FFFFFF"/>
+          </a:solidFill>
           <a:ln>
             <a:solidFill>
-              <a:srgbClr val="CBD5E1"/>
+              <a:srgbClr val="E4E1EE"/>
             </a:solidFill>
           </a:ln>
-        </p:spPr>
-      </p:pic>
+          <a:effectLst/>
+        </p:spPr>
+        <p:style>
+          <a:lnRef idx="1">
+            <a:schemeClr val="accent1"/>
+          </a:lnRef>
+          <a:fillRef idx="3">
+            <a:schemeClr val="accent1"/>
+          </a:fillRef>
+          <a:effectRef idx="2">
+            <a:schemeClr val="accent1"/>
+          </a:effectRef>
+          <a:fontRef idx="minor">
+            <a:schemeClr val="lt1"/>
+          </a:fontRef>
+        </p:style>
+        <p:txBody>
+          <a:bodyPr rtlCol="0" anchor="ctr"/>
+          <a:lstStyle/>
+          <a:p>
+            <a:pPr algn="ctr"/>
+          </a:p>
+        </p:txBody>
+      </p:sp>
+      <p:sp>
+        <p:nvSpPr>
+          <p:cNvPr id="7" name="Rectangle 6"/>
+          <p:cNvSpPr/>
+          <p:nvPr/>
+        </p:nvSpPr>
+        <p:spPr>
+          <a:xfrm>
+            <a:off x="6903720" y="1920240"/>
+            <a:ext cx="411480" cy="54864"/>
+          </a:xfrm>
+          <a:prstGeom prst="rect">
+            <a:avLst/>
+          </a:prstGeom>
+          <a:solidFill>
+            <a:srgbClr val="7C4DFF"/>
+          </a:solidFill>
+          <a:ln>
+            <a:noFill/>
+          </a:ln>
+        </p:spPr>
+        <p:style>
+          <a:lnRef idx="1">
+            <a:schemeClr val="accent1"/>
+          </a:lnRef>
+          <a:fillRef idx="3">
+            <a:schemeClr val="accent1"/>
+          </a:fillRef>
+          <a:effectRef idx="2">
+            <a:schemeClr val="accent1"/>
+          </a:effectRef>
+          <a:fontRef idx="minor">
+            <a:schemeClr val="lt1"/>
+          </a:fontRef>
+        </p:style>
+        <p:txBody>
+          <a:bodyPr rtlCol="0" anchor="ctr"/>
+          <a:lstStyle/>
+          <a:p>
+            <a:pPr algn="ctr"/>
+          </a:p>
+        </p:txBody>
+      </p:sp>
+      <p:sp>
+        <p:nvSpPr>
+          <p:cNvPr id="8" name="TextBox 7"/>
+          <p:cNvSpPr txBox="1"/>
+          <p:nvPr/>
+        </p:nvSpPr>
+        <p:spPr>
+          <a:xfrm>
+            <a:off x="6858000" y="2057400"/>
+            <a:ext cx="4572000" cy="548640"/>
+          </a:xfrm>
+          <a:prstGeom prst="rect">
+            <a:avLst/>
+          </a:prstGeom>
+          <a:noFill/>
+        </p:spPr>
+        <p:txBody>
+          <a:bodyPr wrap="square">
+            <a:spAutoFit/>
+          </a:bodyPr>
+          <a:lstStyle/>
+          <a:p>
+            <a:pPr>
+              <a:spcAft>
+                <a:spcPts val="800"/>
+              </a:spcAft>
+            </a:pPr>
+            <a:r>
+              <a:rPr sz="1700" b="1">
+                <a:solidFill>
+                  <a:srgbClr val="0B1220"/>
+                </a:solidFill>
+                <a:latin typeface="Inter"/>
+              </a:rPr>
+              <a:t>Also built for</a:t>
+            </a:r>
+          </a:p>
+        </p:txBody>
+      </p:sp>
+      <p:sp>
+        <p:nvSpPr>
+          <p:cNvPr id="9" name="TextBox 8"/>
+          <p:cNvSpPr txBox="1"/>
+          <p:nvPr/>
+        </p:nvSpPr>
+        <p:spPr>
+          <a:xfrm>
+            <a:off x="6858000" y="2560320"/>
+            <a:ext cx="4572000" cy="1188719"/>
+          </a:xfrm>
+          <a:prstGeom prst="rect">
+            <a:avLst/>
+          </a:prstGeom>
+          <a:noFill/>
+        </p:spPr>
+        <p:txBody>
+          <a:bodyPr wrap="square">
+            <a:spAutoFit/>
+          </a:bodyPr>
+          <a:lstStyle/>
+          <a:p>
+            <a:pPr>
+              <a:spcAft>
+                <a:spcPts val="500"/>
+              </a:spcAft>
+            </a:pPr>
+            <a:r>
+              <a:rPr sz="1400" b="0">
+                <a:solidFill>
+                  <a:srgbClr val="3B4559"/>
+                </a:solidFill>
+                <a:latin typeface="Inter"/>
+              </a:rPr>
+              <a:t>Senior citizens targeted by impersonation (fake SEBI / broker calls)</a:t>
+            </a:r>
+          </a:p>
+          <a:p>
+            <a:pPr>
+              <a:spcAft>
+                <a:spcPts val="500"/>
+              </a:spcAft>
+            </a:pPr>
+            <a:r>
+              <a:rPr sz="1400" b="0">
+                <a:solidFill>
+                  <a:srgbClr val="3B4559"/>
+                </a:solidFill>
+                <a:latin typeface="Inter"/>
+              </a:rPr>
+              <a:t>Families checking a tip forwarded to a parent</a:t>
+            </a:r>
+          </a:p>
+          <a:p>
+            <a:pPr>
+              <a:spcAft>
+                <a:spcPts val="500"/>
+              </a:spcAft>
+            </a:pPr>
+            <a:r>
+              <a:rPr sz="1400" b="0">
+                <a:solidFill>
+                  <a:srgbClr val="3B4559"/>
+                </a:solidFill>
+                <a:latin typeface="Inter"/>
+              </a:rPr>
+              <a:t>Anyone who just received a suspicious message</a:t>
+            </a:r>
+          </a:p>
+        </p:txBody>
+      </p:sp>
+      <p:sp>
+        <p:nvSpPr>
+          <p:cNvPr id="10" name="Rounded Rectangle 9"/>
+          <p:cNvSpPr/>
+          <p:nvPr/>
+        </p:nvSpPr>
+        <p:spPr>
+          <a:xfrm>
+            <a:off x="6675120" y="4023360"/>
+            <a:ext cx="4937760" cy="2194560"/>
+          </a:xfrm>
+          <a:prstGeom prst="roundRect">
+            <a:avLst>
+              <a:gd name="adj" fmla="val 8000"/>
+            </a:avLst>
+          </a:prstGeom>
+          <a:solidFill>
+            <a:srgbClr val="FFFFFF"/>
+          </a:solidFill>
+          <a:ln>
+            <a:solidFill>
+              <a:srgbClr val="E4E1EE"/>
+            </a:solidFill>
+          </a:ln>
+          <a:effectLst/>
+        </p:spPr>
+        <p:style>
+          <a:lnRef idx="1">
+            <a:schemeClr val="accent1"/>
+          </a:lnRef>
+          <a:fillRef idx="3">
+            <a:schemeClr val="accent1"/>
+          </a:fillRef>
+          <a:effectRef idx="2">
+            <a:schemeClr val="accent1"/>
+          </a:effectRef>
+          <a:fontRef idx="minor">
+            <a:schemeClr val="lt1"/>
+          </a:fontRef>
+        </p:style>
+        <p:txBody>
+          <a:bodyPr rtlCol="0" anchor="ctr"/>
+          <a:lstStyle/>
+          <a:p>
+            <a:pPr algn="ctr"/>
+          </a:p>
+        </p:txBody>
+      </p:sp>
+      <p:sp>
+        <p:nvSpPr>
+          <p:cNvPr id="11" name="Rectangle 10"/>
+          <p:cNvSpPr/>
+          <p:nvPr/>
+        </p:nvSpPr>
+        <p:spPr>
+          <a:xfrm>
+            <a:off x="6903720" y="4251960"/>
+            <a:ext cx="411480" cy="54864"/>
+          </a:xfrm>
+          <a:prstGeom prst="rect">
+            <a:avLst/>
+          </a:prstGeom>
+          <a:solidFill>
+            <a:srgbClr val="FF7A1A"/>
+          </a:solidFill>
+          <a:ln>
+            <a:noFill/>
+          </a:ln>
+        </p:spPr>
+        <p:style>
+          <a:lnRef idx="1">
+            <a:schemeClr val="accent1"/>
+          </a:lnRef>
+          <a:fillRef idx="3">
+            <a:schemeClr val="accent1"/>
+          </a:fillRef>
+          <a:effectRef idx="2">
+            <a:schemeClr val="accent1"/>
+          </a:effectRef>
+          <a:fontRef idx="minor">
+            <a:schemeClr val="lt1"/>
+          </a:fontRef>
+        </p:style>
+        <p:txBody>
+          <a:bodyPr rtlCol="0" anchor="ctr"/>
+          <a:lstStyle/>
+          <a:p>
+            <a:pPr algn="ctr"/>
+          </a:p>
+        </p:txBody>
+      </p:sp>
+      <p:sp>
+        <p:nvSpPr>
+          <p:cNvPr id="12" name="TextBox 11"/>
+          <p:cNvSpPr txBox="1"/>
+          <p:nvPr/>
+        </p:nvSpPr>
+        <p:spPr>
+          <a:xfrm>
+            <a:off x="6858000" y="4389120"/>
+            <a:ext cx="4572000" cy="548640"/>
+          </a:xfrm>
+          <a:prstGeom prst="rect">
+            <a:avLst/>
+          </a:prstGeom>
+          <a:noFill/>
+        </p:spPr>
+        <p:txBody>
+          <a:bodyPr wrap="square">
+            <a:spAutoFit/>
+          </a:bodyPr>
+          <a:lstStyle/>
+          <a:p>
+            <a:pPr>
+              <a:spcAft>
+                <a:spcPts val="800"/>
+              </a:spcAft>
+            </a:pPr>
+            <a:r>
+              <a:rPr sz="1700" b="1">
+                <a:solidFill>
+                  <a:srgbClr val="0B1220"/>
+                </a:solidFill>
+                <a:latin typeface="Inter"/>
+              </a:rPr>
+              <a:t>What she needs</a:t>
+            </a:r>
+          </a:p>
+        </p:txBody>
+      </p:sp>
+      <p:sp>
+        <p:nvSpPr>
+          <p:cNvPr id="13" name="TextBox 12"/>
+          <p:cNvSpPr txBox="1"/>
+          <p:nvPr/>
+        </p:nvSpPr>
+        <p:spPr>
+          <a:xfrm>
+            <a:off x="6858000" y="4892040"/>
+            <a:ext cx="4572000" cy="1280160"/>
+          </a:xfrm>
+          <a:prstGeom prst="rect">
+            <a:avLst/>
+          </a:prstGeom>
+          <a:noFill/>
+        </p:spPr>
+        <p:txBody>
+          <a:bodyPr wrap="square">
+            <a:spAutoFit/>
+          </a:bodyPr>
+          <a:lstStyle/>
+          <a:p>
+            <a:pPr>
+              <a:spcAft>
+                <a:spcPts val="500"/>
+              </a:spcAft>
+            </a:pPr>
+            <a:r>
+              <a:rPr sz="1400" b="0">
+                <a:solidFill>
+                  <a:srgbClr val="3B4559"/>
+                </a:solidFill>
+                <a:latin typeface="Inter"/>
+              </a:rPr>
+              <a:t>Is this a scam? Which exact part is dangerous?</a:t>
+            </a:r>
+          </a:p>
+          <a:p>
+            <a:pPr>
+              <a:spcAft>
+                <a:spcPts val="500"/>
+              </a:spcAft>
+            </a:pPr>
+            <a:r>
+              <a:rPr sz="1400" b="0">
+                <a:solidFill>
+                  <a:srgbClr val="3B4559"/>
+                </a:solidFill>
+                <a:latin typeface="Inter"/>
+              </a:rPr>
+              <a:t>Is this person SEBI-registered?</a:t>
+            </a:r>
+          </a:p>
+          <a:p>
+            <a:pPr>
+              <a:spcAft>
+                <a:spcPts val="500"/>
+              </a:spcAft>
+            </a:pPr>
+            <a:r>
+              <a:rPr sz="1400" b="0">
+                <a:solidFill>
+                  <a:srgbClr val="3B4559"/>
+                </a:solidFill>
+                <a:latin typeface="Inter"/>
+              </a:rPr>
+              <a:t>What should I do now, in my language?</a:t>
+            </a:r>
+          </a:p>
+        </p:txBody>
+      </p:sp>
     </p:spTree>
   </p:cSld>
   <p:clrMapOvr>
@@ -4063,7 +7607,7 @@
     <p:bg>
       <p:bgPr>
         <a:solidFill>
-          <a:srgbClr val="F8FAFC"/>
+          <a:srgbClr val="F6F4FB"/>
         </a:solidFill>
         <a:effectLst/>
       </p:bgPr>
@@ -4084,14 +7628,22 @@
         <p:spPr>
           <a:xfrm>
             <a:off x="0" y="0"/>
-            <a:ext cx="164592" cy="6858000"/>
-          </a:xfrm>
-          <a:prstGeom prst="rect">
-            <a:avLst/>
-          </a:prstGeom>
-          <a:solidFill>
-            <a:srgbClr val="F59E0B"/>
-          </a:solidFill>
+            <a:ext cx="12191695" cy="82296"/>
+          </a:xfrm>
+          <a:prstGeom prst="rect">
+            <a:avLst/>
+          </a:prstGeom>
+          <a:gradFill rotWithShape="1">
+            <a:gsLst>
+              <a:gs pos="0">
+                <a:srgbClr val="FF7A1A"/>
+              </a:gs>
+              <a:gs pos="100000">
+                <a:srgbClr val="7C4DFF"/>
+              </a:gs>
+            </a:gsLst>
+            <a:lin scaled="0" ang="0"/>
+          </a:gradFill>
           <a:ln>
             <a:noFill/>
           </a:ln>
@@ -4126,7 +7678,7 @@
         </p:nvSpPr>
         <p:spPr>
           <a:xfrm>
-            <a:off x="640080" y="365760"/>
+            <a:off x="548640" y="320040"/>
             <a:ext cx="10972800" cy="365760"/>
           </a:xfrm>
           <a:prstGeom prst="rect">
@@ -4142,17 +7694,17 @@
           <a:p>
             <a:pPr>
               <a:spcAft>
-                <a:spcPts val="400"/>
-              </a:spcAft>
-              <a:defRPr sz="1300" b="1">
-                <a:solidFill>
-                  <a:srgbClr val="F59E0B"/>
-                </a:solidFill>
-                <a:latin typeface="Inter"/>
-              </a:defRPr>
-            </a:pPr>
-            <a:r>
-              <a:t>ARCHITECTURE</a:t>
+                <a:spcPts val="800"/>
+              </a:spcAft>
+            </a:pPr>
+            <a:r>
+              <a:rPr sz="1200" b="1">
+                <a:solidFill>
+                  <a:srgbClr val="FF7A1A"/>
+                </a:solidFill>
+                <a:latin typeface="Inter"/>
+              </a:rPr>
+              <a:t>THE SOLUTION</a:t>
             </a:r>
           </a:p>
         </p:txBody>
@@ -4165,8 +7717,8 @@
         </p:nvSpPr>
         <p:spPr>
           <a:xfrm>
-            <a:off x="640080" y="685800"/>
-            <a:ext cx="10972800" cy="822960"/>
+            <a:off x="548640" y="594360"/>
+            <a:ext cx="11155680" cy="914400"/>
           </a:xfrm>
           <a:prstGeom prst="rect">
             <a:avLst/>
@@ -4181,17 +7733,17 @@
           <a:p>
             <a:pPr>
               <a:spcAft>
-                <a:spcPts val="400"/>
-              </a:spcAft>
-              <a:defRPr sz="3200" b="1">
-                <a:solidFill>
-                  <a:srgbClr val="0F172A"/>
-                </a:solidFill>
-                <a:latin typeface="Inter"/>
-              </a:defRPr>
-            </a:pPr>
-            <a:r>
-              <a:t>How it works</a:t>
+                <a:spcPts val="800"/>
+              </a:spcAft>
+            </a:pPr>
+            <a:r>
+              <a:rPr sz="3000" b="1">
+                <a:solidFill>
+                  <a:srgbClr val="0B1220"/>
+                </a:solidFill>
+                <a:latin typeface="Inter"/>
+              </a:rPr>
+              <a:t>One product, four ways to check before you trust</a:t>
             </a:r>
           </a:p>
         </p:txBody>
@@ -4204,20 +7756,23 @@
         </p:nvSpPr>
         <p:spPr>
           <a:xfrm>
-            <a:off x="548640" y="2011680"/>
-            <a:ext cx="1691640" cy="1920240"/>
+            <a:off x="548640" y="1691640"/>
+            <a:ext cx="2651760" cy="3291840"/>
           </a:xfrm>
           <a:prstGeom prst="roundRect">
-            <a:avLst/>
+            <a:avLst>
+              <a:gd name="adj" fmla="val 8000"/>
+            </a:avLst>
           </a:prstGeom>
           <a:solidFill>
             <a:srgbClr val="FFFFFF"/>
           </a:solidFill>
           <a:ln>
             <a:solidFill>
-              <a:srgbClr val="F59E0B"/>
+              <a:srgbClr val="E4E1EE"/>
             </a:solidFill>
           </a:ln>
+          <a:effectLst/>
         </p:spPr>
         <p:style>
           <a:lnRef idx="1">
@@ -4234,74 +7789,29 @@
           </a:fontRef>
         </p:style>
         <p:txBody>
-          <a:bodyPr rtlCol="0" anchor="ctr" wrap="square"/>
-          <a:lstStyle/>
-          <a:p>
-            <a:pPr algn="ctr">
-              <a:defRPr b="1" sz="1600">
-                <a:solidFill>
-                  <a:srgbClr val="0F172A"/>
-                </a:solidFill>
-              </a:defRPr>
-            </a:pPr>
-            <a:r>
-              <a:t>Ingest</a:t>
-            </a:r>
-          </a:p>
-          <a:p>
-            <a:pPr>
-              <a:defRPr sz="1100">
-                <a:solidFill>
-                  <a:srgbClr val="475569"/>
-                </a:solidFill>
-              </a:defRPr>
-            </a:pPr>
-            <a:r>
-              <a:t>yt-dlp captions</a:t>
-            </a:r>
-          </a:p>
-          <a:p>
-            <a:pPr>
-              <a:defRPr sz="1100">
-                <a:solidFill>
-                  <a:srgbClr val="475569"/>
-                </a:solidFill>
-              </a:defRPr>
-            </a:pPr>
-            <a:r>
-              <a:t>(spoken-language first)</a:t>
-            </a:r>
-          </a:p>
-          <a:p>
-            <a:pPr>
-              <a:defRPr sz="1100">
-                <a:solidFill>
-                  <a:srgbClr val="475569"/>
-                </a:solidFill>
-              </a:defRPr>
-            </a:pPr>
-            <a:r>
-              <a:t>or Whisper on GPU</a:t>
-            </a:r>
-          </a:p>
-        </p:txBody>
-      </p:sp>
-      <p:sp>
-        <p:nvSpPr>
-          <p:cNvPr id="6" name="Right Arrow 5"/>
+          <a:bodyPr rtlCol="0" anchor="ctr"/>
+          <a:lstStyle/>
+          <a:p>
+            <a:pPr algn="ctr"/>
+          </a:p>
+        </p:txBody>
+      </p:sp>
+      <p:sp>
+        <p:nvSpPr>
+          <p:cNvPr id="6" name="Rectangle 5"/>
           <p:cNvSpPr/>
           <p:nvPr/>
         </p:nvSpPr>
         <p:spPr>
           <a:xfrm>
-            <a:off x="2258568" y="2834640"/>
-            <a:ext cx="201168" cy="274320"/>
-          </a:xfrm>
-          <a:prstGeom prst="rightArrow">
+            <a:off x="777240" y="1920240"/>
+            <a:ext cx="411480" cy="54864"/>
+          </a:xfrm>
+          <a:prstGeom prst="rect">
             <a:avLst/>
           </a:prstGeom>
           <a:solidFill>
-            <a:srgbClr val="F59E0B"/>
+            <a:srgbClr val="FF7A1A"/>
           </a:solidFill>
           <a:ln>
             <a:noFill/>
@@ -4331,26 +7841,146 @@
       </p:sp>
       <p:sp>
         <p:nvSpPr>
-          <p:cNvPr id="7" name="Rounded Rectangle 6"/>
+          <p:cNvPr id="7" name="TextBox 6"/>
+          <p:cNvSpPr txBox="1"/>
+          <p:nvPr/>
+        </p:nvSpPr>
+        <p:spPr>
+          <a:xfrm>
+            <a:off x="731520" y="2057400"/>
+            <a:ext cx="2286000" cy="548640"/>
+          </a:xfrm>
+          <a:prstGeom prst="rect">
+            <a:avLst/>
+          </a:prstGeom>
+          <a:noFill/>
+        </p:spPr>
+        <p:txBody>
+          <a:bodyPr wrap="square">
+            <a:spAutoFit/>
+          </a:bodyPr>
+          <a:lstStyle/>
+          <a:p>
+            <a:pPr>
+              <a:spcAft>
+                <a:spcPts val="800"/>
+              </a:spcAft>
+            </a:pPr>
+            <a:r>
+              <a:rPr sz="1700" b="1">
+                <a:solidFill>
+                  <a:srgbClr val="0B1220"/>
+                </a:solidFill>
+                <a:latin typeface="Inter"/>
+              </a:rPr>
+              <a:t>Check a message</a:t>
+            </a:r>
+          </a:p>
+        </p:txBody>
+      </p:sp>
+      <p:sp>
+        <p:nvSpPr>
+          <p:cNvPr id="8" name="TextBox 7"/>
+          <p:cNvSpPr txBox="1"/>
+          <p:nvPr/>
+        </p:nvSpPr>
+        <p:spPr>
+          <a:xfrm>
+            <a:off x="731520" y="2560320"/>
+            <a:ext cx="2286000" cy="2377440"/>
+          </a:xfrm>
+          <a:prstGeom prst="rect">
+            <a:avLst/>
+          </a:prstGeom>
+          <a:noFill/>
+        </p:spPr>
+        <p:txBody>
+          <a:bodyPr wrap="square">
+            <a:spAutoFit/>
+          </a:bodyPr>
+          <a:lstStyle/>
+          <a:p>
+            <a:pPr>
+              <a:spcAft>
+                <a:spcPts val="500"/>
+              </a:spcAft>
+            </a:pPr>
+            <a:r>
+              <a:rPr sz="1300" b="0">
+                <a:solidFill>
+                  <a:srgbClr val="3B4559"/>
+                </a:solidFill>
+                <a:latin typeface="Inter"/>
+              </a:rPr>
+              <a:t>Paste a forwarded WhatsApp/Telegram/SMS tip or drop a screenshot. Flags OTP requests, fake KYC, payment demands, suspicious links, impersonation.</a:t>
+            </a:r>
+          </a:p>
+        </p:txBody>
+      </p:sp>
+      <p:sp>
+        <p:nvSpPr>
+          <p:cNvPr id="9" name="TextBox 8"/>
+          <p:cNvSpPr txBox="1"/>
+          <p:nvPr/>
+        </p:nvSpPr>
+        <p:spPr>
+          <a:xfrm>
+            <a:off x="731520" y="4572000"/>
+            <a:ext cx="2286000" cy="365760"/>
+          </a:xfrm>
+          <a:prstGeom prst="rect">
+            <a:avLst/>
+          </a:prstGeom>
+          <a:noFill/>
+        </p:spPr>
+        <p:txBody>
+          <a:bodyPr wrap="square">
+            <a:spAutoFit/>
+          </a:bodyPr>
+          <a:lstStyle/>
+          <a:p>
+            <a:pPr>
+              <a:spcAft>
+                <a:spcPts val="800"/>
+              </a:spcAft>
+            </a:pPr>
+            <a:r>
+              <a:rPr sz="1200" b="1">
+                <a:solidFill>
+                  <a:srgbClr val="FF7A1A"/>
+                </a:solidFill>
+                <a:latin typeface="Inter"/>
+              </a:rPr>
+              <a:t>Track A</a:t>
+            </a:r>
+          </a:p>
+        </p:txBody>
+      </p:sp>
+      <p:sp>
+        <p:nvSpPr>
+          <p:cNvPr id="10" name="Rounded Rectangle 9"/>
           <p:cNvSpPr/>
           <p:nvPr/>
         </p:nvSpPr>
         <p:spPr>
           <a:xfrm>
-            <a:off x="2468880" y="2011680"/>
-            <a:ext cx="1691640" cy="1920240"/>
+            <a:off x="3383280" y="1691640"/>
+            <a:ext cx="2651760" cy="3291840"/>
           </a:xfrm>
           <a:prstGeom prst="roundRect">
-            <a:avLst/>
+            <a:avLst>
+              <a:gd name="adj" fmla="val 8000"/>
+            </a:avLst>
           </a:prstGeom>
           <a:solidFill>
             <a:srgbClr val="FFFFFF"/>
           </a:solidFill>
           <a:ln>
             <a:solidFill>
-              <a:srgbClr val="F59E0B"/>
+              <a:srgbClr val="E4E1EE"/>
             </a:solidFill>
           </a:ln>
+          <a:effectLst/>
         </p:spPr>
         <p:style>
           <a:lnRef idx="1">
@@ -4367,74 +7997,29 @@
           </a:fontRef>
         </p:style>
         <p:txBody>
-          <a:bodyPr rtlCol="0" anchor="ctr" wrap="square"/>
-          <a:lstStyle/>
-          <a:p>
-            <a:pPr algn="ctr">
-              <a:defRPr b="1" sz="1600">
-                <a:solidFill>
-                  <a:srgbClr val="0F172A"/>
-                </a:solidFill>
-              </a:defRPr>
-            </a:pPr>
-            <a:r>
-              <a:t>Pre-scan</a:t>
-            </a:r>
-          </a:p>
-          <a:p>
-            <a:pPr>
-              <a:defRPr sz="1100">
-                <a:solidFill>
-                  <a:srgbClr val="475569"/>
-                </a:solidFill>
-              </a:defRPr>
-            </a:pPr>
-            <a:r>
-              <a:t>Multilingual regex</a:t>
-            </a:r>
-          </a:p>
-          <a:p>
-            <a:pPr>
-              <a:defRPr sz="1100">
-                <a:solidFill>
-                  <a:srgbClr val="475569"/>
-                </a:solidFill>
-              </a:defRPr>
-            </a:pPr>
-            <a:r>
-              <a:t>EN · Hinglish ·</a:t>
-            </a:r>
-          </a:p>
-          <a:p>
-            <a:pPr>
-              <a:defRPr sz="1100">
-                <a:solidFill>
-                  <a:srgbClr val="475569"/>
-                </a:solidFill>
-              </a:defRPr>
-            </a:pPr>
-            <a:r>
-              <a:t>Devanagari</a:t>
-            </a:r>
-          </a:p>
-        </p:txBody>
-      </p:sp>
-      <p:sp>
-        <p:nvSpPr>
-          <p:cNvPr id="8" name="Right Arrow 7"/>
+          <a:bodyPr rtlCol="0" anchor="ctr"/>
+          <a:lstStyle/>
+          <a:p>
+            <a:pPr algn="ctr"/>
+          </a:p>
+        </p:txBody>
+      </p:sp>
+      <p:sp>
+        <p:nvSpPr>
+          <p:cNvPr id="11" name="Rectangle 10"/>
           <p:cNvSpPr/>
           <p:nvPr/>
         </p:nvSpPr>
         <p:spPr>
           <a:xfrm>
-            <a:off x="4178808" y="2834640"/>
-            <a:ext cx="201168" cy="274320"/>
-          </a:xfrm>
-          <a:prstGeom prst="rightArrow">
+            <a:off x="3611880" y="1920240"/>
+            <a:ext cx="411480" cy="54864"/>
+          </a:xfrm>
+          <a:prstGeom prst="rect">
             <a:avLst/>
           </a:prstGeom>
           <a:solidFill>
-            <a:srgbClr val="F59E0B"/>
+            <a:srgbClr val="E53E3E"/>
           </a:solidFill>
           <a:ln>
             <a:noFill/>
@@ -4464,26 +8049,146 @@
       </p:sp>
       <p:sp>
         <p:nvSpPr>
-          <p:cNvPr id="9" name="Rounded Rectangle 8"/>
+          <p:cNvPr id="12" name="TextBox 11"/>
+          <p:cNvSpPr txBox="1"/>
+          <p:nvPr/>
+        </p:nvSpPr>
+        <p:spPr>
+          <a:xfrm>
+            <a:off x="3566160" y="2057400"/>
+            <a:ext cx="2286000" cy="548640"/>
+          </a:xfrm>
+          <a:prstGeom prst="rect">
+            <a:avLst/>
+          </a:prstGeom>
+          <a:noFill/>
+        </p:spPr>
+        <p:txBody>
+          <a:bodyPr wrap="square">
+            <a:spAutoFit/>
+          </a:bodyPr>
+          <a:lstStyle/>
+          <a:p>
+            <a:pPr>
+              <a:spcAft>
+                <a:spcPts val="800"/>
+              </a:spcAft>
+            </a:pPr>
+            <a:r>
+              <a:rPr sz="1700" b="1">
+                <a:solidFill>
+                  <a:srgbClr val="0B1220"/>
+                </a:solidFill>
+                <a:latin typeface="Inter"/>
+              </a:rPr>
+              <a:t>Audit a video</a:t>
+            </a:r>
+          </a:p>
+        </p:txBody>
+      </p:sp>
+      <p:sp>
+        <p:nvSpPr>
+          <p:cNvPr id="13" name="TextBox 12"/>
+          <p:cNvSpPr txBox="1"/>
+          <p:nvPr/>
+        </p:nvSpPr>
+        <p:spPr>
+          <a:xfrm>
+            <a:off x="3566160" y="2560320"/>
+            <a:ext cx="2286000" cy="2377440"/>
+          </a:xfrm>
+          <a:prstGeom prst="rect">
+            <a:avLst/>
+          </a:prstGeom>
+          <a:noFill/>
+        </p:spPr>
+        <p:txBody>
+          <a:bodyPr wrap="square">
+            <a:spAutoFit/>
+          </a:bodyPr>
+          <a:lstStyle/>
+          <a:p>
+            <a:pPr>
+              <a:spcAft>
+                <a:spcPts val="500"/>
+              </a:spcAft>
+            </a:pPr>
+            <a:r>
+              <a:rPr sz="1300" b="0">
+                <a:solidFill>
+                  <a:srgbClr val="3B4559"/>
+                </a:solidFill>
+                <a:latin typeface="Inter"/>
+              </a:rPr>
+              <a:t>Paste a YouTube link. Every guaranteed-return promise, buy/sell call, hype and hidden promotion, quoted with its timestamp.</a:t>
+            </a:r>
+          </a:p>
+        </p:txBody>
+      </p:sp>
+      <p:sp>
+        <p:nvSpPr>
+          <p:cNvPr id="14" name="TextBox 13"/>
+          <p:cNvSpPr txBox="1"/>
+          <p:nvPr/>
+        </p:nvSpPr>
+        <p:spPr>
+          <a:xfrm>
+            <a:off x="3566160" y="4572000"/>
+            <a:ext cx="2286000" cy="365760"/>
+          </a:xfrm>
+          <a:prstGeom prst="rect">
+            <a:avLst/>
+          </a:prstGeom>
+          <a:noFill/>
+        </p:spPr>
+        <p:txBody>
+          <a:bodyPr wrap="square">
+            <a:spAutoFit/>
+          </a:bodyPr>
+          <a:lstStyle/>
+          <a:p>
+            <a:pPr>
+              <a:spcAft>
+                <a:spcPts val="800"/>
+              </a:spcAft>
+            </a:pPr>
+            <a:r>
+              <a:rPr sz="1200" b="1">
+                <a:solidFill>
+                  <a:srgbClr val="E53E3E"/>
+                </a:solidFill>
+                <a:latin typeface="Inter"/>
+              </a:rPr>
+              <a:t>Track E</a:t>
+            </a:r>
+          </a:p>
+        </p:txBody>
+      </p:sp>
+      <p:sp>
+        <p:nvSpPr>
+          <p:cNvPr id="15" name="Rounded Rectangle 14"/>
           <p:cNvSpPr/>
           <p:nvPr/>
         </p:nvSpPr>
         <p:spPr>
           <a:xfrm>
-            <a:off x="4389120" y="2011680"/>
-            <a:ext cx="1691640" cy="1920240"/>
+            <a:off x="6217920" y="1691640"/>
+            <a:ext cx="2651760" cy="3291840"/>
           </a:xfrm>
           <a:prstGeom prst="roundRect">
-            <a:avLst/>
+            <a:avLst>
+              <a:gd name="adj" fmla="val 8000"/>
+            </a:avLst>
           </a:prstGeom>
           <a:solidFill>
-            <a:srgbClr val="0F172A"/>
+            <a:srgbClr val="FFFFFF"/>
           </a:solidFill>
           <a:ln>
             <a:solidFill>
-              <a:srgbClr val="F59E0B"/>
+              <a:srgbClr val="E4E1EE"/>
             </a:solidFill>
           </a:ln>
+          <a:effectLst/>
         </p:spPr>
         <p:style>
           <a:lnRef idx="1">
@@ -4500,74 +8205,29 @@
           </a:fontRef>
         </p:style>
         <p:txBody>
-          <a:bodyPr rtlCol="0" anchor="ctr" wrap="square"/>
-          <a:lstStyle/>
-          <a:p>
-            <a:pPr algn="ctr">
-              <a:defRPr b="1" sz="1600">
-                <a:solidFill>
-                  <a:srgbClr val="F59E0B"/>
-                </a:solidFill>
-              </a:defRPr>
-            </a:pPr>
-            <a:r>
-              <a:t>LLM extract</a:t>
-            </a:r>
-          </a:p>
-          <a:p>
-            <a:pPr>
-              <a:defRPr sz="1100">
-                <a:solidFill>
-                  <a:srgbClr val="CBD5E1"/>
-                </a:solidFill>
-              </a:defRPr>
-            </a:pPr>
-            <a:r>
-              <a:t>qwen2.5:7b via Ollama</a:t>
-            </a:r>
-          </a:p>
-          <a:p>
-            <a:pPr>
-              <a:defRPr sz="1100">
-                <a:solidFill>
-                  <a:srgbClr val="CBD5E1"/>
-                </a:solidFill>
-              </a:defRPr>
-            </a:pPr>
-            <a:r>
-              <a:t>JSON-schema output</a:t>
-            </a:r>
-          </a:p>
-          <a:p>
-            <a:pPr>
-              <a:defRPr sz="1100">
-                <a:solidFill>
-                  <a:srgbClr val="CBD5E1"/>
-                </a:solidFill>
-              </a:defRPr>
-            </a:pPr>
-            <a:r>
-              <a:t>~90 s windows</a:t>
-            </a:r>
-          </a:p>
-        </p:txBody>
-      </p:sp>
-      <p:sp>
-        <p:nvSpPr>
-          <p:cNvPr id="10" name="Right Arrow 9"/>
+          <a:bodyPr rtlCol="0" anchor="ctr"/>
+          <a:lstStyle/>
+          <a:p>
+            <a:pPr algn="ctr"/>
+          </a:p>
+        </p:txBody>
+      </p:sp>
+      <p:sp>
+        <p:nvSpPr>
+          <p:cNvPr id="16" name="Rectangle 15"/>
           <p:cNvSpPr/>
           <p:nvPr/>
         </p:nvSpPr>
         <p:spPr>
           <a:xfrm>
-            <a:off x="6099048" y="2834640"/>
-            <a:ext cx="201168" cy="274320"/>
-          </a:xfrm>
-          <a:prstGeom prst="rightArrow">
+            <a:off x="6446520" y="1920240"/>
+            <a:ext cx="411480" cy="54864"/>
+          </a:xfrm>
+          <a:prstGeom prst="rect">
             <a:avLst/>
           </a:prstGeom>
           <a:solidFill>
-            <a:srgbClr val="F59E0B"/>
+            <a:srgbClr val="7C4DFF"/>
           </a:solidFill>
           <a:ln>
             <a:noFill/>
@@ -4597,26 +8257,146 @@
       </p:sp>
       <p:sp>
         <p:nvSpPr>
-          <p:cNvPr id="11" name="Rounded Rectangle 10"/>
+          <p:cNvPr id="17" name="TextBox 16"/>
+          <p:cNvSpPr txBox="1"/>
+          <p:nvPr/>
+        </p:nvSpPr>
+        <p:spPr>
+          <a:xfrm>
+            <a:off x="6400800" y="2057400"/>
+            <a:ext cx="2286000" cy="548640"/>
+          </a:xfrm>
+          <a:prstGeom prst="rect">
+            <a:avLst/>
+          </a:prstGeom>
+          <a:noFill/>
+        </p:spPr>
+        <p:txBody>
+          <a:bodyPr wrap="square">
+            <a:spAutoFit/>
+          </a:bodyPr>
+          <a:lstStyle/>
+          <a:p>
+            <a:pPr>
+              <a:spcAft>
+                <a:spcPts val="800"/>
+              </a:spcAft>
+            </a:pPr>
+            <a:r>
+              <a:rPr sz="1700" b="1">
+                <a:solidFill>
+                  <a:srgbClr val="0B1220"/>
+                </a:solidFill>
+                <a:latin typeface="Inter"/>
+              </a:rPr>
+              <a:t>Profile a creator</a:t>
+            </a:r>
+          </a:p>
+        </p:txBody>
+      </p:sp>
+      <p:sp>
+        <p:nvSpPr>
+          <p:cNvPr id="18" name="TextBox 17"/>
+          <p:cNvSpPr txBox="1"/>
+          <p:nvPr/>
+        </p:nvSpPr>
+        <p:spPr>
+          <a:xfrm>
+            <a:off x="6400800" y="2560320"/>
+            <a:ext cx="2286000" cy="2377440"/>
+          </a:xfrm>
+          <a:prstGeom prst="rect">
+            <a:avLst/>
+          </a:prstGeom>
+          <a:noFill/>
+        </p:spPr>
+        <p:txBody>
+          <a:bodyPr wrap="square">
+            <a:spAutoFit/>
+          </a:bodyPr>
+          <a:lstStyle/>
+          <a:p>
+            <a:pPr>
+              <a:spcAft>
+                <a:spcPts val="500"/>
+              </a:spcAft>
+            </a:pPr>
+            <a:r>
+              <a:rPr sz="1300" b="0">
+                <a:solidFill>
+                  <a:srgbClr val="3B4559"/>
+                </a:solidFill>
+                <a:latin typeface="Inter"/>
+              </a:rPr>
+              <a:t>Audits a channel's recent uploads: how often they give tips, promise returns or push paid groups.</a:t>
+            </a:r>
+          </a:p>
+        </p:txBody>
+      </p:sp>
+      <p:sp>
+        <p:nvSpPr>
+          <p:cNvPr id="19" name="TextBox 18"/>
+          <p:cNvSpPr txBox="1"/>
+          <p:nvPr/>
+        </p:nvSpPr>
+        <p:spPr>
+          <a:xfrm>
+            <a:off x="6400800" y="4572000"/>
+            <a:ext cx="2286000" cy="365760"/>
+          </a:xfrm>
+          <a:prstGeom prst="rect">
+            <a:avLst/>
+          </a:prstGeom>
+          <a:noFill/>
+        </p:spPr>
+        <p:txBody>
+          <a:bodyPr wrap="square">
+            <a:spAutoFit/>
+          </a:bodyPr>
+          <a:lstStyle/>
+          <a:p>
+            <a:pPr>
+              <a:spcAft>
+                <a:spcPts val="800"/>
+              </a:spcAft>
+            </a:pPr>
+            <a:r>
+              <a:rPr sz="1200" b="1">
+                <a:solidFill>
+                  <a:srgbClr val="7C4DFF"/>
+                </a:solidFill>
+                <a:latin typeface="Inter"/>
+              </a:rPr>
+              <a:t>Track E</a:t>
+            </a:r>
+          </a:p>
+        </p:txBody>
+      </p:sp>
+      <p:sp>
+        <p:nvSpPr>
+          <p:cNvPr id="20" name="Rounded Rectangle 19"/>
           <p:cNvSpPr/>
           <p:nvPr/>
         </p:nvSpPr>
         <p:spPr>
           <a:xfrm>
-            <a:off x="6309360" y="2011680"/>
-            <a:ext cx="1691640" cy="1920240"/>
+            <a:off x="9052560" y="1691640"/>
+            <a:ext cx="2651760" cy="3291840"/>
           </a:xfrm>
           <a:prstGeom prst="roundRect">
-            <a:avLst/>
+            <a:avLst>
+              <a:gd name="adj" fmla="val 8000"/>
+            </a:avLst>
           </a:prstGeom>
           <a:solidFill>
             <a:srgbClr val="FFFFFF"/>
           </a:solidFill>
           <a:ln>
             <a:solidFill>
-              <a:srgbClr val="F59E0B"/>
+              <a:srgbClr val="E4E1EE"/>
             </a:solidFill>
           </a:ln>
+          <a:effectLst/>
         </p:spPr>
         <p:style>
           <a:lnRef idx="1">
@@ -4633,74 +8413,29 @@
           </a:fontRef>
         </p:style>
         <p:txBody>
-          <a:bodyPr rtlCol="0" anchor="ctr" wrap="square"/>
-          <a:lstStyle/>
-          <a:p>
-            <a:pPr algn="ctr">
-              <a:defRPr b="1" sz="1600">
-                <a:solidFill>
-                  <a:srgbClr val="0F172A"/>
-                </a:solidFill>
-              </a:defRPr>
-            </a:pPr>
-            <a:r>
-              <a:t>Ground</a:t>
-            </a:r>
-          </a:p>
-          <a:p>
-            <a:pPr>
-              <a:defRPr sz="1100">
-                <a:solidFill>
-                  <a:srgbClr val="475569"/>
-                </a:solidFill>
-              </a:defRPr>
-            </a:pPr>
-            <a:r>
-              <a:t>Quote must fuzzy-</a:t>
-            </a:r>
-          </a:p>
-          <a:p>
-            <a:pPr>
-              <a:defRPr sz="1100">
-                <a:solidFill>
-                  <a:srgbClr val="475569"/>
-                </a:solidFill>
-              </a:defRPr>
-            </a:pPr>
-            <a:r>
-              <a:t>match transcript,</a:t>
-            </a:r>
-          </a:p>
-          <a:p>
-            <a:pPr>
-              <a:defRPr sz="1100">
-                <a:solidFill>
-                  <a:srgbClr val="475569"/>
-                </a:solidFill>
-              </a:defRPr>
-            </a:pPr>
-            <a:r>
-              <a:t>else discarded</a:t>
-            </a:r>
-          </a:p>
-        </p:txBody>
-      </p:sp>
-      <p:sp>
-        <p:nvSpPr>
-          <p:cNvPr id="12" name="Right Arrow 11"/>
+          <a:bodyPr rtlCol="0" anchor="ctr"/>
+          <a:lstStyle/>
+          <a:p>
+            <a:pPr algn="ctr"/>
+          </a:p>
+        </p:txBody>
+      </p:sp>
+      <p:sp>
+        <p:nvSpPr>
+          <p:cNvPr id="21" name="Rectangle 20"/>
           <p:cNvSpPr/>
           <p:nvPr/>
         </p:nvSpPr>
         <p:spPr>
           <a:xfrm>
-            <a:off x="8019288" y="2834640"/>
-            <a:ext cx="201168" cy="274320"/>
-          </a:xfrm>
-          <a:prstGeom prst="rightArrow">
+            <a:off x="9281160" y="1920240"/>
+            <a:ext cx="411480" cy="54864"/>
+          </a:xfrm>
+          <a:prstGeom prst="rect">
             <a:avLst/>
           </a:prstGeom>
           <a:solidFill>
-            <a:srgbClr val="F59E0B"/>
+            <a:srgbClr val="2EA84F"/>
           </a:solidFill>
           <a:ln>
             <a:noFill/>
@@ -4730,237 +8465,14 @@
       </p:sp>
       <p:sp>
         <p:nvSpPr>
-          <p:cNvPr id="13" name="Rounded Rectangle 12"/>
-          <p:cNvSpPr/>
-          <p:nvPr/>
-        </p:nvSpPr>
-        <p:spPr>
-          <a:xfrm>
-            <a:off x="8229600" y="2011680"/>
-            <a:ext cx="1691640" cy="1920240"/>
-          </a:xfrm>
-          <a:prstGeom prst="roundRect">
-            <a:avLst/>
-          </a:prstGeom>
-          <a:solidFill>
-            <a:srgbClr val="0F172A"/>
-          </a:solidFill>
-          <a:ln>
-            <a:solidFill>
-              <a:srgbClr val="F59E0B"/>
-            </a:solidFill>
-          </a:ln>
-        </p:spPr>
-        <p:style>
-          <a:lnRef idx="1">
-            <a:schemeClr val="accent1"/>
-          </a:lnRef>
-          <a:fillRef idx="3">
-            <a:schemeClr val="accent1"/>
-          </a:fillRef>
-          <a:effectRef idx="2">
-            <a:schemeClr val="accent1"/>
-          </a:effectRef>
-          <a:fontRef idx="minor">
-            <a:schemeClr val="lt1"/>
-          </a:fontRef>
-        </p:style>
-        <p:txBody>
-          <a:bodyPr rtlCol="0" anchor="ctr" wrap="square"/>
-          <a:lstStyle/>
-          <a:p>
-            <a:pPr algn="ctr">
-              <a:defRPr b="1" sz="1600">
-                <a:solidFill>
-                  <a:srgbClr val="F59E0B"/>
-                </a:solidFill>
-              </a:defRPr>
-            </a:pPr>
-            <a:r>
-              <a:t>SEBI check</a:t>
-            </a:r>
-          </a:p>
-          <a:p>
-            <a:pPr>
-              <a:defRPr sz="1100">
-                <a:solidFill>
-                  <a:srgbClr val="CBD5E1"/>
-                </a:solidFill>
-              </a:defRPr>
-            </a:pPr>
-            <a:r>
-              <a:t>3,300+ RA/IA records</a:t>
-            </a:r>
-          </a:p>
-          <a:p>
-            <a:pPr>
-              <a:defRPr sz="1100">
-                <a:solidFill>
-                  <a:srgbClr val="CBD5E1"/>
-                </a:solidFill>
-              </a:defRPr>
-            </a:pPr>
-            <a:r>
-              <a:t>SQLite mirror +</a:t>
-            </a:r>
-          </a:p>
-          <a:p>
-            <a:pPr>
-              <a:defRPr sz="1100">
-                <a:solidFill>
-                  <a:srgbClr val="CBD5E1"/>
-                </a:solidFill>
-              </a:defRPr>
-            </a:pPr>
-            <a:r>
-              <a:t>live number lookup</a:t>
-            </a:r>
-          </a:p>
-        </p:txBody>
-      </p:sp>
-      <p:sp>
-        <p:nvSpPr>
-          <p:cNvPr id="14" name="Right Arrow 13"/>
-          <p:cNvSpPr/>
-          <p:nvPr/>
-        </p:nvSpPr>
-        <p:spPr>
-          <a:xfrm>
-            <a:off x="9939528" y="2834640"/>
-            <a:ext cx="201168" cy="274320"/>
-          </a:xfrm>
-          <a:prstGeom prst="rightArrow">
-            <a:avLst/>
-          </a:prstGeom>
-          <a:solidFill>
-            <a:srgbClr val="F59E0B"/>
-          </a:solidFill>
-          <a:ln>
-            <a:noFill/>
-          </a:ln>
-        </p:spPr>
-        <p:style>
-          <a:lnRef idx="1">
-            <a:schemeClr val="accent1"/>
-          </a:lnRef>
-          <a:fillRef idx="3">
-            <a:schemeClr val="accent1"/>
-          </a:fillRef>
-          <a:effectRef idx="2">
-            <a:schemeClr val="accent1"/>
-          </a:effectRef>
-          <a:fontRef idx="minor">
-            <a:schemeClr val="lt1"/>
-          </a:fontRef>
-        </p:style>
-        <p:txBody>
-          <a:bodyPr rtlCol="0" anchor="ctr"/>
-          <a:lstStyle/>
-          <a:p>
-            <a:pPr algn="ctr"/>
-          </a:p>
-        </p:txBody>
-      </p:sp>
-      <p:sp>
-        <p:nvSpPr>
-          <p:cNvPr id="15" name="Rounded Rectangle 14"/>
-          <p:cNvSpPr/>
-          <p:nvPr/>
-        </p:nvSpPr>
-        <p:spPr>
-          <a:xfrm>
-            <a:off x="10149840" y="2011680"/>
-            <a:ext cx="1691640" cy="1920240"/>
-          </a:xfrm>
-          <a:prstGeom prst="roundRect">
-            <a:avLst/>
-          </a:prstGeom>
-          <a:solidFill>
-            <a:srgbClr val="FFFFFF"/>
-          </a:solidFill>
-          <a:ln>
-            <a:solidFill>
-              <a:srgbClr val="F59E0B"/>
-            </a:solidFill>
-          </a:ln>
-        </p:spPr>
-        <p:style>
-          <a:lnRef idx="1">
-            <a:schemeClr val="accent1"/>
-          </a:lnRef>
-          <a:fillRef idx="3">
-            <a:schemeClr val="accent1"/>
-          </a:fillRef>
-          <a:effectRef idx="2">
-            <a:schemeClr val="accent1"/>
-          </a:effectRef>
-          <a:fontRef idx="minor">
-            <a:schemeClr val="lt1"/>
-          </a:fontRef>
-        </p:style>
-        <p:txBody>
-          <a:bodyPr rtlCol="0" anchor="ctr" wrap="square"/>
-          <a:lstStyle/>
-          <a:p>
-            <a:pPr algn="ctr">
-              <a:defRPr b="1" sz="1600">
-                <a:solidFill>
-                  <a:srgbClr val="0F172A"/>
-                </a:solidFill>
-              </a:defRPr>
-            </a:pPr>
-            <a:r>
-              <a:t>Report</a:t>
-            </a:r>
-          </a:p>
-          <a:p>
-            <a:pPr>
-              <a:defRPr sz="1100">
-                <a:solidFill>
-                  <a:srgbClr val="475569"/>
-                </a:solidFill>
-              </a:defRPr>
-            </a:pPr>
-            <a:r>
-              <a:t>Score · summary ·</a:t>
-            </a:r>
-          </a:p>
-          <a:p>
-            <a:pPr>
-              <a:defRPr sz="1100">
-                <a:solidFill>
-                  <a:srgbClr val="475569"/>
-                </a:solidFill>
-              </a:defRPr>
-            </a:pPr>
-            <a:r>
-              <a:t>Hindi (gemma3:4b)</a:t>
-            </a:r>
-          </a:p>
-          <a:p>
-            <a:pPr>
-              <a:defRPr sz="1100">
-                <a:solidFill>
-                  <a:srgbClr val="475569"/>
-                </a:solidFill>
-              </a:defRPr>
-            </a:pPr>
-            <a:r>
-              <a:t>FastAPI SSE → React</a:t>
-            </a:r>
-          </a:p>
-        </p:txBody>
-      </p:sp>
-      <p:sp>
-        <p:nvSpPr>
-          <p:cNvPr id="16" name="TextBox 15"/>
+          <p:cNvPr id="22" name="TextBox 21"/>
           <p:cNvSpPr txBox="1"/>
           <p:nvPr/>
         </p:nvSpPr>
         <p:spPr>
           <a:xfrm>
-            <a:off x="640080" y="4389120"/>
-            <a:ext cx="10972800" cy="2011680"/>
+            <a:off x="9235440" y="2057400"/>
+            <a:ext cx="2286000" cy="548640"/>
           </a:xfrm>
           <a:prstGeom prst="rect">
             <a:avLst/>
@@ -4975,49 +8487,134 @@
           <a:p>
             <a:pPr>
               <a:spcAft>
-                <a:spcPts val="400"/>
-              </a:spcAft>
-              <a:defRPr sz="1600" b="0">
-                <a:solidFill>
-                  <a:srgbClr val="475569"/>
-                </a:solidFill>
-                <a:latin typeface="Inter"/>
-              </a:defRPr>
-            </a:pPr>
-            <a:r>
-              <a:t>Everything runs locally on a 6 GB laptop GPU: models run sequentially, Whisper frees VRAM before the LLM loads.</a:t>
-            </a:r>
-          </a:p>
-          <a:p>
-            <a:pPr>
-              <a:spcAft>
-                <a:spcPts val="400"/>
-              </a:spcAft>
-              <a:defRPr sz="1600" b="0">
-                <a:solidFill>
-                  <a:srgbClr val="475569"/>
-                </a:solidFill>
-                <a:latin typeface="Inter"/>
-              </a:defRPr>
-            </a:pPr>
-            <a:r>
-              <a:t>Rules give the LLM hints and act as a low-confidence safety net; the LLM supplies context (a warning ABOUT scams is not a scam).</a:t>
-            </a:r>
-          </a:p>
-          <a:p>
-            <a:pPr>
-              <a:spcAft>
-                <a:spcPts val="400"/>
-              </a:spcAft>
-              <a:defRPr sz="1600" b="0">
-                <a:solidFill>
-                  <a:srgbClr val="475569"/>
-                </a:solidFill>
-                <a:latin typeface="Inter"/>
-              </a:defRPr>
-            </a:pPr>
-            <a:r>
-              <a:t>Stack: Python 3.12 · FastAPI · faster-whisper · Ollama · rapidfuzz · SQLite · React + TypeScript + Tailwind · Docker.</a:t>
+                <a:spcPts val="800"/>
+              </a:spcAft>
+            </a:pPr>
+            <a:r>
+              <a:rPr sz="1700" b="1">
+                <a:solidFill>
+                  <a:srgbClr val="0B1220"/>
+                </a:solidFill>
+                <a:latin typeface="Inter"/>
+              </a:rPr>
+              <a:t>Ask in your words</a:t>
+            </a:r>
+          </a:p>
+        </p:txBody>
+      </p:sp>
+      <p:sp>
+        <p:nvSpPr>
+          <p:cNvPr id="23" name="TextBox 22"/>
+          <p:cNvSpPr txBox="1"/>
+          <p:nvPr/>
+        </p:nvSpPr>
+        <p:spPr>
+          <a:xfrm>
+            <a:off x="9235440" y="2560320"/>
+            <a:ext cx="2286000" cy="2377440"/>
+          </a:xfrm>
+          <a:prstGeom prst="rect">
+            <a:avLst/>
+          </a:prstGeom>
+          <a:noFill/>
+        </p:spPr>
+        <p:txBody>
+          <a:bodyPr wrap="square">
+            <a:spAutoFit/>
+          </a:bodyPr>
+          <a:lstStyle/>
+          <a:p>
+            <a:pPr>
+              <a:spcAft>
+                <a:spcPts val="500"/>
+              </a:spcAft>
+            </a:pPr>
+            <a:r>
+              <a:rPr sz="1300" b="0">
+                <a:solidFill>
+                  <a:srgbClr val="3B4559"/>
+                </a:solidFill>
+                <a:latin typeface="Inter"/>
+              </a:rPr>
+              <a:t>Chat (typed or spoken, Hindi/English) about any audit. Answers cite the evidence; never gives investment advice.</a:t>
+            </a:r>
+          </a:p>
+        </p:txBody>
+      </p:sp>
+      <p:sp>
+        <p:nvSpPr>
+          <p:cNvPr id="24" name="TextBox 23"/>
+          <p:cNvSpPr txBox="1"/>
+          <p:nvPr/>
+        </p:nvSpPr>
+        <p:spPr>
+          <a:xfrm>
+            <a:off x="9235440" y="4572000"/>
+            <a:ext cx="2286000" cy="365760"/>
+          </a:xfrm>
+          <a:prstGeom prst="rect">
+            <a:avLst/>
+          </a:prstGeom>
+          <a:noFill/>
+        </p:spPr>
+        <p:txBody>
+          <a:bodyPr wrap="square">
+            <a:spAutoFit/>
+          </a:bodyPr>
+          <a:lstStyle/>
+          <a:p>
+            <a:pPr>
+              <a:spcAft>
+                <a:spcPts val="800"/>
+              </a:spcAft>
+            </a:pPr>
+            <a:r>
+              <a:rPr sz="1200" b="1">
+                <a:solidFill>
+                  <a:srgbClr val="2EA84F"/>
+                </a:solidFill>
+                <a:latin typeface="Inter"/>
+              </a:rPr>
+              <a:t>Tracks C/E</a:t>
+            </a:r>
+          </a:p>
+        </p:txBody>
+      </p:sp>
+      <p:sp>
+        <p:nvSpPr>
+          <p:cNvPr id="25" name="TextBox 24"/>
+          <p:cNvSpPr txBox="1"/>
+          <p:nvPr/>
+        </p:nvSpPr>
+        <p:spPr>
+          <a:xfrm>
+            <a:off x="548640" y="5349240"/>
+            <a:ext cx="11155680" cy="1097280"/>
+          </a:xfrm>
+          <a:prstGeom prst="rect">
+            <a:avLst/>
+          </a:prstGeom>
+          <a:noFill/>
+        </p:spPr>
+        <p:txBody>
+          <a:bodyPr wrap="square">
+            <a:spAutoFit/>
+          </a:bodyPr>
+          <a:lstStyle/>
+          <a:p>
+            <a:pPr>
+              <a:spcAft>
+                <a:spcPts val="800"/>
+              </a:spcAft>
+            </a:pPr>
+            <a:r>
+              <a:rPr sz="1600" b="0">
+                <a:solidFill>
+                  <a:srgbClr val="3B4559"/>
+                </a:solidFill>
+                <a:latin typeface="Inter"/>
+              </a:rPr>
+              <a:t>Every name, website and registration number is checked against 6,645 entities from 5 SEBI registers. Every result comes with a plain-language summary, concrete next steps, a PDF report and a natural voice, in English or हिन्दी.</a:t>
             </a:r>
           </a:p>
         </p:txBody>
@@ -5036,7 +8633,7 @@
     <p:bg>
       <p:bgPr>
         <a:solidFill>
-          <a:srgbClr val="F8FAFC"/>
+          <a:srgbClr val="F6F4FB"/>
         </a:solidFill>
         <a:effectLst/>
       </p:bgPr>
@@ -5057,14 +8654,22 @@
         <p:spPr>
           <a:xfrm>
             <a:off x="0" y="0"/>
-            <a:ext cx="164592" cy="6858000"/>
-          </a:xfrm>
-          <a:prstGeom prst="rect">
-            <a:avLst/>
-          </a:prstGeom>
-          <a:solidFill>
-            <a:srgbClr val="F59E0B"/>
-          </a:solidFill>
+            <a:ext cx="12191695" cy="82296"/>
+          </a:xfrm>
+          <a:prstGeom prst="rect">
+            <a:avLst/>
+          </a:prstGeom>
+          <a:gradFill rotWithShape="1">
+            <a:gsLst>
+              <a:gs pos="0">
+                <a:srgbClr val="FF7A1A"/>
+              </a:gs>
+              <a:gs pos="100000">
+                <a:srgbClr val="7C4DFF"/>
+              </a:gs>
+            </a:gsLst>
+            <a:lin scaled="0" ang="0"/>
+          </a:gradFill>
           <a:ln>
             <a:noFill/>
           </a:ln>
@@ -5099,7 +8704,7 @@
         </p:nvSpPr>
         <p:spPr>
           <a:xfrm>
-            <a:off x="640080" y="365760"/>
+            <a:off x="548640" y="320040"/>
             <a:ext cx="10972800" cy="365760"/>
           </a:xfrm>
           <a:prstGeom prst="rect">
@@ -5115,17 +8720,17 @@
           <a:p>
             <a:pPr>
               <a:spcAft>
-                <a:spcPts val="400"/>
-              </a:spcAft>
-              <a:defRPr sz="1300" b="1">
-                <a:solidFill>
-                  <a:srgbClr val="F59E0B"/>
-                </a:solidFill>
-                <a:latin typeface="Inter"/>
-              </a:defRPr>
-            </a:pPr>
-            <a:r>
-              <a:t>TRUST SIGNAL</a:t>
+                <a:spcPts val="800"/>
+              </a:spcAft>
+            </a:pPr>
+            <a:r>
+              <a:rPr sz="1200" b="1">
+                <a:solidFill>
+                  <a:srgbClr val="FF7A1A"/>
+                </a:solidFill>
+                <a:latin typeface="Inter"/>
+              </a:rPr>
+              <a:t>JOURNEY 1 · TRACK A</a:t>
             </a:r>
           </a:p>
         </p:txBody>
@@ -5138,8 +8743,8 @@
         </p:nvSpPr>
         <p:spPr>
           <a:xfrm>
-            <a:off x="640080" y="685800"/>
-            <a:ext cx="10972800" cy="822960"/>
+            <a:off x="548640" y="594360"/>
+            <a:ext cx="11155680" cy="914400"/>
           </a:xfrm>
           <a:prstGeom prst="rect">
             <a:avLst/>
@@ -5154,127 +8759,24 @@
           <a:p>
             <a:pPr>
               <a:spcAft>
-                <a:spcPts val="400"/>
-              </a:spcAft>
-              <a:defRPr sz="3200" b="1">
-                <a:solidFill>
-                  <a:srgbClr val="0F172A"/>
-                </a:solidFill>
-                <a:latin typeface="Inter"/>
-              </a:defRPr>
-            </a:pPr>
-            <a:r>
-              <a:t>Who is speaking? A real SEBI registry check</a:t>
-            </a:r>
-          </a:p>
-        </p:txBody>
-      </p:sp>
-      <p:sp>
-        <p:nvSpPr>
-          <p:cNvPr id="5" name="TextBox 4"/>
-          <p:cNvSpPr txBox="1"/>
-          <p:nvPr/>
-        </p:nvSpPr>
-        <p:spPr>
-          <a:xfrm>
-            <a:off x="640080" y="1737360"/>
-            <a:ext cx="5486400" cy="4572000"/>
-          </a:xfrm>
-          <a:prstGeom prst="rect">
-            <a:avLst/>
-          </a:prstGeom>
-          <a:noFill/>
-        </p:spPr>
-        <p:txBody>
-          <a:bodyPr wrap="square">
-            <a:spAutoFit/>
-          </a:bodyPr>
-          <a:lstStyle/>
-          <a:p>
-            <a:pPr>
-              <a:spcAft>
-                <a:spcPts val="1000"/>
-              </a:spcAft>
-              <a:defRPr sz="1800" b="0">
-                <a:solidFill>
-                  <a:srgbClr val="0F172A"/>
-                </a:solidFill>
-                <a:latin typeface="Inter"/>
-              </a:defRPr>
-            </a:pPr>
-            <a:r>
-              <a:t>•  Mirrors SEBI's public Research Analyst + Investment Adviser lists (3,300+ entities)</a:t>
-            </a:r>
-          </a:p>
-          <a:p>
-            <a:pPr>
-              <a:spcAft>
-                <a:spcPts val="1000"/>
-              </a:spcAft>
-              <a:defRPr sz="1800" b="0">
-                <a:solidFill>
-                  <a:srgbClr val="0F172A"/>
-                </a:solidFill>
-                <a:latin typeface="Inter"/>
-              </a:defRPr>
-            </a:pPr>
-            <a:r>
-              <a:t>•  Validates any INH… / INA… number quoted in the video or its description</a:t>
-            </a:r>
-          </a:p>
-          <a:p>
-            <a:pPr>
-              <a:spcAft>
-                <a:spcPts val="1000"/>
-              </a:spcAft>
-              <a:defRPr sz="1800" b="0">
-                <a:solidFill>
-                  <a:srgbClr val="0F172A"/>
-                </a:solidFill>
-                <a:latin typeface="Inter"/>
-              </a:defRPr>
-            </a:pPr>
-            <a:r>
-              <a:t>•  Fuzzy-matches the channel name, but shows it only as 'possible match – verify', never as proof</a:t>
-            </a:r>
-          </a:p>
-          <a:p>
-            <a:pPr>
-              <a:spcAft>
-                <a:spcPts val="1000"/>
-              </a:spcAft>
-              <a:defRPr sz="1800" b="0">
-                <a:solidFill>
-                  <a:srgbClr val="0F172A"/>
-                </a:solidFill>
-                <a:latin typeface="Inter"/>
-              </a:defRPr>
-            </a:pPr>
-            <a:r>
-              <a:t>•  Detects risk disclaimers in English and Hindi</a:t>
-            </a:r>
-          </a:p>
-          <a:p>
-            <a:pPr>
-              <a:spcAft>
-                <a:spcPts val="1000"/>
-              </a:spcAft>
-              <a:defRPr sz="1800" b="0">
-                <a:solidFill>
-                  <a:srgbClr val="0F172A"/>
-                </a:solidFill>
-                <a:latin typeface="Inter"/>
-              </a:defRPr>
-            </a:pPr>
-            <a:r>
-              <a:t>•  A quoted number that is NOT in the registry is a strong warning sign</a:t>
+                <a:spcPts val="800"/>
+              </a:spcAft>
+            </a:pPr>
+            <a:r>
+              <a:rPr sz="3000" b="1">
+                <a:solidFill>
+                  <a:srgbClr val="0B1220"/>
+                </a:solidFill>
+                <a:latin typeface="Inter"/>
+              </a:rPr>
+              <a:t>A fake Zerodha KYC alert, caught in seconds</a:t>
             </a:r>
           </a:p>
         </p:txBody>
       </p:sp>
       <p:pic>
         <p:nvPicPr>
-          <p:cNvPr id="6" name="Picture 5" descr="registry.png"/>
+          <p:cNvPr id="5" name="Picture 4" descr="crop_130_910_msg.png"/>
           <p:cNvPicPr>
             <a:picLocks noChangeAspect="1"/>
           </p:cNvPicPr>
@@ -5288,19 +8790,167 @@
         </p:blipFill>
         <p:spPr>
           <a:xfrm>
-            <a:off x="6949440" y="1645920"/>
-            <a:ext cx="4484850" cy="4754880"/>
+            <a:off x="548640" y="1463040"/>
+            <a:ext cx="6766560" cy="4549928"/>
           </a:xfrm>
           <a:prstGeom prst="rect">
             <a:avLst/>
           </a:prstGeom>
           <a:ln>
             <a:solidFill>
-              <a:srgbClr val="CBD5E1"/>
+              <a:srgbClr val="DDDAE8"/>
             </a:solidFill>
           </a:ln>
         </p:spPr>
       </p:pic>
+      <p:sp>
+        <p:nvSpPr>
+          <p:cNvPr id="6" name="TextBox 5"/>
+          <p:cNvSpPr txBox="1"/>
+          <p:nvPr/>
+        </p:nvSpPr>
+        <p:spPr>
+          <a:xfrm>
+            <a:off x="7589520" y="1554480"/>
+            <a:ext cx="4114800" cy="5029200"/>
+          </a:xfrm>
+          <a:prstGeom prst="rect">
+            <a:avLst/>
+          </a:prstGeom>
+          <a:noFill/>
+        </p:spPr>
+        <p:txBody>
+          <a:bodyPr wrap="square">
+            <a:spAutoFit/>
+          </a:bodyPr>
+          <a:lstStyle/>
+          <a:p>
+            <a:pPr>
+              <a:spcAft>
+                <a:spcPts val="1000"/>
+              </a:spcAft>
+            </a:pPr>
+            <a:r>
+              <a:rPr sz="1500" b="1">
+                <a:solidFill>
+                  <a:srgbClr val="FF7A1A"/>
+                </a:solidFill>
+                <a:latin typeface="Inter"/>
+              </a:rPr>
+              <a:t>•  </a:t>
+            </a:r>
+            <a:r>
+              <a:rPr sz="1500" b="0">
+                <a:solidFill>
+                  <a:srgbClr val="3B4559"/>
+                </a:solidFill>
+                <a:latin typeface="Inter"/>
+              </a:rPr>
+              <a:t>Risk 84/100, every warning sign tied to its line</a:t>
+            </a:r>
+          </a:p>
+          <a:p>
+            <a:pPr>
+              <a:spcAft>
+                <a:spcPts val="1000"/>
+              </a:spcAft>
+            </a:pPr>
+            <a:r>
+              <a:rPr sz="1500" b="1">
+                <a:solidFill>
+                  <a:srgbClr val="FF7A1A"/>
+                </a:solidFill>
+                <a:latin typeface="Inter"/>
+              </a:rPr>
+              <a:t>•  </a:t>
+            </a:r>
+            <a:r>
+              <a:rPr sz="1500" b="0">
+                <a:solidFill>
+                  <a:srgbClr val="3B4559"/>
+                </a:solidFill>
+                <a:latin typeface="Inter"/>
+              </a:rPr>
+              <a:t>Domain check: uses Zerodha's name but links to zerodha-kyc-update.in, not their official site</a:t>
+            </a:r>
+          </a:p>
+          <a:p>
+            <a:pPr>
+              <a:spcAft>
+                <a:spcPts val="1000"/>
+              </a:spcAft>
+            </a:pPr>
+            <a:r>
+              <a:rPr sz="1500" b="1">
+                <a:solidFill>
+                  <a:srgbClr val="FF7A1A"/>
+                </a:solidFill>
+                <a:latin typeface="Inter"/>
+              </a:rPr>
+              <a:t>•  </a:t>
+            </a:r>
+            <a:r>
+              <a:rPr sz="1500" b="0">
+                <a:solidFill>
+                  <a:srgbClr val="3B4559"/>
+                </a:solidFill>
+                <a:latin typeface="Inter"/>
+              </a:rPr>
+              <a:t>Spots the OTP request and the ₹99 fee to a UPI handle; ignores a genuine bank OTP SMS</a:t>
+            </a:r>
+          </a:p>
+          <a:p>
+            <a:pPr>
+              <a:spcAft>
+                <a:spcPts val="1000"/>
+              </a:spcAft>
+            </a:pPr>
+            <a:r>
+              <a:rPr sz="1500" b="1">
+                <a:solidFill>
+                  <a:srgbClr val="FF7A1A"/>
+                </a:solidFill>
+                <a:latin typeface="Inter"/>
+              </a:rPr>
+              <a:t>•  </a:t>
+            </a:r>
+            <a:r>
+              <a:rPr sz="1500" b="0">
+                <a:solidFill>
+                  <a:srgbClr val="3B4559"/>
+                </a:solidFill>
+                <a:latin typeface="Inter"/>
+              </a:rPr>
+              <a:t>Gives concrete steps: don't share, don't pay, use the official app, call 1930</a:t>
+            </a:r>
+          </a:p>
+          <a:p>
+            <a:pPr>
+              <a:spcAft>
+                <a:spcPts val="1000"/>
+              </a:spcAft>
+            </a:pPr>
+            <a:r>
+              <a:rPr sz="1500" b="1">
+                <a:solidFill>
+                  <a:srgbClr val="FF7A1A"/>
+                </a:solidFill>
+                <a:latin typeface="Inter"/>
+              </a:rPr>
+              <a:t>•  </a:t>
+            </a:r>
+            <a:r>
+              <a:rPr sz="1500" b="0">
+                <a:solidFill>
+                  <a:srgbClr val="3B4559"/>
+                </a:solidFill>
+                <a:latin typeface="Inter"/>
+              </a:rPr>
+              <a:t>Works from a screenshot too (vision OCR keeps Hindi in Devanagari)</a:t>
+            </a:r>
+          </a:p>
+        </p:txBody>
+      </p:sp>
     </p:spTree>
   </p:cSld>
   <p:clrMapOvr>
@@ -5315,7 +8965,7 @@
     <p:bg>
       <p:bgPr>
         <a:solidFill>
-          <a:srgbClr val="F8FAFC"/>
+          <a:srgbClr val="F6F4FB"/>
         </a:solidFill>
         <a:effectLst/>
       </p:bgPr>
@@ -5336,14 +8986,22 @@
         <p:spPr>
           <a:xfrm>
             <a:off x="0" y="0"/>
-            <a:ext cx="164592" cy="6858000"/>
-          </a:xfrm>
-          <a:prstGeom prst="rect">
-            <a:avLst/>
-          </a:prstGeom>
-          <a:solidFill>
-            <a:srgbClr val="F59E0B"/>
-          </a:solidFill>
+            <a:ext cx="12191695" cy="82296"/>
+          </a:xfrm>
+          <a:prstGeom prst="rect">
+            <a:avLst/>
+          </a:prstGeom>
+          <a:gradFill rotWithShape="1">
+            <a:gsLst>
+              <a:gs pos="0">
+                <a:srgbClr val="FF7A1A"/>
+              </a:gs>
+              <a:gs pos="100000">
+                <a:srgbClr val="7C4DFF"/>
+              </a:gs>
+            </a:gsLst>
+            <a:lin scaled="0" ang="0"/>
+          </a:gradFill>
           <a:ln>
             <a:noFill/>
           </a:ln>
@@ -5378,7 +9036,7 @@
         </p:nvSpPr>
         <p:spPr>
           <a:xfrm>
-            <a:off x="640080" y="365760"/>
+            <a:off x="548640" y="320040"/>
             <a:ext cx="10972800" cy="365760"/>
           </a:xfrm>
           <a:prstGeom prst="rect">
@@ -5394,17 +9052,17 @@
           <a:p>
             <a:pPr>
               <a:spcAft>
-                <a:spcPts val="400"/>
-              </a:spcAft>
-              <a:defRPr sz="1300" b="1">
-                <a:solidFill>
-                  <a:srgbClr val="F59E0B"/>
-                </a:solidFill>
-                <a:latin typeface="Inter"/>
-              </a:defRPr>
-            </a:pPr>
-            <a:r>
-              <a:t>ACCESSIBILITY</a:t>
+                <a:spcPts val="800"/>
+              </a:spcAft>
+            </a:pPr>
+            <a:r>
+              <a:rPr sz="1200" b="1">
+                <a:solidFill>
+                  <a:srgbClr val="FF7A1A"/>
+                </a:solidFill>
+                <a:latin typeface="Inter"/>
+              </a:rPr>
+              <a:t>JOURNEY 2 · TRACK E</a:t>
             </a:r>
           </a:p>
         </p:txBody>
@@ -5417,8 +9075,8 @@
         </p:nvSpPr>
         <p:spPr>
           <a:xfrm>
-            <a:off x="640080" y="685800"/>
-            <a:ext cx="10972800" cy="822960"/>
+            <a:off x="548640" y="594360"/>
+            <a:ext cx="11155680" cy="914400"/>
           </a:xfrm>
           <a:prstGeom prst="rect">
             <a:avLst/>
@@ -5433,127 +9091,24 @@
           <a:p>
             <a:pPr>
               <a:spcAft>
-                <a:spcPts val="400"/>
-              </a:spcAft>
-              <a:defRPr sz="3200" b="1">
-                <a:solidFill>
-                  <a:srgbClr val="0F172A"/>
-                </a:solidFill>
-                <a:latin typeface="Inter"/>
-              </a:defRPr>
-            </a:pPr>
-            <a:r>
-              <a:t>Built for Bharat</a:t>
-            </a:r>
-          </a:p>
-        </p:txBody>
-      </p:sp>
-      <p:sp>
-        <p:nvSpPr>
-          <p:cNvPr id="5" name="TextBox 4"/>
-          <p:cNvSpPr txBox="1"/>
-          <p:nvPr/>
-        </p:nvSpPr>
-        <p:spPr>
-          <a:xfrm>
-            <a:off x="640080" y="1737360"/>
-            <a:ext cx="4754880" cy="4572000"/>
-          </a:xfrm>
-          <a:prstGeom prst="rect">
-            <a:avLst/>
-          </a:prstGeom>
-          <a:noFill/>
-        </p:spPr>
-        <p:txBody>
-          <a:bodyPr wrap="square">
-            <a:spAutoFit/>
-          </a:bodyPr>
-          <a:lstStyle/>
-          <a:p>
-            <a:pPr>
-              <a:spcAft>
-                <a:spcPts val="1000"/>
-              </a:spcAft>
-              <a:defRPr sz="1800" b="0">
-                <a:solidFill>
-                  <a:srgbClr val="0F172A"/>
-                </a:solidFill>
-                <a:latin typeface="Inter"/>
-              </a:defRPr>
-            </a:pPr>
-            <a:r>
-              <a:t>•  Understands Hindi, English and Hinglish speech</a:t>
-            </a:r>
-          </a:p>
-          <a:p>
-            <a:pPr>
-              <a:spcAft>
-                <a:spcPts val="1000"/>
-              </a:spcAft>
-              <a:defRPr sz="1800" b="0">
-                <a:solidFill>
-                  <a:srgbClr val="0F172A"/>
-                </a:solidFill>
-                <a:latin typeface="Inter"/>
-              </a:defRPr>
-            </a:pPr>
-            <a:r>
-              <a:t>•  Entire UI, every explanation and the summary in Hindi</a:t>
-            </a:r>
-          </a:p>
-          <a:p>
-            <a:pPr>
-              <a:spcAft>
-                <a:spcPts val="1000"/>
-              </a:spcAft>
-              <a:defRPr sz="1800" b="0">
-                <a:solidFill>
-                  <a:srgbClr val="0F172A"/>
-                </a:solidFill>
-                <a:latin typeface="Inter"/>
-              </a:defRPr>
-            </a:pPr>
-            <a:r>
-              <a:t>•  Read-aloud for users who find reading hard</a:t>
-            </a:r>
-          </a:p>
-          <a:p>
-            <a:pPr>
-              <a:spcAft>
-                <a:spcPts val="1000"/>
-              </a:spcAft>
-              <a:defRPr sz="1800" b="0">
-                <a:solidFill>
-                  <a:srgbClr val="0F172A"/>
-                </a:solidFill>
-                <a:latin typeface="Inter"/>
-              </a:defRPr>
-            </a:pPr>
-            <a:r>
-              <a:t>•  Upload a forwarded WhatsApp voice note: transcribed locally by Whisper</a:t>
-            </a:r>
-          </a:p>
-          <a:p>
-            <a:pPr>
-              <a:spcAft>
-                <a:spcPts val="1000"/>
-              </a:spcAft>
-              <a:defRPr sz="1800" b="0">
-                <a:solidFill>
-                  <a:srgbClr val="0F172A"/>
-                </a:solidFill>
-                <a:latin typeface="Inter"/>
-              </a:defRPr>
-            </a:pPr>
-            <a:r>
-              <a:t>•  Works offline after setup: no per-use cost, no API keys</a:t>
+                <a:spcPts val="800"/>
+              </a:spcAft>
+            </a:pPr>
+            <a:r>
+              <a:rPr sz="3000" b="1">
+                <a:solidFill>
+                  <a:srgbClr val="0B1220"/>
+                </a:solidFill>
+                <a:latin typeface="Inter"/>
+              </a:rPr>
+              <a:t>A "100X guaranteed" crypto video, audited line by line</a:t>
             </a:r>
           </a:p>
         </p:txBody>
       </p:sp>
       <p:pic>
         <p:nvPicPr>
-          <p:cNvPr id="6" name="Picture 5" descr="c_0_60_report_hi.png"/>
+          <p:cNvPr id="5" name="Picture 4" descr="crop_130_910_video.png"/>
           <p:cNvPicPr>
             <a:picLocks noChangeAspect="1"/>
           </p:cNvPicPr>
@@ -5567,19 +9122,142 @@
         </p:blipFill>
         <p:spPr>
           <a:xfrm>
-            <a:off x="5669280" y="1645920"/>
-            <a:ext cx="6126480" cy="4113494"/>
+            <a:off x="548640" y="1463040"/>
+            <a:ext cx="6766560" cy="4549928"/>
           </a:xfrm>
           <a:prstGeom prst="rect">
             <a:avLst/>
           </a:prstGeom>
           <a:ln>
             <a:solidFill>
-              <a:srgbClr val="CBD5E1"/>
+              <a:srgbClr val="DDDAE8"/>
             </a:solidFill>
           </a:ln>
         </p:spPr>
       </p:pic>
+      <p:sp>
+        <p:nvSpPr>
+          <p:cNvPr id="6" name="TextBox 5"/>
+          <p:cNvSpPr txBox="1"/>
+          <p:nvPr/>
+        </p:nvSpPr>
+        <p:spPr>
+          <a:xfrm>
+            <a:off x="7589520" y="1554480"/>
+            <a:ext cx="4114800" cy="5029200"/>
+          </a:xfrm>
+          <a:prstGeom prst="rect">
+            <a:avLst/>
+          </a:prstGeom>
+          <a:noFill/>
+        </p:spPr>
+        <p:txBody>
+          <a:bodyPr wrap="square">
+            <a:spAutoFit/>
+          </a:bodyPr>
+          <a:lstStyle/>
+          <a:p>
+            <a:pPr>
+              <a:spcAft>
+                <a:spcPts val="1000"/>
+              </a:spcAft>
+            </a:pPr>
+            <a:r>
+              <a:rPr sz="1500" b="1">
+                <a:solidFill>
+                  <a:srgbClr val="FF7A1A"/>
+                </a:solidFill>
+                <a:latin typeface="Inter"/>
+              </a:rPr>
+              <a:t>•  </a:t>
+            </a:r>
+            <a:r>
+              <a:rPr sz="1500" b="0">
+                <a:solidFill>
+                  <a:srgbClr val="3B4559"/>
+                </a:solidFill>
+                <a:latin typeface="Inter"/>
+              </a:rPr>
+              <a:t>Full transcript (YouTube captions or local Whisper, Hindi/English/Hinglish)</a:t>
+            </a:r>
+          </a:p>
+          <a:p>
+            <a:pPr>
+              <a:spcAft>
+                <a:spcPts val="1000"/>
+              </a:spcAft>
+            </a:pPr>
+            <a:r>
+              <a:rPr sz="1500" b="1">
+                <a:solidFill>
+                  <a:srgbClr val="FF7A1A"/>
+                </a:solidFill>
+                <a:latin typeface="Inter"/>
+              </a:rPr>
+              <a:t>•  </a:t>
+            </a:r>
+            <a:r>
+              <a:rPr sz="1500" b="0">
+                <a:solidFill>
+                  <a:srgbClr val="3B4559"/>
+                </a:solidFill>
+                <a:latin typeface="Inter"/>
+              </a:rPr>
+              <a:t>Findings quote the creator verbatim with a timestamp you can click</a:t>
+            </a:r>
+          </a:p>
+          <a:p>
+            <a:pPr>
+              <a:spcAft>
+                <a:spcPts val="1000"/>
+              </a:spcAft>
+            </a:pPr>
+            <a:r>
+              <a:rPr sz="1500" b="1">
+                <a:solidFill>
+                  <a:srgbClr val="FF7A1A"/>
+                </a:solidFill>
+                <a:latin typeface="Inter"/>
+              </a:rPr>
+              <a:t>•  </a:t>
+            </a:r>
+            <a:r>
+              <a:rPr sz="1500" b="0">
+                <a:solidFill>
+                  <a:srgbClr val="3B4559"/>
+                </a:solidFill>
+                <a:latin typeface="Inter"/>
+              </a:rPr>
+              <a:t>Each finding shows severity, confidence and whether AI or keywords found it: uncertainty is visible, never a bare true/false</a:t>
+            </a:r>
+          </a:p>
+          <a:p>
+            <a:pPr>
+              <a:spcAft>
+                <a:spcPts val="1000"/>
+              </a:spcAft>
+            </a:pPr>
+            <a:r>
+              <a:rPr sz="1500" b="1">
+                <a:solidFill>
+                  <a:srgbClr val="FF7A1A"/>
+                </a:solidFill>
+                <a:latin typeface="Inter"/>
+              </a:rPr>
+              <a:t>•  </a:t>
+            </a:r>
+            <a:r>
+              <a:rPr sz="1500" b="0">
+                <a:solidFill>
+                  <a:srgbClr val="3B4559"/>
+                </a:solidFill>
+                <a:latin typeface="Inter"/>
+              </a:rPr>
+              <a:t>Separates promotion (paid groups, referral links) from education</a:t>
+            </a:r>
+          </a:p>
+        </p:txBody>
+      </p:sp>
     </p:spTree>
   </p:cSld>
   <p:clrMapOvr>
@@ -5594,7 +9272,7 @@
     <p:bg>
       <p:bgPr>
         <a:solidFill>
-          <a:srgbClr val="F8FAFC"/>
+          <a:srgbClr val="F6F4FB"/>
         </a:solidFill>
         <a:effectLst/>
       </p:bgPr>
@@ -5615,14 +9293,22 @@
         <p:spPr>
           <a:xfrm>
             <a:off x="0" y="0"/>
-            <a:ext cx="164592" cy="6858000"/>
-          </a:xfrm>
-          <a:prstGeom prst="rect">
-            <a:avLst/>
-          </a:prstGeom>
-          <a:solidFill>
-            <a:srgbClr val="F59E0B"/>
-          </a:solidFill>
+            <a:ext cx="12191695" cy="82296"/>
+          </a:xfrm>
+          <a:prstGeom prst="rect">
+            <a:avLst/>
+          </a:prstGeom>
+          <a:gradFill rotWithShape="1">
+            <a:gsLst>
+              <a:gs pos="0">
+                <a:srgbClr val="FF7A1A"/>
+              </a:gs>
+              <a:gs pos="100000">
+                <a:srgbClr val="7C4DFF"/>
+              </a:gs>
+            </a:gsLst>
+            <a:lin scaled="0" ang="0"/>
+          </a:gradFill>
           <a:ln>
             <a:noFill/>
           </a:ln>
@@ -5657,7 +9343,7 @@
         </p:nvSpPr>
         <p:spPr>
           <a:xfrm>
-            <a:off x="640080" y="365760"/>
+            <a:off x="548640" y="320040"/>
             <a:ext cx="10972800" cy="365760"/>
           </a:xfrm>
           <a:prstGeom prst="rect">
@@ -5673,17 +9359,17 @@
           <a:p>
             <a:pPr>
               <a:spcAft>
-                <a:spcPts val="400"/>
-              </a:spcAft>
-              <a:defRPr sz="1300" b="1">
-                <a:solidFill>
-                  <a:srgbClr val="F59E0B"/>
-                </a:solidFill>
-                <a:latin typeface="Inter"/>
-              </a:defRPr>
-            </a:pPr>
-            <a:r>
-              <a:t>EVALUATION</a:t>
+                <a:spcPts val="800"/>
+              </a:spcAft>
+            </a:pPr>
+            <a:r>
+              <a:rPr sz="1200" b="1">
+                <a:solidFill>
+                  <a:srgbClr val="FF7A1A"/>
+                </a:solidFill>
+                <a:latin typeface="Inter"/>
+              </a:rPr>
+              <a:t>WHO IS GIVING THE ADVICE?</a:t>
             </a:r>
           </a:p>
         </p:txBody>
@@ -5696,8 +9382,8 @@
         </p:nvSpPr>
         <p:spPr>
           <a:xfrm>
-            <a:off x="640080" y="685800"/>
-            <a:ext cx="10972800" cy="822960"/>
+            <a:off x="548640" y="594360"/>
+            <a:ext cx="11155680" cy="914400"/>
           </a:xfrm>
           <a:prstGeom prst="rect">
             <a:avLst/>
@@ -5712,435 +9398,50 @@
           <a:p>
             <a:pPr>
               <a:spcAft>
-                <a:spcPts val="400"/>
-              </a:spcAft>
-              <a:defRPr sz="3200" b="1">
-                <a:solidFill>
-                  <a:srgbClr val="0F172A"/>
-                </a:solidFill>
-                <a:latin typeface="Inter"/>
-              </a:defRPr>
-            </a:pPr>
-            <a:r>
-              <a:t>Does it work? Measured, not assumed</a:t>
-            </a:r>
-          </a:p>
-        </p:txBody>
-      </p:sp>
-      <p:graphicFrame>
-        <p:nvGraphicFramePr>
-          <p:cNvPr id="5" name="Table 4"/>
-          <p:cNvGraphicFramePr>
-            <a:graphicFrameLocks noGrp="1"/>
-          </p:cNvGraphicFramePr>
-          <p:nvPr/>
-        </p:nvGraphicFramePr>
-        <p:xfrm>
-          <a:off x="640080" y="1737360"/>
-          <a:ext cx="7498079" cy="2286000"/>
-        </p:xfrm>
-        <a:graphic>
-          <a:graphicData uri="http://schemas.openxmlformats.org/drawingml/2006/table">
-            <a:tbl>
-              <a:tblPr firstRow="1" bandRow="1">
-                <a:tableStyleId>{5C22544A-7EE6-4342-B048-85BDC9FD1C3A}</a:tableStyleId>
-              </a:tblPr>
-              <a:tblGrid>
-                <a:gridCol w="1499615"/>
-                <a:gridCol w="1499615"/>
-                <a:gridCol w="1499615"/>
-                <a:gridCol w="1499615"/>
-                <a:gridCol w="1499619"/>
-              </a:tblGrid>
-              <a:tr h="457200">
-                <a:tc>
-                  <a:txBody>
-                    <a:bodyPr/>
-                    <a:lstStyle/>
-                    <a:p>
-                      <a:pPr>
-                        <a:defRPr sz="1400"/>
-                      </a:pPr>
-                      <a:r>
-                        <a:t>System (held-out set)</a:t>
-                      </a:r>
-                    </a:p>
-                  </a:txBody>
-                  <a:tcPr/>
-                </a:tc>
-                <a:tc>
-                  <a:txBody>
-                    <a:bodyPr/>
-                    <a:lstStyle/>
-                    <a:p>
-                      <a:pPr>
-                        <a:defRPr sz="1400"/>
-                      </a:pPr>
-                      <a:r>
-                        <a:t>Precision</a:t>
-                      </a:r>
-                    </a:p>
-                  </a:txBody>
-                  <a:tcPr/>
-                </a:tc>
-                <a:tc>
-                  <a:txBody>
-                    <a:bodyPr/>
-                    <a:lstStyle/>
-                    <a:p>
-                      <a:pPr>
-                        <a:defRPr sz="1400"/>
-                      </a:pPr>
-                      <a:r>
-                        <a:t>Recall</a:t>
-                      </a:r>
-                    </a:p>
-                  </a:txBody>
-                  <a:tcPr/>
-                </a:tc>
-                <a:tc>
-                  <a:txBody>
-                    <a:bodyPr/>
-                    <a:lstStyle/>
-                    <a:p>
-                      <a:pPr>
-                        <a:defRPr sz="1400"/>
-                      </a:pPr>
-                      <a:r>
-                        <a:t>F1</a:t>
-                      </a:r>
-                    </a:p>
-                  </a:txBody>
-                  <a:tcPr/>
-                </a:tc>
-                <a:tc>
-                  <a:txBody>
-                    <a:bodyPr/>
-                    <a:lstStyle/>
-                    <a:p>
-                      <a:pPr>
-                        <a:defRPr sz="1400"/>
-                      </a:pPr>
-                      <a:r>
-                        <a:t>False alarms on clean</a:t>
-                      </a:r>
-                    </a:p>
-                  </a:txBody>
-                  <a:tcPr/>
-                </a:tc>
-              </a:tr>
-              <a:tr h="457200">
-                <a:tc>
-                  <a:txBody>
-                    <a:bodyPr/>
-                    <a:lstStyle/>
-                    <a:p>
-                      <a:pPr>
-                        <a:defRPr sz="1400"/>
-                      </a:pPr>
-                      <a:r>
-                        <a:t>rules-only</a:t>
-                      </a:r>
-                    </a:p>
-                  </a:txBody>
-                  <a:tcPr/>
-                </a:tc>
-                <a:tc>
-                  <a:txBody>
-                    <a:bodyPr/>
-                    <a:lstStyle/>
-                    <a:p>
-                      <a:pPr>
-                        <a:defRPr sz="1400"/>
-                      </a:pPr>
-                      <a:r>
-                        <a:t>1.00</a:t>
-                      </a:r>
-                    </a:p>
-                  </a:txBody>
-                  <a:tcPr/>
-                </a:tc>
-                <a:tc>
-                  <a:txBody>
-                    <a:bodyPr/>
-                    <a:lstStyle/>
-                    <a:p>
-                      <a:pPr>
-                        <a:defRPr sz="1400"/>
-                      </a:pPr>
-                      <a:r>
-                        <a:t>0.39</a:t>
-                      </a:r>
-                    </a:p>
-                  </a:txBody>
-                  <a:tcPr/>
-                </a:tc>
-                <a:tc>
-                  <a:txBody>
-                    <a:bodyPr/>
-                    <a:lstStyle/>
-                    <a:p>
-                      <a:pPr>
-                        <a:defRPr sz="1400"/>
-                      </a:pPr>
-                      <a:r>
-                        <a:t>0.56</a:t>
-                      </a:r>
-                    </a:p>
-                  </a:txBody>
-                  <a:tcPr/>
-                </a:tc>
-                <a:tc>
-                  <a:txBody>
-                    <a:bodyPr/>
-                    <a:lstStyle/>
-                    <a:p>
-                      <a:pPr>
-                        <a:defRPr sz="1400"/>
-                      </a:pPr>
-                      <a:r>
-                        <a:t>0/4</a:t>
-                      </a:r>
-                    </a:p>
-                  </a:txBody>
-                  <a:tcPr/>
-                </a:tc>
-              </a:tr>
-              <a:tr h="457200">
-                <a:tc>
-                  <a:txBody>
-                    <a:bodyPr/>
-                    <a:lstStyle/>
-                    <a:p>
-                      <a:pPr>
-                        <a:defRPr sz="1400"/>
-                      </a:pPr>
-                      <a:r>
-                        <a:t>qwen2.5:7b + rules</a:t>
-                      </a:r>
-                    </a:p>
-                  </a:txBody>
-                  <a:tcPr/>
-                </a:tc>
-                <a:tc>
-                  <a:txBody>
-                    <a:bodyPr/>
-                    <a:lstStyle/>
-                    <a:p>
-                      <a:pPr>
-                        <a:defRPr sz="1400"/>
-                      </a:pPr>
-                      <a:r>
-                        <a:t>0.92</a:t>
-                      </a:r>
-                    </a:p>
-                  </a:txBody>
-                  <a:tcPr/>
-                </a:tc>
-                <a:tc>
-                  <a:txBody>
-                    <a:bodyPr/>
-                    <a:lstStyle/>
-                    <a:p>
-                      <a:pPr>
-                        <a:defRPr sz="1400"/>
-                      </a:pPr>
-                      <a:r>
-                        <a:t>0.92</a:t>
-                      </a:r>
-                    </a:p>
-                  </a:txBody>
-                  <a:tcPr/>
-                </a:tc>
-                <a:tc>
-                  <a:txBody>
-                    <a:bodyPr/>
-                    <a:lstStyle/>
-                    <a:p>
-                      <a:pPr>
-                        <a:defRPr sz="1400"/>
-                      </a:pPr>
-                      <a:r>
-                        <a:t>0.92</a:t>
-                      </a:r>
-                    </a:p>
-                  </a:txBody>
-                  <a:tcPr/>
-                </a:tc>
-                <a:tc>
-                  <a:txBody>
-                    <a:bodyPr/>
-                    <a:lstStyle/>
-                    <a:p>
-                      <a:pPr>
-                        <a:defRPr sz="1400"/>
-                      </a:pPr>
-                      <a:r>
-                        <a:t>0/4</a:t>
-                      </a:r>
-                    </a:p>
-                  </a:txBody>
-                  <a:tcPr/>
-                </a:tc>
-              </a:tr>
-              <a:tr h="457200">
-                <a:tc>
-                  <a:txBody>
-                    <a:bodyPr/>
-                    <a:lstStyle/>
-                    <a:p>
-                      <a:pPr>
-                        <a:defRPr sz="1400"/>
-                      </a:pPr>
-                      <a:r>
-                        <a:t>gemma3:4b + rules</a:t>
-                      </a:r>
-                    </a:p>
-                  </a:txBody>
-                  <a:tcPr/>
-                </a:tc>
-                <a:tc>
-                  <a:txBody>
-                    <a:bodyPr/>
-                    <a:lstStyle/>
-                    <a:p>
-                      <a:pPr>
-                        <a:defRPr sz="1400"/>
-                      </a:pPr>
-                      <a:r>
-                        <a:t>0.69</a:t>
-                      </a:r>
-                    </a:p>
-                  </a:txBody>
-                  <a:tcPr/>
-                </a:tc>
-                <a:tc>
-                  <a:txBody>
-                    <a:bodyPr/>
-                    <a:lstStyle/>
-                    <a:p>
-                      <a:pPr>
-                        <a:defRPr sz="1400"/>
-                      </a:pPr>
-                      <a:r>
-                        <a:t>0.69</a:t>
-                      </a:r>
-                    </a:p>
-                  </a:txBody>
-                  <a:tcPr/>
-                </a:tc>
-                <a:tc>
-                  <a:txBody>
-                    <a:bodyPr/>
-                    <a:lstStyle/>
-                    <a:p>
-                      <a:pPr>
-                        <a:defRPr sz="1400"/>
-                      </a:pPr>
-                      <a:r>
-                        <a:t>0.69</a:t>
-                      </a:r>
-                    </a:p>
-                  </a:txBody>
-                  <a:tcPr/>
-                </a:tc>
-                <a:tc>
-                  <a:txBody>
-                    <a:bodyPr/>
-                    <a:lstStyle/>
-                    <a:p>
-                      <a:pPr>
-                        <a:defRPr sz="1400"/>
-                      </a:pPr>
-                      <a:r>
-                        <a:t>2/4</a:t>
-                      </a:r>
-                    </a:p>
-                  </a:txBody>
-                  <a:tcPr/>
-                </a:tc>
-              </a:tr>
-              <a:tr h="457200">
-                <a:tc>
-                  <a:txBody>
-                    <a:bodyPr/>
-                    <a:lstStyle/>
-                    <a:p>
-                      <a:pPr>
-                        <a:defRPr sz="1400"/>
-                      </a:pPr>
-                      <a:r>
-                        <a:t>qwen3:8b + rules</a:t>
-                      </a:r>
-                    </a:p>
-                  </a:txBody>
-                  <a:tcPr/>
-                </a:tc>
-                <a:tc>
-                  <a:txBody>
-                    <a:bodyPr/>
-                    <a:lstStyle/>
-                    <a:p>
-                      <a:pPr>
-                        <a:defRPr sz="1400"/>
-                      </a:pPr>
-                      <a:r>
-                        <a:t>0.73</a:t>
-                      </a:r>
-                    </a:p>
-                  </a:txBody>
-                  <a:tcPr/>
-                </a:tc>
-                <a:tc>
-                  <a:txBody>
-                    <a:bodyPr/>
-                    <a:lstStyle/>
-                    <a:p>
-                      <a:pPr>
-                        <a:defRPr sz="1400"/>
-                      </a:pPr>
-                      <a:r>
-                        <a:t>0.85</a:t>
-                      </a:r>
-                    </a:p>
-                  </a:txBody>
-                  <a:tcPr/>
-                </a:tc>
-                <a:tc>
-                  <a:txBody>
-                    <a:bodyPr/>
-                    <a:lstStyle/>
-                    <a:p>
-                      <a:pPr>
-                        <a:defRPr sz="1400"/>
-                      </a:pPr>
-                      <a:r>
-                        <a:t>0.79</a:t>
-                      </a:r>
-                    </a:p>
-                  </a:txBody>
-                  <a:tcPr/>
-                </a:tc>
-                <a:tc>
-                  <a:txBody>
-                    <a:bodyPr/>
-                    <a:lstStyle/>
-                    <a:p>
-                      <a:pPr>
-                        <a:defRPr sz="1400"/>
-                      </a:pPr>
-                      <a:r>
-                        <a:t>0/4</a:t>
-                      </a:r>
-                    </a:p>
-                  </a:txBody>
-                  <a:tcPr/>
-                </a:tc>
-              </a:tr>
-            </a:tbl>
-          </a:graphicData>
-        </a:graphic>
-      </p:graphicFrame>
+                <a:spcPts val="800"/>
+              </a:spcAft>
+            </a:pPr>
+            <a:r>
+              <a:rPr sz="3000" b="1">
+                <a:solidFill>
+                  <a:srgbClr val="0B1220"/>
+                </a:solidFill>
+                <a:latin typeface="Inter"/>
+              </a:rPr>
+              <a:t>Real checks against SEBI's public registers</a:t>
+            </a:r>
+          </a:p>
+        </p:txBody>
+      </p:sp>
+      <p:pic>
+        <p:nvPicPr>
+          <p:cNvPr id="5" name="Picture 4" descr="crop_520_1040_profile.png"/>
+          <p:cNvPicPr>
+            <a:picLocks noChangeAspect="1"/>
+          </p:cNvPicPr>
+          <p:nvPr/>
+        </p:nvPicPr>
+        <p:blipFill>
+          <a:blip r:embed="rId2"/>
+          <a:stretch>
+            <a:fillRect/>
+          </a:stretch>
+        </p:blipFill>
+        <p:spPr>
+          <a:xfrm>
+            <a:off x="6400800" y="1417320"/>
+            <a:ext cx="5303520" cy="6726416"/>
+          </a:xfrm>
+          <a:prstGeom prst="rect">
+            <a:avLst/>
+          </a:prstGeom>
+          <a:ln>
+            <a:solidFill>
+              <a:srgbClr val="DDDAE8"/>
+            </a:solidFill>
+          </a:ln>
+        </p:spPr>
+      </p:pic>
       <p:sp>
         <p:nvSpPr>
           <p:cNvPr id="6" name="TextBox 5"/>
@@ -6149,8 +9450,8 @@
         </p:nvSpPr>
         <p:spPr>
           <a:xfrm>
-            <a:off x="8503920" y="1737360"/>
-            <a:ext cx="3291840" cy="4572000"/>
+            <a:off x="548640" y="1554480"/>
+            <a:ext cx="5669280" cy="5029200"/>
           </a:xfrm>
           <a:prstGeom prst="rect">
             <a:avLst/>
@@ -6167,15 +9468,24 @@
               <a:spcAft>
                 <a:spcPts val="1000"/>
               </a:spcAft>
-              <a:defRPr sz="1400" b="0">
-                <a:solidFill>
-                  <a:srgbClr val="475569"/>
-                </a:solidFill>
-                <a:latin typeface="Inter"/>
-              </a:defRPr>
-            </a:pPr>
-            <a:r>
-              <a:t>•  Hand-labelled Hindi / English / Hinglish snippets</a:t>
+            </a:pPr>
+            <a:r>
+              <a:rPr sz="1500" b="1">
+                <a:solidFill>
+                  <a:srgbClr val="FF7A1A"/>
+                </a:solidFill>
+                <a:latin typeface="Inter"/>
+              </a:rPr>
+              <a:t>•  </a:t>
+            </a:r>
+            <a:r>
+              <a:rPr sz="1500" b="0">
+                <a:solidFill>
+                  <a:srgbClr val="3B4559"/>
+                </a:solidFill>
+                <a:latin typeface="Inter"/>
+              </a:rPr>
+              <a:t>Local mirror of 5 SEBI registers: research analysts, investment advisers, portfolio managers, brokers, mutual funds (6,645 entities)</a:t>
             </a:r>
           </a:p>
           <a:p>
@@ -6183,15 +9493,24 @@
               <a:spcAft>
                 <a:spcPts val="1000"/>
               </a:spcAft>
-              <a:defRPr sz="1400" b="0">
-                <a:solidFill>
-                  <a:srgbClr val="475569"/>
-                </a:solidFill>
-                <a:latin typeface="Inter"/>
-              </a:defRPr>
-            </a:pPr>
-            <a:r>
-              <a:t>•  Held-out set written before tuning, never used for it</a:t>
+            </a:pPr>
+            <a:r>
+              <a:rPr sz="1500" b="1">
+                <a:solidFill>
+                  <a:srgbClr val="FF7A1A"/>
+                </a:solidFill>
+                <a:latin typeface="Inter"/>
+              </a:rPr>
+              <a:t>•  </a:t>
+            </a:r>
+            <a:r>
+              <a:rPr sz="1500" b="0">
+                <a:solidFill>
+                  <a:srgbClr val="3B4559"/>
+                </a:solidFill>
+                <a:latin typeface="Inter"/>
+              </a:rPr>
+              <a:t>Checks every registration number (typos too), the channel name, presenters and guest experts found by AI, and the creator's own website</a:t>
             </a:r>
           </a:p>
           <a:p>
@@ -6199,15 +9518,24 @@
               <a:spcAft>
                 <a:spcPts val="1000"/>
               </a:spcAft>
-              <a:defRPr sz="1400" b="0">
-                <a:solidFill>
-                  <a:srgbClr val="475569"/>
-                </a:solidFill>
-                <a:latin typeface="Inter"/>
-              </a:defRPr>
-            </a:pPr>
-            <a:r>
-              <a:t>•  Clean snippets (education, news, scam warnings) must raise nothing</a:t>
+            </a:pPr>
+            <a:r>
+              <a:rPr sz="1500" b="1">
+                <a:solidFill>
+                  <a:srgbClr val="FF7A1A"/>
+                </a:solidFill>
+                <a:latin typeface="Inter"/>
+              </a:rPr>
+              <a:t>•  </a:t>
+            </a:r>
+            <a:r>
+              <a:rPr sz="1500" b="0">
+                <a:solidFill>
+                  <a:srgbClr val="3B4559"/>
+                </a:solidFill>
+                <a:latin typeface="Inter"/>
+              </a:rPr>
+              <a:t>Clear verdicts: registered adviser · registered only as a broker (not allowed to give tips) · guest expert registered · not registered</a:t>
             </a:r>
           </a:p>
           <a:p>
@@ -6215,15 +9543,24 @@
               <a:spcAft>
                 <a:spcPts val="1000"/>
               </a:spcAft>
-              <a:defRPr sz="1400" b="0">
-                <a:solidFill>
-                  <a:srgbClr val="475569"/>
-                </a:solidFill>
-                <a:latin typeface="Inter"/>
-              </a:defRPr>
-            </a:pPr>
-            <a:r>
-              <a:t>•  Keyword rules alone miss most claims on unseen wording; the LLM generalises</a:t>
+            </a:pPr>
+            <a:r>
+              <a:rPr sz="1500" b="1">
+                <a:solidFill>
+                  <a:srgbClr val="FF7A1A"/>
+                </a:solidFill>
+                <a:latin typeface="Inter"/>
+              </a:rPr>
+              <a:t>•  </a:t>
+            </a:r>
+            <a:r>
+              <a:rPr sz="1500" b="0">
+                <a:solidFill>
+                  <a:srgbClr val="3B4559"/>
+                </a:solidFill>
+                <a:latin typeface="Inter"/>
+              </a:rPr>
+              <a:t>Shows exactly what was checked, so "not found" is evidence, not a failure</a:t>
             </a:r>
           </a:p>
         </p:txBody>
@@ -6242,7 +9579,7 @@
     <p:bg>
       <p:bgPr>
         <a:solidFill>
-          <a:srgbClr val="F8FAFC"/>
+          <a:srgbClr val="F6F4FB"/>
         </a:solidFill>
         <a:effectLst/>
       </p:bgPr>
@@ -6263,14 +9600,22 @@
         <p:spPr>
           <a:xfrm>
             <a:off x="0" y="0"/>
-            <a:ext cx="164592" cy="6858000"/>
-          </a:xfrm>
-          <a:prstGeom prst="rect">
-            <a:avLst/>
-          </a:prstGeom>
-          <a:solidFill>
-            <a:srgbClr val="F59E0B"/>
-          </a:solidFill>
+            <a:ext cx="12191695" cy="82296"/>
+          </a:xfrm>
+          <a:prstGeom prst="rect">
+            <a:avLst/>
+          </a:prstGeom>
+          <a:gradFill rotWithShape="1">
+            <a:gsLst>
+              <a:gs pos="0">
+                <a:srgbClr val="FF7A1A"/>
+              </a:gs>
+              <a:gs pos="100000">
+                <a:srgbClr val="7C4DFF"/>
+              </a:gs>
+            </a:gsLst>
+            <a:lin scaled="0" ang="0"/>
+          </a:gradFill>
           <a:ln>
             <a:noFill/>
           </a:ln>
@@ -6305,7 +9650,7 @@
         </p:nvSpPr>
         <p:spPr>
           <a:xfrm>
-            <a:off x="640080" y="365760"/>
+            <a:off x="548640" y="320040"/>
             <a:ext cx="10972800" cy="365760"/>
           </a:xfrm>
           <a:prstGeom prst="rect">
@@ -6321,17 +9666,17 @@
           <a:p>
             <a:pPr>
               <a:spcAft>
-                <a:spcPts val="400"/>
-              </a:spcAft>
-              <a:defRPr sz="1300" b="1">
-                <a:solidFill>
-                  <a:srgbClr val="F59E0B"/>
-                </a:solidFill>
-                <a:latin typeface="Inter"/>
-              </a:defRPr>
-            </a:pPr>
-            <a:r>
-              <a:t>TRUST &amp; COMPLIANCE</a:t>
+                <a:spcPts val="800"/>
+              </a:spcAft>
+            </a:pPr>
+            <a:r>
+              <a:rPr sz="1200" b="1">
+                <a:solidFill>
+                  <a:srgbClr val="FF7A1A"/>
+                </a:solidFill>
+                <a:latin typeface="Inter"/>
+              </a:rPr>
+              <a:t>ASK THE VIDEO</a:t>
             </a:r>
           </a:p>
         </p:txBody>
@@ -6344,8 +9689,8 @@
         </p:nvSpPr>
         <p:spPr>
           <a:xfrm>
-            <a:off x="640080" y="685800"/>
-            <a:ext cx="10972800" cy="822960"/>
+            <a:off x="548640" y="594360"/>
+            <a:ext cx="11155680" cy="914400"/>
           </a:xfrm>
           <a:prstGeom prst="rect">
             <a:avLst/>
@@ -6360,334 +9705,60 @@
           <a:p>
             <a:pPr>
               <a:spcAft>
-                <a:spcPts val="400"/>
-              </a:spcAft>
-              <a:defRPr sz="3200" b="1">
-                <a:solidFill>
-                  <a:srgbClr val="0F172A"/>
-                </a:solidFill>
-                <a:latin typeface="Inter"/>
-              </a:defRPr>
-            </a:pPr>
-            <a:r>
-              <a:t>Guardrails and privacy</a:t>
-            </a:r>
-          </a:p>
-        </p:txBody>
-      </p:sp>
-      <p:sp>
-        <p:nvSpPr>
-          <p:cNvPr id="5" name="Rounded Rectangle 4"/>
-          <p:cNvSpPr/>
-          <p:nvPr/>
-        </p:nvSpPr>
-        <p:spPr>
-          <a:xfrm>
-            <a:off x="640080" y="1737360"/>
-            <a:ext cx="3474720" cy="2194560"/>
-          </a:xfrm>
-          <a:prstGeom prst="roundRect">
-            <a:avLst>
-              <a:gd name="adj" fmla="val 8000"/>
-            </a:avLst>
-          </a:prstGeom>
-          <a:solidFill>
-            <a:srgbClr val="FFFFFF"/>
-          </a:solidFill>
+                <a:spcPts val="800"/>
+              </a:spcAft>
+            </a:pPr>
+            <a:r>
+              <a:rPr sz="3000" b="1">
+                <a:solidFill>
+                  <a:srgbClr val="0B1220"/>
+                </a:solidFill>
+                <a:latin typeface="Inter"/>
+              </a:rPr>
+              <a:t>Grounded answers, and a firm line on advice</a:t>
+            </a:r>
+          </a:p>
+        </p:txBody>
+      </p:sp>
+      <p:pic>
+        <p:nvPicPr>
+          <p:cNvPr id="5" name="Picture 4" descr="ask.png"/>
+          <p:cNvPicPr>
+            <a:picLocks noChangeAspect="1"/>
+          </p:cNvPicPr>
+          <p:nvPr/>
+        </p:nvPicPr>
+        <p:blipFill>
+          <a:blip r:embed="rId2"/>
+          <a:stretch>
+            <a:fillRect/>
+          </a:stretch>
+        </p:blipFill>
+        <p:spPr>
+          <a:xfrm>
+            <a:off x="548640" y="1463040"/>
+            <a:ext cx="7498079" cy="3280410"/>
+          </a:xfrm>
+          <a:prstGeom prst="rect">
+            <a:avLst/>
+          </a:prstGeom>
           <a:ln>
             <a:solidFill>
-              <a:srgbClr val="F59E0B"/>
+              <a:srgbClr val="DDDAE8"/>
             </a:solidFill>
           </a:ln>
         </p:spPr>
-        <p:style>
-          <a:lnRef idx="1">
-            <a:schemeClr val="accent1"/>
-          </a:lnRef>
-          <a:fillRef idx="3">
-            <a:schemeClr val="accent1"/>
-          </a:fillRef>
-          <a:effectRef idx="2">
-            <a:schemeClr val="accent1"/>
-          </a:effectRef>
-          <a:fontRef idx="minor">
-            <a:schemeClr val="lt1"/>
-          </a:fontRef>
-        </p:style>
-        <p:txBody>
-          <a:bodyPr rtlCol="0" anchor="ctr" wrap="square" lIns="137160" rIns="137160"/>
-          <a:lstStyle/>
-          <a:p>
-            <a:pPr algn="ctr">
-              <a:defRPr b="1" sz="1800">
-                <a:solidFill>
-                  <a:srgbClr val="0F172A"/>
-                </a:solidFill>
-              </a:defRPr>
-            </a:pPr>
-            <a:r>
-              <a:t>Never advises</a:t>
-            </a:r>
-          </a:p>
-          <a:p>
-            <a:pPr>
-              <a:spcBef>
-                <a:spcPts val="400"/>
-              </a:spcBef>
-              <a:defRPr sz="1400">
-                <a:solidFill>
-                  <a:srgbClr val="475569"/>
-                </a:solidFill>
-              </a:defRPr>
-            </a:pPr>
-            <a:r>
-              <a:t>No tips, predictions or buy/sell/hold views</a:t>
-            </a:r>
-          </a:p>
-          <a:p>
-            <a:pPr>
-              <a:spcBef>
-                <a:spcPts val="400"/>
-              </a:spcBef>
-              <a:defRPr sz="1400">
-                <a:solidFill>
-                  <a:srgbClr val="475569"/>
-                </a:solidFill>
-              </a:defRPr>
-            </a:pPr>
-            <a:r>
-              <a:t>Audits what is said, not whether a stock is good</a:t>
-            </a:r>
-          </a:p>
-          <a:p>
-            <a:pPr>
-              <a:spcBef>
-                <a:spcPts val="400"/>
-              </a:spcBef>
-              <a:defRPr sz="1400">
-                <a:solidFill>
-                  <a:srgbClr val="475569"/>
-                </a:solidFill>
-              </a:defRPr>
-            </a:pPr>
-            <a:r>
-              <a:t>Promotes no broker or product</a:t>
-            </a:r>
-          </a:p>
-        </p:txBody>
-      </p:sp>
-      <p:sp>
-        <p:nvSpPr>
-          <p:cNvPr id="6" name="Rounded Rectangle 5"/>
-          <p:cNvSpPr/>
-          <p:nvPr/>
-        </p:nvSpPr>
-        <p:spPr>
-          <a:xfrm>
-            <a:off x="4389120" y="1737360"/>
-            <a:ext cx="3474720" cy="2194560"/>
-          </a:xfrm>
-          <a:prstGeom prst="roundRect">
-            <a:avLst>
-              <a:gd name="adj" fmla="val 8000"/>
-            </a:avLst>
-          </a:prstGeom>
-          <a:solidFill>
-            <a:srgbClr val="FFFFFF"/>
-          </a:solidFill>
-          <a:ln>
-            <a:solidFill>
-              <a:srgbClr val="F59E0B"/>
-            </a:solidFill>
-          </a:ln>
-        </p:spPr>
-        <p:style>
-          <a:lnRef idx="1">
-            <a:schemeClr val="accent1"/>
-          </a:lnRef>
-          <a:fillRef idx="3">
-            <a:schemeClr val="accent1"/>
-          </a:fillRef>
-          <a:effectRef idx="2">
-            <a:schemeClr val="accent1"/>
-          </a:effectRef>
-          <a:fontRef idx="minor">
-            <a:schemeClr val="lt1"/>
-          </a:fontRef>
-        </p:style>
-        <p:txBody>
-          <a:bodyPr rtlCol="0" anchor="ctr" wrap="square" lIns="137160" rIns="137160"/>
-          <a:lstStyle/>
-          <a:p>
-            <a:pPr algn="ctr">
-              <a:defRPr b="1" sz="1800">
-                <a:solidFill>
-                  <a:srgbClr val="0F172A"/>
-                </a:solidFill>
-              </a:defRPr>
-            </a:pPr>
-            <a:r>
-              <a:t>Honest about uncertainty</a:t>
-            </a:r>
-          </a:p>
-          <a:p>
-            <a:pPr>
-              <a:spcBef>
-                <a:spcPts val="400"/>
-              </a:spcBef>
-              <a:defRPr sz="1400">
-                <a:solidFill>
-                  <a:srgbClr val="475569"/>
-                </a:solidFill>
-              </a:defRPr>
-            </a:pPr>
-            <a:r>
-              <a:t>Confidence on every finding</a:t>
-            </a:r>
-          </a:p>
-          <a:p>
-            <a:pPr>
-              <a:spcBef>
-                <a:spcPts val="400"/>
-              </a:spcBef>
-              <a:defRPr sz="1400">
-                <a:solidFill>
-                  <a:srgbClr val="475569"/>
-                </a:solidFill>
-              </a:defRPr>
-            </a:pPr>
-            <a:r>
-              <a:t>Weak signals hidden by default</a:t>
-            </a:r>
-          </a:p>
-          <a:p>
-            <a:pPr>
-              <a:spcBef>
-                <a:spcPts val="400"/>
-              </a:spcBef>
-              <a:defRPr sz="1400">
-                <a:solidFill>
-                  <a:srgbClr val="475569"/>
-                </a:solidFill>
-              </a:defRPr>
-            </a:pPr>
-            <a:r>
-              <a:t>Verbatim quote + timestamp to self-check</a:t>
-            </a:r>
-          </a:p>
-        </p:txBody>
-      </p:sp>
-      <p:sp>
-        <p:nvSpPr>
-          <p:cNvPr id="7" name="Rounded Rectangle 6"/>
-          <p:cNvSpPr/>
-          <p:nvPr/>
-        </p:nvSpPr>
-        <p:spPr>
-          <a:xfrm>
-            <a:off x="8138160" y="1737360"/>
-            <a:ext cx="3474720" cy="2194560"/>
-          </a:xfrm>
-          <a:prstGeom prst="roundRect">
-            <a:avLst>
-              <a:gd name="adj" fmla="val 8000"/>
-            </a:avLst>
-          </a:prstGeom>
-          <a:solidFill>
-            <a:srgbClr val="FFFFFF"/>
-          </a:solidFill>
-          <a:ln>
-            <a:solidFill>
-              <a:srgbClr val="F59E0B"/>
-            </a:solidFill>
-          </a:ln>
-        </p:spPr>
-        <p:style>
-          <a:lnRef idx="1">
-            <a:schemeClr val="accent1"/>
-          </a:lnRef>
-          <a:fillRef idx="3">
-            <a:schemeClr val="accent1"/>
-          </a:fillRef>
-          <a:effectRef idx="2">
-            <a:schemeClr val="accent1"/>
-          </a:effectRef>
-          <a:fontRef idx="minor">
-            <a:schemeClr val="lt1"/>
-          </a:fontRef>
-        </p:style>
-        <p:txBody>
-          <a:bodyPr rtlCol="0" anchor="ctr" wrap="square" lIns="137160" rIns="137160"/>
-          <a:lstStyle/>
-          <a:p>
-            <a:pPr algn="ctr">
-              <a:defRPr b="1" sz="1800">
-                <a:solidFill>
-                  <a:srgbClr val="0F172A"/>
-                </a:solidFill>
-              </a:defRPr>
-            </a:pPr>
-            <a:r>
-              <a:t>Private by design</a:t>
-            </a:r>
-          </a:p>
-          <a:p>
-            <a:pPr>
-              <a:spcBef>
-                <a:spcPts val="400"/>
-              </a:spcBef>
-              <a:defRPr sz="1400">
-                <a:solidFill>
-                  <a:srgbClr val="475569"/>
-                </a:solidFill>
-              </a:defRPr>
-            </a:pPr>
-            <a:r>
-              <a:t>All AI runs on the user's machine</a:t>
-            </a:r>
-          </a:p>
-          <a:p>
-            <a:pPr>
-              <a:spcBef>
-                <a:spcPts val="400"/>
-              </a:spcBef>
-              <a:defRPr sz="1400">
-                <a:solidFill>
-                  <a:srgbClr val="475569"/>
-                </a:solidFill>
-              </a:defRPr>
-            </a:pPr>
-            <a:r>
-              <a:t>No personal data collected</a:t>
-            </a:r>
-          </a:p>
-          <a:p>
-            <a:pPr>
-              <a:spcBef>
-                <a:spcPts val="400"/>
-              </a:spcBef>
-              <a:defRPr sz="1400">
-                <a:solidFill>
-                  <a:srgbClr val="475569"/>
-                </a:solidFill>
-              </a:defRPr>
-            </a:pPr>
-            <a:r>
-              <a:t>Uploads deleted after processing</a:t>
-            </a:r>
-          </a:p>
-        </p:txBody>
-      </p:sp>
-      <p:sp>
-        <p:nvSpPr>
-          <p:cNvPr id="8" name="TextBox 7"/>
+      </p:pic>
+      <p:sp>
+        <p:nvSpPr>
+          <p:cNvPr id="6" name="TextBox 5"/>
           <p:cNvSpPr txBox="1"/>
           <p:nvPr/>
         </p:nvSpPr>
         <p:spPr>
           <a:xfrm>
-            <a:off x="640080" y="4389120"/>
-            <a:ext cx="10972800" cy="1828800"/>
+            <a:off x="8321040" y="1554480"/>
+            <a:ext cx="3474720" cy="5029200"/>
           </a:xfrm>
           <a:prstGeom prst="rect">
             <a:avLst/>
@@ -6702,33 +9773,101 @@
           <a:p>
             <a:pPr>
               <a:spcAft>
-                <a:spcPts val="400"/>
-              </a:spcAft>
-              <a:defRPr sz="1700" b="0">
-                <a:solidFill>
-                  <a:srgbClr val="475569"/>
-                </a:solidFill>
-                <a:latin typeface="Inter"/>
-              </a:defRPr>
-            </a:pPr>
-            <a:r>
-              <a:t>Anti-hallucination: a finding is kept only if its quote is found in the transcript.</a:t>
-            </a:r>
-          </a:p>
-          <a:p>
-            <a:pPr>
-              <a:spcAft>
-                <a:spcPts val="400"/>
-              </a:spcAft>
-              <a:defRPr sz="1700" b="0">
-                <a:solidFill>
-                  <a:srgbClr val="475569"/>
-                </a:solidFill>
-                <a:latin typeface="Inter"/>
-              </a:defRPr>
-            </a:pPr>
-            <a:r>
-              <a:t>Name matches against the registry are labelled 'possible match – verify the number'.</a:t>
+                <a:spcPts val="1000"/>
+              </a:spcAft>
+            </a:pPr>
+            <a:r>
+              <a:rPr sz="1500" b="1">
+                <a:solidFill>
+                  <a:srgbClr val="FF7A1A"/>
+                </a:solidFill>
+                <a:latin typeface="Inter"/>
+              </a:rPr>
+              <a:t>•  </a:t>
+            </a:r>
+            <a:r>
+              <a:rPr sz="1500" b="0">
+                <a:solidFill>
+                  <a:srgbClr val="3B4559"/>
+                </a:solidFill>
+                <a:latin typeface="Inter"/>
+              </a:rPr>
+              <a:t>Questions in English or Hindi, typed or spoken (local Whisper)</a:t>
+            </a:r>
+          </a:p>
+          <a:p>
+            <a:pPr>
+              <a:spcAft>
+                <a:spcPts val="1000"/>
+              </a:spcAft>
+            </a:pPr>
+            <a:r>
+              <a:rPr sz="1500" b="1">
+                <a:solidFill>
+                  <a:srgbClr val="FF7A1A"/>
+                </a:solidFill>
+                <a:latin typeface="Inter"/>
+              </a:rPr>
+              <a:t>•  </a:t>
+            </a:r>
+            <a:r>
+              <a:rPr sz="1500" b="0">
+                <a:solidFill>
+                  <a:srgbClr val="3B4559"/>
+                </a:solidFill>
+                <a:latin typeface="Inter"/>
+              </a:rPr>
+              <a:t>Answers cite real transcript lines; made-up citations are dropped</a:t>
+            </a:r>
+          </a:p>
+          <a:p>
+            <a:pPr>
+              <a:spcAft>
+                <a:spcPts val="1000"/>
+              </a:spcAft>
+            </a:pPr>
+            <a:r>
+              <a:rPr sz="1500" b="1">
+                <a:solidFill>
+                  <a:srgbClr val="FF7A1A"/>
+                </a:solidFill>
+                <a:latin typeface="Inter"/>
+              </a:rPr>
+              <a:t>•  </a:t>
+            </a:r>
+            <a:r>
+              <a:rPr sz="1500" b="0">
+                <a:solidFill>
+                  <a:srgbClr val="3B4559"/>
+                </a:solidFill>
+                <a:latin typeface="Inter"/>
+              </a:rPr>
+              <a:t>"Should I buy?" / "Will it double?" are refused and redirected to the facts and registration status</a:t>
+            </a:r>
+          </a:p>
+          <a:p>
+            <a:pPr>
+              <a:spcAft>
+                <a:spcPts val="1000"/>
+              </a:spcAft>
+            </a:pPr>
+            <a:r>
+              <a:rPr sz="1500" b="1">
+                <a:solidFill>
+                  <a:srgbClr val="FF7A1A"/>
+                </a:solidFill>
+                <a:latin typeface="Inter"/>
+              </a:rPr>
+              <a:t>•  </a:t>
+            </a:r>
+            <a:r>
+              <a:rPr sz="1500" b="0">
+                <a:solidFill>
+                  <a:srgbClr val="3B4559"/>
+                </a:solidFill>
+                <a:latin typeface="Inter"/>
+              </a:rPr>
+              <a:t>Concept questions ("what is a stop-loss?") get labelled general explanations</a:t>
             </a:r>
           </a:p>
         </p:txBody>
@@ -6747,7 +9886,7 @@
     <p:bg>
       <p:bgPr>
         <a:solidFill>
-          <a:srgbClr val="F8FAFC"/>
+          <a:srgbClr val="F6F4FB"/>
         </a:solidFill>
         <a:effectLst/>
       </p:bgPr>
@@ -6768,14 +9907,22 @@
         <p:spPr>
           <a:xfrm>
             <a:off x="0" y="0"/>
-            <a:ext cx="164592" cy="6858000"/>
-          </a:xfrm>
-          <a:prstGeom prst="rect">
-            <a:avLst/>
-          </a:prstGeom>
-          <a:solidFill>
-            <a:srgbClr val="F59E0B"/>
-          </a:solidFill>
+            <a:ext cx="12191695" cy="82296"/>
+          </a:xfrm>
+          <a:prstGeom prst="rect">
+            <a:avLst/>
+          </a:prstGeom>
+          <a:gradFill rotWithShape="1">
+            <a:gsLst>
+              <a:gs pos="0">
+                <a:srgbClr val="FF7A1A"/>
+              </a:gs>
+              <a:gs pos="100000">
+                <a:srgbClr val="7C4DFF"/>
+              </a:gs>
+            </a:gsLst>
+            <a:lin scaled="0" ang="0"/>
+          </a:gradFill>
           <a:ln>
             <a:noFill/>
           </a:ln>
@@ -6810,7 +9957,7 @@
         </p:nvSpPr>
         <p:spPr>
           <a:xfrm>
-            <a:off x="640080" y="365760"/>
+            <a:off x="548640" y="320040"/>
             <a:ext cx="10972800" cy="365760"/>
           </a:xfrm>
           <a:prstGeom prst="rect">
@@ -6826,17 +9973,17 @@
           <a:p>
             <a:pPr>
               <a:spcAft>
-                <a:spcPts val="400"/>
-              </a:spcAft>
-              <a:defRPr sz="1300" b="1">
-                <a:solidFill>
-                  <a:srgbClr val="F59E0B"/>
-                </a:solidFill>
-                <a:latin typeface="Inter"/>
-              </a:defRPr>
-            </a:pPr>
-            <a:r>
-              <a:t>WHAT'S NEXT</a:t>
+                <a:spcPts val="800"/>
+              </a:spcAft>
+            </a:pPr>
+            <a:r>
+              <a:rPr sz="1200" b="1">
+                <a:solidFill>
+                  <a:srgbClr val="FF7A1A"/>
+                </a:solidFill>
+                <a:latin typeface="Inter"/>
+              </a:rPr>
+              <a:t>BHARAT-FIRST · 25% OF THE EVALUATION</a:t>
             </a:r>
           </a:p>
         </p:txBody>
@@ -6849,8 +9996,8 @@
         </p:nvSpPr>
         <p:spPr>
           <a:xfrm>
-            <a:off x="640080" y="685800"/>
-            <a:ext cx="10972800" cy="822960"/>
+            <a:off x="548640" y="594360"/>
+            <a:ext cx="11155680" cy="914400"/>
           </a:xfrm>
           <a:prstGeom prst="rect">
             <a:avLst/>
@@ -6865,31 +10012,89 @@
           <a:p>
             <a:pPr>
               <a:spcAft>
-                <a:spcPts val="400"/>
-              </a:spcAft>
-              <a:defRPr sz="3200" b="1">
-                <a:solidFill>
-                  <a:srgbClr val="0F172A"/>
-                </a:solidFill>
-                <a:latin typeface="Inter"/>
-              </a:defRPr>
-            </a:pPr>
-            <a:r>
-              <a:t>Impact and path to scale</a:t>
-            </a:r>
-          </a:p>
-        </p:txBody>
-      </p:sp>
-      <p:sp>
-        <p:nvSpPr>
-          <p:cNvPr id="5" name="TextBox 4"/>
+                <a:spcPts val="800"/>
+              </a:spcAft>
+            </a:pPr>
+            <a:r>
+              <a:rPr sz="3000" b="1">
+                <a:solidFill>
+                  <a:srgbClr val="0B1220"/>
+                </a:solidFill>
+                <a:latin typeface="Inter"/>
+              </a:rPr>
+              <a:t>Built for Hindi speakers and low-end phones</a:t>
+            </a:r>
+          </a:p>
+        </p:txBody>
+      </p:sp>
+      <p:pic>
+        <p:nvPicPr>
+          <p:cNvPr id="5" name="Picture 4" descr="crop_130_910_hindi.png"/>
+          <p:cNvPicPr>
+            <a:picLocks noChangeAspect="1"/>
+          </p:cNvPicPr>
+          <p:nvPr/>
+        </p:nvPicPr>
+        <p:blipFill>
+          <a:blip r:embed="rId2"/>
+          <a:stretch>
+            <a:fillRect/>
+          </a:stretch>
+        </p:blipFill>
+        <p:spPr>
+          <a:xfrm>
+            <a:off x="548640" y="1463040"/>
+            <a:ext cx="5852160" cy="3935073"/>
+          </a:xfrm>
+          <a:prstGeom prst="rect">
+            <a:avLst/>
+          </a:prstGeom>
+          <a:ln>
+            <a:solidFill>
+              <a:srgbClr val="DDDAE8"/>
+            </a:solidFill>
+          </a:ln>
+        </p:spPr>
+      </p:pic>
+      <p:pic>
+        <p:nvPicPr>
+          <p:cNvPr id="6" name="Picture 5" descr="mobile.png"/>
+          <p:cNvPicPr>
+            <a:picLocks noChangeAspect="1"/>
+          </p:cNvPicPr>
+          <p:nvPr/>
+        </p:nvPicPr>
+        <p:blipFill>
+          <a:blip r:embed="rId3"/>
+          <a:stretch>
+            <a:fillRect/>
+          </a:stretch>
+        </p:blipFill>
+        <p:spPr>
+          <a:xfrm>
+            <a:off x="6675120" y="1463040"/>
+            <a:ext cx="2281666" cy="4937760"/>
+          </a:xfrm>
+          <a:prstGeom prst="rect">
+            <a:avLst/>
+          </a:prstGeom>
+          <a:ln>
+            <a:solidFill>
+              <a:srgbClr val="DDDAE8"/>
+            </a:solidFill>
+          </a:ln>
+        </p:spPr>
+      </p:pic>
+      <p:sp>
+        <p:nvSpPr>
+          <p:cNvPr id="7" name="TextBox 6"/>
           <p:cNvSpPr txBox="1"/>
           <p:nvPr/>
         </p:nvSpPr>
         <p:spPr>
           <a:xfrm>
-            <a:off x="640080" y="1737360"/>
-            <a:ext cx="5486400" cy="4572000"/>
+            <a:off x="9052560" y="1554480"/>
+            <a:ext cx="2743200" cy="5029200"/>
           </a:xfrm>
           <a:prstGeom prst="rect">
             <a:avLst/>
@@ -6904,152 +10109,76 @@
           <a:p>
             <a:pPr>
               <a:spcAft>
-                <a:spcPts val="1000"/>
-              </a:spcAft>
-              <a:defRPr sz="1800" b="0">
-                <a:solidFill>
-                  <a:srgbClr val="0F172A"/>
-                </a:solidFill>
-                <a:latin typeface="Inter"/>
-              </a:defRPr>
-            </a:pPr>
-            <a:r>
-              <a:t>•  Zero marginal cost: runs on a single consumer GPU, no API bills</a:t>
-            </a:r>
-          </a:p>
-          <a:p>
-            <a:pPr>
-              <a:spcAft>
-                <a:spcPts val="1000"/>
-              </a:spcAft>
-              <a:defRPr sz="1800" b="0">
-                <a:solidFill>
-                  <a:srgbClr val="0F172A"/>
-                </a:solidFill>
-                <a:latin typeface="Inter"/>
-              </a:defRPr>
-            </a:pPr>
-            <a:r>
-              <a:t>•  Useful to investors, investor-awareness programmes, journalists and compliance teams triaging finfluencer content</a:t>
-            </a:r>
-          </a:p>
-          <a:p>
-            <a:pPr>
-              <a:spcAft>
-                <a:spcPts val="1000"/>
-              </a:spcAft>
-              <a:defRPr sz="1800" b="0">
-                <a:solidFill>
-                  <a:srgbClr val="0F172A"/>
-                </a:solidFill>
-                <a:latin typeface="Inter"/>
-              </a:defRPr>
-            </a:pPr>
-            <a:r>
-              <a:t>•  Open source (MIT): any institution can self-host it</a:t>
-            </a:r>
-          </a:p>
-        </p:txBody>
-      </p:sp>
-      <p:sp>
-        <p:nvSpPr>
-          <p:cNvPr id="6" name="TextBox 5"/>
-          <p:cNvSpPr txBox="1"/>
-          <p:nvPr/>
-        </p:nvSpPr>
-        <p:spPr>
-          <a:xfrm>
-            <a:off x="6400800" y="1737360"/>
-            <a:ext cx="5303520" cy="4572000"/>
-          </a:xfrm>
-          <a:prstGeom prst="rect">
-            <a:avLst/>
-          </a:prstGeom>
-          <a:noFill/>
-        </p:spPr>
-        <p:txBody>
-          <a:bodyPr wrap="square">
-            <a:spAutoFit/>
-          </a:bodyPr>
-          <a:lstStyle/>
-          <a:p>
-            <a:pPr>
-              <a:spcAft>
-                <a:spcPts val="1000"/>
-              </a:spcAft>
-              <a:defRPr sz="1800" b="0">
-                <a:solidFill>
-                  <a:srgbClr val="0F172A"/>
-                </a:solidFill>
-                <a:latin typeface="Inter"/>
-              </a:defRPr>
-            </a:pPr>
-            <a:r>
-              <a:t>•  Browser extension: audit badge right on YouTube</a:t>
-            </a:r>
-          </a:p>
-          <a:p>
-            <a:pPr>
-              <a:spcAft>
-                <a:spcPts val="1000"/>
-              </a:spcAft>
-              <a:defRPr sz="1800" b="0">
-                <a:solidFill>
-                  <a:srgbClr val="0F172A"/>
-                </a:solidFill>
-                <a:latin typeface="Inter"/>
-              </a:defRPr>
-            </a:pPr>
-            <a:r>
-              <a:t>•  Instagram Reels &amp; Telegram channel exports</a:t>
-            </a:r>
-          </a:p>
-          <a:p>
-            <a:pPr>
-              <a:spcAft>
-                <a:spcPts val="1000"/>
-              </a:spcAft>
-              <a:defRPr sz="1800" b="0">
-                <a:solidFill>
-                  <a:srgbClr val="0F172A"/>
-                </a:solidFill>
-                <a:latin typeface="Inter"/>
-              </a:defRPr>
-            </a:pPr>
-            <a:r>
-              <a:t>•  Tamil, Telugu, Bengali, Marathi via IndicTrans2</a:t>
-            </a:r>
-          </a:p>
-          <a:p>
-            <a:pPr>
-              <a:spcAft>
-                <a:spcPts val="1000"/>
-              </a:spcAft>
-              <a:defRPr sz="1800" b="0">
-                <a:solidFill>
-                  <a:srgbClr val="0F172A"/>
-                </a:solidFill>
-                <a:latin typeface="Inter"/>
-              </a:defRPr>
-            </a:pPr>
-            <a:r>
-              <a:t>•  Broker / MF-distributor registries</a:t>
-            </a:r>
-          </a:p>
-          <a:p>
-            <a:pPr>
-              <a:spcAft>
-                <a:spcPts val="1000"/>
-              </a:spcAft>
-              <a:defRPr sz="1800" b="0">
-                <a:solidFill>
-                  <a:srgbClr val="0F172A"/>
-                </a:solidFill>
-                <a:latin typeface="Inter"/>
-              </a:defRPr>
-            </a:pPr>
-            <a:r>
-              <a:t>•  Larger labelled dataset with volunteers</a:t>
+                <a:spcPts val="900"/>
+              </a:spcAft>
+            </a:pPr>
+            <a:r>
+              <a:rPr sz="1300" b="1">
+                <a:solidFill>
+                  <a:srgbClr val="FF7A1A"/>
+                </a:solidFill>
+                <a:latin typeface="Inter"/>
+              </a:rPr>
+              <a:t>•  </a:t>
+            </a:r>
+            <a:r>
+              <a:rPr sz="1300" b="0">
+                <a:solidFill>
+                  <a:srgbClr val="3B4559"/>
+                </a:solidFill>
+                <a:latin typeface="Inter"/>
+              </a:rPr>
+              <a:t>Full Hindi UI, explanations, summaries and PDF, written in everyday Hindi (style guide + glossary)</a:t>
+            </a:r>
+          </a:p>
+          <a:p>
+            <a:pPr>
+              <a:spcAft>
+                <a:spcPts val="900"/>
+              </a:spcAft>
+            </a:pPr>
+            <a:r>
+              <a:rPr sz="1300" b="1">
+                <a:solidFill>
+                  <a:srgbClr val="FF7A1A"/>
+                </a:solidFill>
+                <a:latin typeface="Inter"/>
+              </a:rPr>
+              <a:t>•  </a:t>
+            </a:r>
+            <a:r>
+              <a:rPr sz="1300" b="0">
+                <a:solidFill>
+                  <a:srgbClr val="3B4559"/>
+                </a:solidFill>
+                <a:latin typeface="Inter"/>
+              </a:rPr>
+              <a:t>Natural voice reads the summary aloud (Kokoro TTS, 4.1/5 naturalness in Hindi vs 1.4 for the browser voice)</a:t>
+            </a:r>
+          </a:p>
+          <a:p>
+            <a:pPr>
+              <a:spcAft>
+                <a:spcPts val="900"/>
+              </a:spcAft>
+            </a:pPr>
+            <a:r>
+              <a:rPr sz="1300" b="1">
+                <a:solidFill>
+                  <a:srgbClr val="FF7A1A"/>
+                </a:solidFill>
+                <a:latin typeface="Inter"/>
+              </a:rPr>
+              <a:t>•  </a:t>
+            </a:r>
+            <a:r>
+              <a:rPr sz="1300" b="0">
+                <a:solidFill>
+                  <a:srgbClr val="3B4559"/>
+                </a:solidFill>
+                <a:latin typeface="Inter"/>
+              </a:rPr>
+              <a:t>~300 KB web app: phone browser is enough; the AI runs on a server</a:t>
             </a:r>
           </a:p>
         </p:txBody>

--- a/presentation/Nirikshak.pptx
+++ b/presentation/Nirikshak.pptx
@@ -3355,7 +3355,7 @@
                 </a:solidFill>
                 <a:latin typeface="Inter"/>
               </a:rPr>
-              <a:t>huggingface.co/spaces/…/nirikshak</a:t>
+              <a:t>https://13-233-152-160.sslip.io</a:t>
             </a:r>
           </a:p>
           <a:p>
@@ -3380,7 +3380,7 @@
                 </a:solidFill>
                 <a:latin typeface="Inter"/>
               </a:rPr>
-              <a:t>github.com/RudraPandit0504/nirikshak</a:t>
+              <a:t>https://github.com/RudraPandit0504/nirikshak</a:t>
             </a:r>
           </a:p>
         </p:txBody>
@@ -4761,7 +4761,7 @@
                 </a:solidFill>
                 <a:latin typeface="Inter"/>
               </a:rPr>
-              <a:t>Hosted demo: same code with Google Gemini behind a server-side key and per-visitor limits.</a:t>
+              <a:t>Hosted demo on AWS (EC2, Mumbai): same code, AI via Amazon Bedrock with Groq/Gemini fallback, server-side keys, per-visitor limits.</a:t>
             </a:r>
           </a:p>
           <a:p>
@@ -6216,7 +6216,7 @@
                 </a:solidFill>
                 <a:latin typeface="Inter"/>
               </a:rPr>
-              <a:t>huggingface.co/spaces/…/nirikshak</a:t>
+              <a:t>https://13-233-152-160.sslip.io</a:t>
             </a:r>
           </a:p>
           <a:p>
@@ -6241,7 +6241,7 @@
                 </a:solidFill>
                 <a:latin typeface="Inter"/>
               </a:rPr>
-              <a:t>github.com/RudraPandit0504/nirikshak</a:t>
+              <a:t>https://github.com/RudraPandit0504/nirikshak</a:t>
             </a:r>
           </a:p>
         </p:txBody>
